--- a/media/exports/reports/2026-04/growth.pptx
+++ b/media/exports/reports/2026-04/growth.pptx
@@ -388,7 +388,9 @@
     <a:lstStyle/>
     <a:p>
       <a:pPr>
-        <a:defRPr sz="1800"/>
+        <a:defRPr sz="1800">
+          <a:latin typeface="Roboto"/>
+        </a:defRPr>
       </a:pPr>
       <a:endParaRPr/>
     </a:p>
@@ -654,7 +656,9 @@
     <a:lstStyle/>
     <a:p>
       <a:pPr>
-        <a:defRPr sz="1800"/>
+        <a:defRPr sz="1800">
+          <a:latin typeface="Roboto"/>
+        </a:defRPr>
       </a:pPr>
       <a:endParaRPr/>
     </a:p>
@@ -920,7 +924,9 @@
     <a:lstStyle/>
     <a:p>
       <a:pPr>
-        <a:defRPr sz="1800"/>
+        <a:defRPr sz="1800">
+          <a:latin typeface="Roboto"/>
+        </a:defRPr>
       </a:pPr>
       <a:endParaRPr/>
     </a:p>
@@ -1186,7 +1192,9 @@
     <a:lstStyle/>
     <a:p>
       <a:pPr>
-        <a:defRPr sz="1800"/>
+        <a:defRPr sz="1800">
+          <a:latin typeface="Roboto"/>
+        </a:defRPr>
       </a:pPr>
       <a:endParaRPr/>
     </a:p>
@@ -4217,11 +4225,17 @@
           <a:bodyPr rtlCol="0" anchor="ctr"/>
           <a:lstStyle/>
           <a:p>
+            <a:pPr>
+              <a:defRPr>
+                <a:latin typeface="Roboto"/>
+              </a:defRPr>
+            </a:pPr>
             <a:r>
               <a:rPr sz="1600" b="1">
                 <a:solidFill>
                   <a:srgbClr val="FFFFFF"/>
                 </a:solidFill>
+                <a:latin typeface="Roboto"/>
               </a:rPr>
               <a:t>4th</a:t>
             </a:r>
@@ -4250,14 +4264,19 @@
           </a:bodyPr>
           <a:lstStyle/>
           <a:p>
+            <a:pPr>
+              <a:defRPr>
+                <a:latin typeface="Roboto"/>
+              </a:defRPr>
+            </a:pPr>
             <a:r>
               <a:rPr sz="1800" b="1">
                 <a:solidFill>
                   <a:srgbClr val="25342A"/>
                 </a:solidFill>
-                <a:latin typeface="Arial"/>
-              </a:rPr>
-              <a:t>The 4th Sheet</a:t>
+                <a:latin typeface="Roboto"/>
+              </a:rPr>
+              <a:t>The Fourth Sheet</a:t>
             </a:r>
           </a:p>
         </p:txBody>
@@ -4284,12 +4303,17 @@
           </a:bodyPr>
           <a:lstStyle/>
           <a:p>
+            <a:pPr>
+              <a:defRPr>
+                <a:latin typeface="Roboto"/>
+              </a:defRPr>
+            </a:pPr>
             <a:r>
               <a:rPr sz="1100" b="1">
                 <a:solidFill>
                   <a:srgbClr val="8A7A52"/>
                 </a:solidFill>
-                <a:latin typeface="Arial"/>
+                <a:latin typeface="Roboto"/>
               </a:rPr>
               <a:t>SAMPLE DATA · invented figures for demonstration</a:t>
             </a:r>
@@ -4318,12 +4342,17 @@
           </a:bodyPr>
           <a:lstStyle/>
           <a:p>
+            <a:pPr>
+              <a:defRPr>
+                <a:latin typeface="Roboto"/>
+              </a:defRPr>
+            </a:pPr>
             <a:r>
               <a:rPr sz="3400" b="1">
                 <a:solidFill>
                   <a:srgbClr val="25342A"/>
                 </a:solidFill>
-                <a:latin typeface="Arial"/>
+                <a:latin typeface="Roboto"/>
               </a:rPr>
               <a:t>Which products and services are growing?</a:t>
             </a:r>
@@ -4352,12 +4381,17 @@
           </a:bodyPr>
           <a:lstStyle/>
           <a:p>
+            <a:pPr>
+              <a:defRPr>
+                <a:latin typeface="Roboto"/>
+              </a:defRPr>
+            </a:pPr>
             <a:r>
               <a:rPr sz="1600" b="0">
                 <a:solidFill>
                   <a:srgbClr val="5F6F63"/>
                 </a:solidFill>
-                <a:latin typeface="Arial"/>
+                <a:latin typeface="Roboto"/>
               </a:rPr>
               <a:t>SME sample businesses</a:t>
             </a:r>
@@ -4386,12 +4420,17 @@
           </a:bodyPr>
           <a:lstStyle/>
           <a:p>
+            <a:pPr>
+              <a:defRPr>
+                <a:latin typeface="Roboto"/>
+              </a:defRPr>
+            </a:pPr>
             <a:r>
               <a:rPr sz="1400" b="0">
                 <a:solidFill>
                   <a:srgbClr val="25342A"/>
                 </a:solidFill>
-                <a:latin typeface="Arial"/>
+                <a:latin typeface="Roboto"/>
               </a:rPr>
               <a:t>Period: April 2026. Revenue, gross margin and growth (year on year) by product or service line over 24 months. Pick a line and every number, chart and note follows it.</a:t>
             </a:r>
@@ -4420,45 +4459,65 @@
           </a:bodyPr>
           <a:lstStyle/>
           <a:p>
+            <a:pPr>
+              <a:defRPr>
+                <a:latin typeface="Roboto"/>
+              </a:defRPr>
+            </a:pPr>
             <a:r>
               <a:rPr sz="1100" b="0">
                 <a:solidFill>
                   <a:srgbClr val="5F6F63"/>
                 </a:solidFill>
-                <a:latin typeface="Arial"/>
+                <a:latin typeface="Roboto"/>
               </a:rPr>
               <a:t>How final is this data?</a:t>
             </a:r>
           </a:p>
           <a:p>
+            <a:pPr>
+              <a:defRPr>
+                <a:latin typeface="Roboto"/>
+              </a:defRPr>
+            </a:pPr>
             <a:r>
               <a:rPr sz="1100" b="0">
                 <a:solidFill>
                   <a:srgbClr val="5F6F63"/>
                 </a:solidFill>
-                <a:latin typeface="Arial"/>
+                <a:latin typeface="Roboto"/>
               </a:rPr>
               <a:t>March 2026: Locked. March 2026 is locked (closed 2 Apr 2026). These numbers won't change.</a:t>
             </a:r>
           </a:p>
           <a:p>
+            <a:pPr>
+              <a:defRPr>
+                <a:latin typeface="Roboto"/>
+              </a:defRPr>
+            </a:pPr>
             <a:r>
               <a:rPr sz="1100" b="0">
                 <a:solidFill>
                   <a:srgbClr val="5F6F63"/>
                 </a:solidFill>
-                <a:latin typeface="Arial"/>
+                <a:latin typeface="Roboto"/>
               </a:rPr>
               <a:t>April 2026: Locked. April 2026 is locked (closed 5 May 2026). These numbers won't change.</a:t>
             </a:r>
           </a:p>
           <a:p>
+            <a:pPr>
+              <a:defRPr>
+                <a:latin typeface="Roboto"/>
+              </a:defRPr>
+            </a:pPr>
             <a:r>
               <a:rPr sz="1100" b="0">
                 <a:solidFill>
                   <a:srgbClr val="5F6F63"/>
                 </a:solidFill>
-                <a:latin typeface="Arial"/>
+                <a:latin typeface="Roboto"/>
               </a:rPr>
               <a:t>October 2026: Incomplete. October 2026 is still in progress: figures to 6 Oct only.</a:t>
             </a:r>
@@ -4487,12 +4546,17 @@
           </a:bodyPr>
           <a:lstStyle/>
           <a:p>
+            <a:pPr>
+              <a:defRPr>
+                <a:latin typeface="Roboto"/>
+              </a:defRPr>
+            </a:pPr>
             <a:r>
               <a:rPr sz="900" b="0">
                 <a:solidFill>
                   <a:srgbClr val="5F6F63"/>
                 </a:solidFill>
-                <a:latin typeface="Arial"/>
+                <a:latin typeface="Roboto"/>
               </a:rPr>
               <a:t>growth.pptx</a:t>
             </a:r>
@@ -4521,13 +4585,17 @@
           </a:bodyPr>
           <a:lstStyle/>
           <a:p>
-            <a:pPr algn="ctr"/>
+            <a:pPr algn="ctr">
+              <a:defRPr>
+                <a:latin typeface="Roboto"/>
+              </a:defRPr>
+            </a:pPr>
             <a:r>
               <a:rPr sz="900" b="0">
                 <a:solidFill>
                   <a:srgbClr val="5F6F63"/>
                 </a:solidFill>
-                <a:latin typeface="Arial"/>
+                <a:latin typeface="Roboto"/>
               </a:rPr>
               <a:t>Data retrieved 2pm, Tue 6 Oct 2026 · Sample data</a:t>
             </a:r>
@@ -4556,13 +4624,17 @@
           </a:bodyPr>
           <a:lstStyle/>
           <a:p>
-            <a:pPr algn="r"/>
+            <a:pPr algn="r">
+              <a:defRPr>
+                <a:latin typeface="Roboto"/>
+              </a:defRPr>
+            </a:pPr>
             <a:r>
               <a:rPr sz="900" b="0">
                 <a:solidFill>
                   <a:srgbClr val="5F6F63"/>
                 </a:solidFill>
-                <a:latin typeface="Arial"/>
+                <a:latin typeface="Roboto"/>
               </a:rPr>
               <a:t>Slide 1 of 27</a:t>
             </a:r>
@@ -4626,7 +4698,11 @@
           <a:bodyPr rtlCol="0" anchor="ctr"/>
           <a:lstStyle/>
           <a:p>
-            <a:pPr algn="ctr"/>
+            <a:pPr algn="ctr">
+              <a:defRPr>
+                <a:latin typeface="Roboto"/>
+              </a:defRPr>
+            </a:pPr>
           </a:p>
         </p:txBody>
       </p:sp>
@@ -4652,12 +4728,17 @@
           </a:bodyPr>
           <a:lstStyle/>
           <a:p>
+            <a:pPr>
+              <a:defRPr>
+                <a:latin typeface="Roboto"/>
+              </a:defRPr>
+            </a:pPr>
             <a:r>
               <a:rPr sz="1000" b="0">
                 <a:solidFill>
                   <a:srgbClr val="5F6F63"/>
                 </a:solidFill>
-                <a:latin typeface="Arial"/>
+                <a:latin typeface="Roboto"/>
               </a:rPr>
               <a:t>SME sample businesses · Which products and services are growing?</a:t>
             </a:r>
@@ -4686,12 +4767,17 @@
           </a:bodyPr>
           <a:lstStyle/>
           <a:p>
+            <a:pPr>
+              <a:defRPr>
+                <a:latin typeface="Roboto"/>
+              </a:defRPr>
+            </a:pPr>
             <a:r>
               <a:rPr sz="2400" b="1">
                 <a:solidFill>
                   <a:srgbClr val="25342A"/>
                 </a:solidFill>
-                <a:latin typeface="Arial"/>
+                <a:latin typeface="Roboto"/>
               </a:rPr>
               <a:t>Headline numbers · Trades · Line: Call-outs and repairs</a:t>
             </a:r>
@@ -4739,7 +4825,11 @@
           <a:bodyPr rtlCol="0" anchor="ctr"/>
           <a:lstStyle/>
           <a:p>
-            <a:pPr algn="ctr"/>
+            <a:pPr algn="ctr">
+              <a:defRPr>
+                <a:latin typeface="Roboto"/>
+              </a:defRPr>
+            </a:pPr>
           </a:p>
         </p:txBody>
       </p:sp>
@@ -4765,12 +4855,17 @@
           </a:bodyPr>
           <a:lstStyle/>
           <a:p>
+            <a:pPr>
+              <a:defRPr>
+                <a:latin typeface="Roboto"/>
+              </a:defRPr>
+            </a:pPr>
             <a:r>
               <a:rPr sz="1200" b="0">
                 <a:solidFill>
                   <a:srgbClr val="5F6F63"/>
                 </a:solidFill>
-                <a:latin typeface="Arial"/>
+                <a:latin typeface="Roboto"/>
               </a:rPr>
               <a:t>April against April last year</a:t>
             </a:r>
@@ -4799,12 +4894,17 @@
           </a:bodyPr>
           <a:lstStyle/>
           <a:p>
+            <a:pPr>
+              <a:defRPr>
+                <a:latin typeface="Roboto"/>
+              </a:defRPr>
+            </a:pPr>
             <a:r>
               <a:rPr sz="3000" b="1">
                 <a:solidFill>
                   <a:srgbClr val="2F7A5D"/>
                 </a:solidFill>
-                <a:latin typeface="Arial"/>
+                <a:latin typeface="Roboto"/>
               </a:rPr>
               <a:t>5.5%</a:t>
             </a:r>
@@ -4833,12 +4933,17 @@
           </a:bodyPr>
           <a:lstStyle/>
           <a:p>
+            <a:pPr>
+              <a:defRPr>
+                <a:latin typeface="Roboto"/>
+              </a:defRPr>
+            </a:pPr>
             <a:r>
               <a:rPr sz="1100" b="0">
                 <a:solidFill>
                   <a:srgbClr val="5F6F63"/>
                 </a:solidFill>
-                <a:latin typeface="Arial"/>
+                <a:latin typeface="Roboto"/>
               </a:rPr>
               <a:t>$23,087 against $21,875</a:t>
             </a:r>
@@ -4886,7 +4991,11 @@
           <a:bodyPr rtlCol="0" anchor="ctr"/>
           <a:lstStyle/>
           <a:p>
-            <a:pPr algn="ctr"/>
+            <a:pPr algn="ctr">
+              <a:defRPr>
+                <a:latin typeface="Roboto"/>
+              </a:defRPr>
+            </a:pPr>
           </a:p>
         </p:txBody>
       </p:sp>
@@ -4912,12 +5021,17 @@
           </a:bodyPr>
           <a:lstStyle/>
           <a:p>
+            <a:pPr>
+              <a:defRPr>
+                <a:latin typeface="Roboto"/>
+              </a:defRPr>
+            </a:pPr>
             <a:r>
               <a:rPr sz="1200" b="0">
                 <a:solidFill>
                   <a:srgbClr val="5F6F63"/>
                 </a:solidFill>
-                <a:latin typeface="Arial"/>
+                <a:latin typeface="Roboto"/>
               </a:rPr>
               <a:t>Year to date (Jul to Apr 2026)</a:t>
             </a:r>
@@ -4946,12 +5060,17 @@
           </a:bodyPr>
           <a:lstStyle/>
           <a:p>
+            <a:pPr>
+              <a:defRPr>
+                <a:latin typeface="Roboto"/>
+              </a:defRPr>
+            </a:pPr>
             <a:r>
               <a:rPr sz="3000" b="1">
                 <a:solidFill>
                   <a:srgbClr val="2F7A5D"/>
                 </a:solidFill>
-                <a:latin typeface="Arial"/>
+                <a:latin typeface="Roboto"/>
               </a:rPr>
               <a:t>$243,781</a:t>
             </a:r>
@@ -4980,12 +5099,17 @@
           </a:bodyPr>
           <a:lstStyle/>
           <a:p>
+            <a:pPr>
+              <a:defRPr>
+                <a:latin typeface="Roboto"/>
+              </a:defRPr>
+            </a:pPr>
             <a:r>
               <a:rPr sz="1100" b="0">
                 <a:solidFill>
                   <a:srgbClr val="5F6F63"/>
                 </a:solidFill>
-                <a:latin typeface="Arial"/>
+                <a:latin typeface="Roboto"/>
               </a:rPr>
               <a:t>same period last year: not in the data</a:t>
             </a:r>
@@ -5033,7 +5157,11 @@
           <a:bodyPr rtlCol="0" anchor="ctr"/>
           <a:lstStyle/>
           <a:p>
-            <a:pPr algn="ctr"/>
+            <a:pPr algn="ctr">
+              <a:defRPr>
+                <a:latin typeface="Roboto"/>
+              </a:defRPr>
+            </a:pPr>
           </a:p>
         </p:txBody>
       </p:sp>
@@ -5059,12 +5187,17 @@
           </a:bodyPr>
           <a:lstStyle/>
           <a:p>
+            <a:pPr>
+              <a:defRPr>
+                <a:latin typeface="Roboto"/>
+              </a:defRPr>
+            </a:pPr>
             <a:r>
               <a:rPr sz="1200" b="0">
                 <a:solidFill>
                   <a:srgbClr val="5F6F63"/>
                 </a:solidFill>
-                <a:latin typeface="Arial"/>
+                <a:latin typeface="Roboto"/>
               </a:rPr>
               <a:t>Gross margin, year to date</a:t>
             </a:r>
@@ -5093,12 +5226,17 @@
           </a:bodyPr>
           <a:lstStyle/>
           <a:p>
+            <a:pPr>
+              <a:defRPr>
+                <a:latin typeface="Roboto"/>
+              </a:defRPr>
+            </a:pPr>
             <a:r>
               <a:rPr sz="3000" b="1">
                 <a:solidFill>
                   <a:srgbClr val="2F7A5D"/>
                 </a:solidFill>
-                <a:latin typeface="Arial"/>
+                <a:latin typeface="Roboto"/>
               </a:rPr>
               <a:t>43.7%</a:t>
             </a:r>
@@ -5127,12 +5265,17 @@
           </a:bodyPr>
           <a:lstStyle/>
           <a:p>
+            <a:pPr>
+              <a:defRPr>
+                <a:latin typeface="Roboto"/>
+              </a:defRPr>
+            </a:pPr>
             <a:r>
               <a:rPr sz="1100" b="0">
                 <a:solidFill>
                   <a:srgbClr val="5F6F63"/>
                 </a:solidFill>
-                <a:latin typeface="Arial"/>
+                <a:latin typeface="Roboto"/>
               </a:rPr>
               <a:t>$106,499 before overheads</a:t>
             </a:r>
@@ -5161,12 +5304,17 @@
           </a:bodyPr>
           <a:lstStyle/>
           <a:p>
+            <a:pPr>
+              <a:defRPr>
+                <a:latin typeface="Roboto"/>
+              </a:defRPr>
+            </a:pPr>
             <a:r>
               <a:rPr sz="900" b="0">
                 <a:solidFill>
                   <a:srgbClr val="5F6F63"/>
                 </a:solidFill>
-                <a:latin typeface="Arial"/>
+                <a:latin typeface="Roboto"/>
               </a:rPr>
               <a:t>growth.pptx</a:t>
             </a:r>
@@ -5195,13 +5343,17 @@
           </a:bodyPr>
           <a:lstStyle/>
           <a:p>
-            <a:pPr algn="ctr"/>
+            <a:pPr algn="ctr">
+              <a:defRPr>
+                <a:latin typeface="Roboto"/>
+              </a:defRPr>
+            </a:pPr>
             <a:r>
               <a:rPr sz="900" b="0">
                 <a:solidFill>
                   <a:srgbClr val="5F6F63"/>
                 </a:solidFill>
-                <a:latin typeface="Arial"/>
+                <a:latin typeface="Roboto"/>
               </a:rPr>
               <a:t>Data retrieved 2pm, Tue 6 Oct 2026 · Sample data</a:t>
             </a:r>
@@ -5230,13 +5382,17 @@
           </a:bodyPr>
           <a:lstStyle/>
           <a:p>
-            <a:pPr algn="r"/>
+            <a:pPr algn="r">
+              <a:defRPr>
+                <a:latin typeface="Roboto"/>
+              </a:defRPr>
+            </a:pPr>
             <a:r>
               <a:rPr sz="900" b="0">
                 <a:solidFill>
                   <a:srgbClr val="5F6F63"/>
                 </a:solidFill>
-                <a:latin typeface="Arial"/>
+                <a:latin typeface="Roboto"/>
               </a:rPr>
               <a:t>Slide 10 of 27</a:t>
             </a:r>
@@ -5300,7 +5456,11 @@
           <a:bodyPr rtlCol="0" anchor="ctr"/>
           <a:lstStyle/>
           <a:p>
-            <a:pPr algn="ctr"/>
+            <a:pPr algn="ctr">
+              <a:defRPr>
+                <a:latin typeface="Roboto"/>
+              </a:defRPr>
+            </a:pPr>
           </a:p>
         </p:txBody>
       </p:sp>
@@ -5326,12 +5486,17 @@
           </a:bodyPr>
           <a:lstStyle/>
           <a:p>
+            <a:pPr>
+              <a:defRPr>
+                <a:latin typeface="Roboto"/>
+              </a:defRPr>
+            </a:pPr>
             <a:r>
               <a:rPr sz="1000" b="0">
                 <a:solidFill>
                   <a:srgbClr val="5F6F63"/>
                 </a:solidFill>
-                <a:latin typeface="Arial"/>
+                <a:latin typeface="Roboto"/>
               </a:rPr>
               <a:t>SME sample businesses · Which products and services are growing?</a:t>
             </a:r>
@@ -5360,12 +5525,17 @@
           </a:bodyPr>
           <a:lstStyle/>
           <a:p>
+            <a:pPr>
+              <a:defRPr>
+                <a:latin typeface="Roboto"/>
+              </a:defRPr>
+            </a:pPr>
             <a:r>
               <a:rPr sz="2400" b="1">
                 <a:solidFill>
                   <a:srgbClr val="25342A"/>
                 </a:solidFill>
-                <a:latin typeface="Arial"/>
+                <a:latin typeface="Roboto"/>
               </a:rPr>
               <a:t>What it shows · Trades · Line: Call-outs and repairs</a:t>
             </a:r>
@@ -5413,7 +5583,11 @@
           <a:bodyPr rtlCol="0" anchor="ctr"/>
           <a:lstStyle/>
           <a:p>
-            <a:pPr algn="ctr"/>
+            <a:pPr algn="ctr">
+              <a:defRPr>
+                <a:latin typeface="Roboto"/>
+              </a:defRPr>
+            </a:pPr>
           </a:p>
         </p:txBody>
       </p:sp>
@@ -5439,12 +5613,17 @@
           </a:bodyPr>
           <a:lstStyle/>
           <a:p>
+            <a:pPr>
+              <a:defRPr>
+                <a:latin typeface="Roboto"/>
+              </a:defRPr>
+            </a:pPr>
             <a:r>
               <a:rPr sz="1100" b="1">
                 <a:solidFill>
                   <a:srgbClr val="5F6F63"/>
                 </a:solidFill>
-                <a:latin typeface="Arial"/>
+                <a:latin typeface="Roboto"/>
               </a:rPr>
               <a:t>WHAT IT SHOWS</a:t>
             </a:r>
@@ -5473,12 +5652,17 @@
           </a:bodyPr>
           <a:lstStyle/>
           <a:p>
+            <a:pPr>
+              <a:defRPr>
+                <a:latin typeface="Roboto"/>
+              </a:defRPr>
+            </a:pPr>
             <a:r>
               <a:rPr sz="1600" b="0">
                 <a:solidFill>
                   <a:srgbClr val="25342A"/>
                 </a:solidFill>
-                <a:latin typeface="Arial"/>
+                <a:latin typeface="Roboto"/>
               </a:rPr>
               <a:t>Call-outs and repairs brought in $243,781 this financial year to date, at a 43.7% gross margin (above the 37.6% overall).</a:t>
             </a:r>
@@ -5526,7 +5710,11 @@
           <a:bodyPr rtlCol="0" anchor="ctr"/>
           <a:lstStyle/>
           <a:p>
-            <a:pPr algn="ctr"/>
+            <a:pPr algn="ctr">
+              <a:defRPr>
+                <a:latin typeface="Roboto"/>
+              </a:defRPr>
+            </a:pPr>
           </a:p>
         </p:txBody>
       </p:sp>
@@ -5552,12 +5740,17 @@
           </a:bodyPr>
           <a:lstStyle/>
           <a:p>
+            <a:pPr>
+              <a:defRPr>
+                <a:latin typeface="Roboto"/>
+              </a:defRPr>
+            </a:pPr>
             <a:r>
               <a:rPr sz="1100" b="1">
                 <a:solidFill>
                   <a:srgbClr val="5F6F63"/>
                 </a:solidFill>
-                <a:latin typeface="Arial"/>
+                <a:latin typeface="Roboto"/>
               </a:rPr>
               <a:t>WHAT YOU'D DO ABOUT IT</a:t>
             </a:r>
@@ -5586,12 +5779,17 @@
           </a:bodyPr>
           <a:lstStyle/>
           <a:p>
+            <a:pPr>
+              <a:defRPr>
+                <a:latin typeface="Roboto"/>
+              </a:defRPr>
+            </a:pPr>
             <a:r>
               <a:rPr sz="1600" b="0">
                 <a:solidFill>
                   <a:srgbClr val="25342A"/>
                 </a:solidFill>
-                <a:latin typeface="Arial"/>
+                <a:latin typeface="Roboto"/>
               </a:rPr>
               <a:t>Call-outs and repairs: 43.7% gross margin, 3.8 points clear of the 39.8% overheads need.</a:t>
             </a:r>
@@ -5620,12 +5818,17 @@
           </a:bodyPr>
           <a:lstStyle/>
           <a:p>
+            <a:pPr>
+              <a:defRPr>
+                <a:latin typeface="Roboto"/>
+              </a:defRPr>
+            </a:pPr>
             <a:r>
               <a:rPr sz="900" b="0">
                 <a:solidFill>
                   <a:srgbClr val="5F6F63"/>
                 </a:solidFill>
-                <a:latin typeface="Arial"/>
+                <a:latin typeface="Roboto"/>
               </a:rPr>
               <a:t>growth.pptx</a:t>
             </a:r>
@@ -5654,13 +5857,17 @@
           </a:bodyPr>
           <a:lstStyle/>
           <a:p>
-            <a:pPr algn="ctr"/>
+            <a:pPr algn="ctr">
+              <a:defRPr>
+                <a:latin typeface="Roboto"/>
+              </a:defRPr>
+            </a:pPr>
             <a:r>
               <a:rPr sz="900" b="0">
                 <a:solidFill>
                   <a:srgbClr val="5F6F63"/>
                 </a:solidFill>
-                <a:latin typeface="Arial"/>
+                <a:latin typeface="Roboto"/>
               </a:rPr>
               <a:t>Data retrieved 2pm, Tue 6 Oct 2026 · Sample data</a:t>
             </a:r>
@@ -5689,13 +5896,17 @@
           </a:bodyPr>
           <a:lstStyle/>
           <a:p>
-            <a:pPr algn="r"/>
+            <a:pPr algn="r">
+              <a:defRPr>
+                <a:latin typeface="Roboto"/>
+              </a:defRPr>
+            </a:pPr>
             <a:r>
               <a:rPr sz="900" b="0">
                 <a:solidFill>
                   <a:srgbClr val="5F6F63"/>
                 </a:solidFill>
-                <a:latin typeface="Arial"/>
+                <a:latin typeface="Roboto"/>
               </a:rPr>
               <a:t>Slide 11 of 27</a:t>
             </a:r>
@@ -5759,7 +5970,11 @@
           <a:bodyPr rtlCol="0" anchor="ctr"/>
           <a:lstStyle/>
           <a:p>
-            <a:pPr algn="ctr"/>
+            <a:pPr algn="ctr">
+              <a:defRPr>
+                <a:latin typeface="Roboto"/>
+              </a:defRPr>
+            </a:pPr>
           </a:p>
         </p:txBody>
       </p:sp>
@@ -5785,12 +6000,17 @@
           </a:bodyPr>
           <a:lstStyle/>
           <a:p>
+            <a:pPr>
+              <a:defRPr>
+                <a:latin typeface="Roboto"/>
+              </a:defRPr>
+            </a:pPr>
             <a:r>
               <a:rPr sz="1000" b="0">
                 <a:solidFill>
                   <a:srgbClr val="5F6F63"/>
                 </a:solidFill>
-                <a:latin typeface="Arial"/>
+                <a:latin typeface="Roboto"/>
               </a:rPr>
               <a:t>SME sample businesses · Which products and services are growing?</a:t>
             </a:r>
@@ -5819,12 +6039,17 @@
           </a:bodyPr>
           <a:lstStyle/>
           <a:p>
+            <a:pPr>
+              <a:defRPr>
+                <a:latin typeface="Roboto"/>
+              </a:defRPr>
+            </a:pPr>
             <a:r>
               <a:rPr sz="2400" b="1">
                 <a:solidFill>
                   <a:srgbClr val="25342A"/>
                 </a:solidFill>
-                <a:latin typeface="Arial"/>
+                <a:latin typeface="Roboto"/>
               </a:rPr>
               <a:t>Revenue, gross margin and growth by line, by month · Revenue $ · Trades · Every line at once</a:t>
             </a:r>
@@ -5853,12 +6078,17 @@
           </a:bodyPr>
           <a:lstStyle/>
           <a:p>
+            <a:pPr>
+              <a:defRPr>
+                <a:latin typeface="Roboto"/>
+              </a:defRPr>
+            </a:pPr>
             <a:r>
               <a:rPr sz="1200" b="0">
                 <a:solidFill>
                   <a:srgbClr val="5F6F63"/>
                 </a:solidFill>
-                <a:latin typeface="Arial"/>
+                <a:latin typeface="Roboto"/>
               </a:rPr>
               <a:t>Gross margin = revenue less direct cost (materials, subcontractors and time at cost for trades; contractors and consultant time for services), before overheads. Growth is year on year: each month against the same month a year earlier.</a:t>
             </a:r>
@@ -5905,12 +6135,17 @@
           </a:bodyPr>
           <a:lstStyle/>
           <a:p>
+            <a:pPr>
+              <a:defRPr>
+                <a:latin typeface="Roboto"/>
+              </a:defRPr>
+            </a:pPr>
             <a:r>
               <a:rPr sz="900" b="0">
                 <a:solidFill>
                   <a:srgbClr val="5F6F63"/>
                 </a:solidFill>
-                <a:latin typeface="Arial"/>
+                <a:latin typeface="Roboto"/>
               </a:rPr>
               <a:t>growth.pptx</a:t>
             </a:r>
@@ -5939,13 +6174,17 @@
           </a:bodyPr>
           <a:lstStyle/>
           <a:p>
-            <a:pPr algn="ctr"/>
+            <a:pPr algn="ctr">
+              <a:defRPr>
+                <a:latin typeface="Roboto"/>
+              </a:defRPr>
+            </a:pPr>
             <a:r>
               <a:rPr sz="900" b="0">
                 <a:solidFill>
                   <a:srgbClr val="5F6F63"/>
                 </a:solidFill>
-                <a:latin typeface="Arial"/>
+                <a:latin typeface="Roboto"/>
               </a:rPr>
               <a:t>Data retrieved 2pm, Tue 6 Oct 2026 · Sample data</a:t>
             </a:r>
@@ -5974,13 +6213,17 @@
           </a:bodyPr>
           <a:lstStyle/>
           <a:p>
-            <a:pPr algn="r"/>
+            <a:pPr algn="r">
+              <a:defRPr>
+                <a:latin typeface="Roboto"/>
+              </a:defRPr>
+            </a:pPr>
             <a:r>
               <a:rPr sz="900" b="0">
                 <a:solidFill>
                   <a:srgbClr val="5F6F63"/>
                 </a:solidFill>
-                <a:latin typeface="Arial"/>
+                <a:latin typeface="Roboto"/>
               </a:rPr>
               <a:t>Slide 12 of 27</a:t>
             </a:r>
@@ -6044,7 +6287,11 @@
           <a:bodyPr rtlCol="0" anchor="ctr"/>
           <a:lstStyle/>
           <a:p>
-            <a:pPr algn="ctr"/>
+            <a:pPr algn="ctr">
+              <a:defRPr>
+                <a:latin typeface="Roboto"/>
+              </a:defRPr>
+            </a:pPr>
           </a:p>
         </p:txBody>
       </p:sp>
@@ -6070,12 +6317,17 @@
           </a:bodyPr>
           <a:lstStyle/>
           <a:p>
+            <a:pPr>
+              <a:defRPr>
+                <a:latin typeface="Roboto"/>
+              </a:defRPr>
+            </a:pPr>
             <a:r>
               <a:rPr sz="1000" b="0">
                 <a:solidFill>
                   <a:srgbClr val="5F6F63"/>
                 </a:solidFill>
-                <a:latin typeface="Arial"/>
+                <a:latin typeface="Roboto"/>
               </a:rPr>
               <a:t>SME sample businesses · Which products and services are growing?</a:t>
             </a:r>
@@ -6104,12 +6356,17 @@
           </a:bodyPr>
           <a:lstStyle/>
           <a:p>
+            <a:pPr>
+              <a:defRPr>
+                <a:latin typeface="Roboto"/>
+              </a:defRPr>
+            </a:pPr>
             <a:r>
               <a:rPr sz="2400" b="1">
                 <a:solidFill>
                   <a:srgbClr val="25342A"/>
                 </a:solidFill>
-                <a:latin typeface="Arial"/>
+                <a:latin typeface="Roboto"/>
               </a:rPr>
               <a:t>Revenue, gross margin and growth by line, by month · Gross margin % · Trades · Every line at once</a:t>
             </a:r>
@@ -6138,12 +6395,17 @@
           </a:bodyPr>
           <a:lstStyle/>
           <a:p>
+            <a:pPr>
+              <a:defRPr>
+                <a:latin typeface="Roboto"/>
+              </a:defRPr>
+            </a:pPr>
             <a:r>
               <a:rPr sz="1200" b="0">
                 <a:solidFill>
                   <a:srgbClr val="5F6F63"/>
                 </a:solidFill>
-                <a:latin typeface="Arial"/>
+                <a:latin typeface="Roboto"/>
               </a:rPr>
               <a:t>Gross margin = revenue less direct cost (materials, subcontractors and time at cost for trades; contractors and consultant time for services), before overheads. Growth is year on year: each month against the same month a year earlier.</a:t>
             </a:r>
@@ -6190,12 +6452,17 @@
           </a:bodyPr>
           <a:lstStyle/>
           <a:p>
+            <a:pPr>
+              <a:defRPr>
+                <a:latin typeface="Roboto"/>
+              </a:defRPr>
+            </a:pPr>
             <a:r>
               <a:rPr sz="900" b="0">
                 <a:solidFill>
                   <a:srgbClr val="5F6F63"/>
                 </a:solidFill>
-                <a:latin typeface="Arial"/>
+                <a:latin typeface="Roboto"/>
               </a:rPr>
               <a:t>growth.pptx</a:t>
             </a:r>
@@ -6224,13 +6491,17 @@
           </a:bodyPr>
           <a:lstStyle/>
           <a:p>
-            <a:pPr algn="ctr"/>
+            <a:pPr algn="ctr">
+              <a:defRPr>
+                <a:latin typeface="Roboto"/>
+              </a:defRPr>
+            </a:pPr>
             <a:r>
               <a:rPr sz="900" b="0">
                 <a:solidFill>
                   <a:srgbClr val="5F6F63"/>
                 </a:solidFill>
-                <a:latin typeface="Arial"/>
+                <a:latin typeface="Roboto"/>
               </a:rPr>
               <a:t>Data retrieved 2pm, Tue 6 Oct 2026 · Sample data</a:t>
             </a:r>
@@ -6259,13 +6530,17 @@
           </a:bodyPr>
           <a:lstStyle/>
           <a:p>
-            <a:pPr algn="r"/>
+            <a:pPr algn="r">
+              <a:defRPr>
+                <a:latin typeface="Roboto"/>
+              </a:defRPr>
+            </a:pPr>
             <a:r>
               <a:rPr sz="900" b="0">
                 <a:solidFill>
                   <a:srgbClr val="5F6F63"/>
                 </a:solidFill>
-                <a:latin typeface="Arial"/>
+                <a:latin typeface="Roboto"/>
               </a:rPr>
               <a:t>Slide 13 of 27</a:t>
             </a:r>
@@ -6329,7 +6604,11 @@
           <a:bodyPr rtlCol="0" anchor="ctr"/>
           <a:lstStyle/>
           <a:p>
-            <a:pPr algn="ctr"/>
+            <a:pPr algn="ctr">
+              <a:defRPr>
+                <a:latin typeface="Roboto"/>
+              </a:defRPr>
+            </a:pPr>
           </a:p>
         </p:txBody>
       </p:sp>
@@ -6355,12 +6634,17 @@
           </a:bodyPr>
           <a:lstStyle/>
           <a:p>
+            <a:pPr>
+              <a:defRPr>
+                <a:latin typeface="Roboto"/>
+              </a:defRPr>
+            </a:pPr>
             <a:r>
               <a:rPr sz="1000" b="0">
                 <a:solidFill>
                   <a:srgbClr val="5F6F63"/>
                 </a:solidFill>
-                <a:latin typeface="Arial"/>
+                <a:latin typeface="Roboto"/>
               </a:rPr>
               <a:t>SME sample businesses · Which products and services are growing?</a:t>
             </a:r>
@@ -6389,12 +6673,17 @@
           </a:bodyPr>
           <a:lstStyle/>
           <a:p>
+            <a:pPr>
+              <a:defRPr>
+                <a:latin typeface="Roboto"/>
+              </a:defRPr>
+            </a:pPr>
             <a:r>
               <a:rPr sz="2400" b="1">
                 <a:solidFill>
                   <a:srgbClr val="25342A"/>
                 </a:solidFill>
-                <a:latin typeface="Arial"/>
+                <a:latin typeface="Roboto"/>
               </a:rPr>
               <a:t>By line: financial year to date (Jul to Apr 2026) against the same period last year · Trades · Every line at once</a:t>
             </a:r>
@@ -6432,7 +6721,13 @@
                   <a:txBody>
                     <a:bodyPr/>
                     <a:lstStyle/>
-                    <a:p/>
+                    <a:p>
+                      <a:pPr>
+                        <a:defRPr>
+                          <a:latin typeface="Roboto"/>
+                        </a:defRPr>
+                      </a:pPr>
+                    </a:p>
                   </a:txBody>
                   <a:tcPr>
                     <a:solidFill>
@@ -6445,12 +6740,17 @@
                     <a:bodyPr/>
                     <a:lstStyle/>
                     <a:p>
-                      <a:pPr algn="r"/>
+                      <a:pPr algn="r">
+                        <a:defRPr>
+                          <a:latin typeface="Roboto"/>
+                        </a:defRPr>
+                      </a:pPr>
                       <a:r>
                         <a:rPr sz="1100" b="1">
                           <a:solidFill>
                             <a:srgbClr val="FFFFFF"/>
                           </a:solidFill>
+                          <a:latin typeface="Roboto"/>
                         </a:rPr>
                         <a:t>Year to date</a:t>
                       </a:r>
@@ -6467,12 +6767,17 @@
                     <a:bodyPr/>
                     <a:lstStyle/>
                     <a:p>
-                      <a:pPr algn="r"/>
+                      <a:pPr algn="r">
+                        <a:defRPr>
+                          <a:latin typeface="Roboto"/>
+                        </a:defRPr>
+                      </a:pPr>
                       <a:r>
                         <a:rPr sz="1100" b="1">
                           <a:solidFill>
                             <a:srgbClr val="FFFFFF"/>
                           </a:solidFill>
+                          <a:latin typeface="Roboto"/>
                         </a:rPr>
                         <a:t>Same period last year</a:t>
                       </a:r>
@@ -6489,12 +6794,17 @@
                     <a:bodyPr/>
                     <a:lstStyle/>
                     <a:p>
-                      <a:pPr algn="r"/>
+                      <a:pPr algn="r">
+                        <a:defRPr>
+                          <a:latin typeface="Roboto"/>
+                        </a:defRPr>
+                      </a:pPr>
                       <a:r>
                         <a:rPr sz="1100" b="1">
                           <a:solidFill>
                             <a:srgbClr val="FFFFFF"/>
                           </a:solidFill>
+                          <a:latin typeface="Roboto"/>
                         </a:rPr>
                         <a:t>Growth</a:t>
                       </a:r>
@@ -6511,12 +6821,17 @@
                     <a:bodyPr/>
                     <a:lstStyle/>
                     <a:p>
-                      <a:pPr algn="r"/>
+                      <a:pPr algn="r">
+                        <a:defRPr>
+                          <a:latin typeface="Roboto"/>
+                        </a:defRPr>
+                      </a:pPr>
                       <a:r>
                         <a:rPr sz="1100" b="1">
                           <a:solidFill>
                             <a:srgbClr val="FFFFFF"/>
                           </a:solidFill>
+                          <a:latin typeface="Roboto"/>
                         </a:rPr>
                         <a:t>Gross margin $</a:t>
                       </a:r>
@@ -6533,12 +6848,17 @@
                     <a:bodyPr/>
                     <a:lstStyle/>
                     <a:p>
-                      <a:pPr algn="r"/>
+                      <a:pPr algn="r">
+                        <a:defRPr>
+                          <a:latin typeface="Roboto"/>
+                        </a:defRPr>
+                      </a:pPr>
                       <a:r>
                         <a:rPr sz="1100" b="1">
                           <a:solidFill>
                             <a:srgbClr val="FFFFFF"/>
                           </a:solidFill>
+                          <a:latin typeface="Roboto"/>
                         </a:rPr>
                         <a:t>Gross margin %</a:t>
                       </a:r>
@@ -6557,11 +6877,17 @@
                     <a:bodyPr/>
                     <a:lstStyle/>
                     <a:p>
+                      <a:pPr>
+                        <a:defRPr>
+                          <a:latin typeface="Roboto"/>
+                        </a:defRPr>
+                      </a:pPr>
                       <a:r>
                         <a:rPr sz="1050">
                           <a:solidFill>
                             <a:srgbClr val="25342A"/>
                           </a:solidFill>
+                          <a:latin typeface="Roboto"/>
                         </a:rPr>
                         <a:t>Maintenance contracts</a:t>
                       </a:r>
@@ -6578,12 +6904,17 @@
                     <a:bodyPr/>
                     <a:lstStyle/>
                     <a:p>
-                      <a:pPr algn="r"/>
+                      <a:pPr algn="r">
+                        <a:defRPr>
+                          <a:latin typeface="Roboto"/>
+                        </a:defRPr>
+                      </a:pPr>
                       <a:r>
                         <a:rPr sz="1050">
                           <a:solidFill>
                             <a:srgbClr val="25342A"/>
                           </a:solidFill>
+                          <a:latin typeface="Roboto"/>
                         </a:rPr>
                         <a:t>$355,300</a:t>
                       </a:r>
@@ -6600,12 +6931,17 @@
                     <a:bodyPr/>
                     <a:lstStyle/>
                     <a:p>
-                      <a:pPr algn="r"/>
+                      <a:pPr algn="r">
+                        <a:defRPr>
+                          <a:latin typeface="Roboto"/>
+                        </a:defRPr>
+                      </a:pPr>
                       <a:r>
                         <a:rPr sz="1050">
                           <a:solidFill>
                             <a:srgbClr val="25342A"/>
                           </a:solidFill>
+                          <a:latin typeface="Roboto"/>
                         </a:rPr>
                         <a:t>–</a:t>
                       </a:r>
@@ -6622,12 +6958,17 @@
                     <a:bodyPr/>
                     <a:lstStyle/>
                     <a:p>
-                      <a:pPr algn="r"/>
+                      <a:pPr algn="r">
+                        <a:defRPr>
+                          <a:latin typeface="Roboto"/>
+                        </a:defRPr>
+                      </a:pPr>
                       <a:r>
                         <a:rPr sz="1050">
                           <a:solidFill>
                             <a:srgbClr val="25342A"/>
                           </a:solidFill>
+                          <a:latin typeface="Roboto"/>
                         </a:rPr>
                         <a:t>–</a:t>
                       </a:r>
@@ -6644,12 +6985,17 @@
                     <a:bodyPr/>
                     <a:lstStyle/>
                     <a:p>
-                      <a:pPr algn="r"/>
+                      <a:pPr algn="r">
+                        <a:defRPr>
+                          <a:latin typeface="Roboto"/>
+                        </a:defRPr>
+                      </a:pPr>
                       <a:r>
                         <a:rPr sz="1050">
                           <a:solidFill>
                             <a:srgbClr val="25342A"/>
                           </a:solidFill>
+                          <a:latin typeface="Roboto"/>
                         </a:rPr>
                         <a:t>$211,424</a:t>
                       </a:r>
@@ -6666,12 +7012,17 @@
                     <a:bodyPr/>
                     <a:lstStyle/>
                     <a:p>
-                      <a:pPr algn="r"/>
+                      <a:pPr algn="r">
+                        <a:defRPr>
+                          <a:latin typeface="Roboto"/>
+                        </a:defRPr>
+                      </a:pPr>
                       <a:r>
                         <a:rPr sz="1050">
                           <a:solidFill>
                             <a:srgbClr val="25342A"/>
                           </a:solidFill>
+                          <a:latin typeface="Roboto"/>
                         </a:rPr>
                         <a:t>59.5%</a:t>
                       </a:r>
@@ -6690,11 +7041,17 @@
                     <a:bodyPr/>
                     <a:lstStyle/>
                     <a:p>
+                      <a:pPr>
+                        <a:defRPr>
+                          <a:latin typeface="Roboto"/>
+                        </a:defRPr>
+                      </a:pPr>
                       <a:r>
                         <a:rPr sz="1050">
                           <a:solidFill>
                             <a:srgbClr val="25342A"/>
                           </a:solidFill>
+                          <a:latin typeface="Roboto"/>
                         </a:rPr>
                         <a:t>Installations</a:t>
                       </a:r>
@@ -6711,12 +7068,17 @@
                     <a:bodyPr/>
                     <a:lstStyle/>
                     <a:p>
-                      <a:pPr algn="r"/>
+                      <a:pPr algn="r">
+                        <a:defRPr>
+                          <a:latin typeface="Roboto"/>
+                        </a:defRPr>
+                      </a:pPr>
                       <a:r>
                         <a:rPr sz="1050">
                           <a:solidFill>
                             <a:srgbClr val="25342A"/>
                           </a:solidFill>
+                          <a:latin typeface="Roboto"/>
                         </a:rPr>
                         <a:t>$1,011,500</a:t>
                       </a:r>
@@ -6733,12 +7095,17 @@
                     <a:bodyPr/>
                     <a:lstStyle/>
                     <a:p>
-                      <a:pPr algn="r"/>
+                      <a:pPr algn="r">
+                        <a:defRPr>
+                          <a:latin typeface="Roboto"/>
+                        </a:defRPr>
+                      </a:pPr>
                       <a:r>
                         <a:rPr sz="1050">
                           <a:solidFill>
                             <a:srgbClr val="25342A"/>
                           </a:solidFill>
+                          <a:latin typeface="Roboto"/>
                         </a:rPr>
                         <a:t>–</a:t>
                       </a:r>
@@ -6755,12 +7122,17 @@
                     <a:bodyPr/>
                     <a:lstStyle/>
                     <a:p>
-                      <a:pPr algn="r"/>
+                      <a:pPr algn="r">
+                        <a:defRPr>
+                          <a:latin typeface="Roboto"/>
+                        </a:defRPr>
+                      </a:pPr>
                       <a:r>
                         <a:rPr sz="1050">
                           <a:solidFill>
                             <a:srgbClr val="25342A"/>
                           </a:solidFill>
+                          <a:latin typeface="Roboto"/>
                         </a:rPr>
                         <a:t>–</a:t>
                       </a:r>
@@ -6777,12 +7149,17 @@
                     <a:bodyPr/>
                     <a:lstStyle/>
                     <a:p>
-                      <a:pPr algn="r"/>
+                      <a:pPr algn="r">
+                        <a:defRPr>
+                          <a:latin typeface="Roboto"/>
+                        </a:defRPr>
+                      </a:pPr>
                       <a:r>
                         <a:rPr sz="1050">
                           <a:solidFill>
                             <a:srgbClr val="25342A"/>
                           </a:solidFill>
+                          <a:latin typeface="Roboto"/>
                         </a:rPr>
                         <a:t>$287,262</a:t>
                       </a:r>
@@ -6799,12 +7176,17 @@
                     <a:bodyPr/>
                     <a:lstStyle/>
                     <a:p>
-                      <a:pPr algn="r"/>
+                      <a:pPr algn="r">
+                        <a:defRPr>
+                          <a:latin typeface="Roboto"/>
+                        </a:defRPr>
+                      </a:pPr>
                       <a:r>
                         <a:rPr sz="1050">
                           <a:solidFill>
                             <a:srgbClr val="25342A"/>
                           </a:solidFill>
+                          <a:latin typeface="Roboto"/>
                         </a:rPr>
                         <a:t>28.4%</a:t>
                       </a:r>
@@ -6823,11 +7205,17 @@
                     <a:bodyPr/>
                     <a:lstStyle/>
                     <a:p>
+                      <a:pPr>
+                        <a:defRPr>
+                          <a:latin typeface="Roboto"/>
+                        </a:defRPr>
+                      </a:pPr>
                       <a:r>
                         <a:rPr sz="1050">
                           <a:solidFill>
                             <a:srgbClr val="25342A"/>
                           </a:solidFill>
+                          <a:latin typeface="Roboto"/>
                         </a:rPr>
                         <a:t>Call-outs and repairs</a:t>
                       </a:r>
@@ -6844,12 +7232,17 @@
                     <a:bodyPr/>
                     <a:lstStyle/>
                     <a:p>
-                      <a:pPr algn="r"/>
+                      <a:pPr algn="r">
+                        <a:defRPr>
+                          <a:latin typeface="Roboto"/>
+                        </a:defRPr>
+                      </a:pPr>
                       <a:r>
                         <a:rPr sz="1050">
                           <a:solidFill>
                             <a:srgbClr val="25342A"/>
                           </a:solidFill>
+                          <a:latin typeface="Roboto"/>
                         </a:rPr>
                         <a:t>$243,781</a:t>
                       </a:r>
@@ -6866,12 +7259,17 @@
                     <a:bodyPr/>
                     <a:lstStyle/>
                     <a:p>
-                      <a:pPr algn="r"/>
+                      <a:pPr algn="r">
+                        <a:defRPr>
+                          <a:latin typeface="Roboto"/>
+                        </a:defRPr>
+                      </a:pPr>
                       <a:r>
                         <a:rPr sz="1050">
                           <a:solidFill>
                             <a:srgbClr val="25342A"/>
                           </a:solidFill>
+                          <a:latin typeface="Roboto"/>
                         </a:rPr>
                         <a:t>–</a:t>
                       </a:r>
@@ -6888,12 +7286,17 @@
                     <a:bodyPr/>
                     <a:lstStyle/>
                     <a:p>
-                      <a:pPr algn="r"/>
+                      <a:pPr algn="r">
+                        <a:defRPr>
+                          <a:latin typeface="Roboto"/>
+                        </a:defRPr>
+                      </a:pPr>
                       <a:r>
                         <a:rPr sz="1050">
                           <a:solidFill>
                             <a:srgbClr val="25342A"/>
                           </a:solidFill>
+                          <a:latin typeface="Roboto"/>
                         </a:rPr>
                         <a:t>–</a:t>
                       </a:r>
@@ -6910,12 +7313,17 @@
                     <a:bodyPr/>
                     <a:lstStyle/>
                     <a:p>
-                      <a:pPr algn="r"/>
+                      <a:pPr algn="r">
+                        <a:defRPr>
+                          <a:latin typeface="Roboto"/>
+                        </a:defRPr>
+                      </a:pPr>
                       <a:r>
                         <a:rPr sz="1050">
                           <a:solidFill>
                             <a:srgbClr val="25342A"/>
                           </a:solidFill>
+                          <a:latin typeface="Roboto"/>
                         </a:rPr>
                         <a:t>$106,499</a:t>
                       </a:r>
@@ -6932,12 +7340,17 @@
                     <a:bodyPr/>
                     <a:lstStyle/>
                     <a:p>
-                      <a:pPr algn="r"/>
+                      <a:pPr algn="r">
+                        <a:defRPr>
+                          <a:latin typeface="Roboto"/>
+                        </a:defRPr>
+                      </a:pPr>
                       <a:r>
                         <a:rPr sz="1050">
                           <a:solidFill>
                             <a:srgbClr val="25342A"/>
                           </a:solidFill>
+                          <a:latin typeface="Roboto"/>
                         </a:rPr>
                         <a:t>43.7%</a:t>
                       </a:r>
@@ -6956,11 +7369,17 @@
                     <a:bodyPr/>
                     <a:lstStyle/>
                     <a:p>
+                      <a:pPr>
+                        <a:defRPr>
+                          <a:latin typeface="Roboto"/>
+                        </a:defRPr>
+                      </a:pPr>
                       <a:r>
                         <a:rPr sz="1050" b="1">
                           <a:solidFill>
                             <a:srgbClr val="25342A"/>
                           </a:solidFill>
+                          <a:latin typeface="Roboto"/>
                         </a:rPr>
                         <a:t>Total</a:t>
                       </a:r>
@@ -6977,12 +7396,17 @@
                     <a:bodyPr/>
                     <a:lstStyle/>
                     <a:p>
-                      <a:pPr algn="r"/>
+                      <a:pPr algn="r">
+                        <a:defRPr>
+                          <a:latin typeface="Roboto"/>
+                        </a:defRPr>
+                      </a:pPr>
                       <a:r>
                         <a:rPr sz="1050" b="1">
                           <a:solidFill>
                             <a:srgbClr val="25342A"/>
                           </a:solidFill>
+                          <a:latin typeface="Roboto"/>
                         </a:rPr>
                         <a:t>$1,610,581</a:t>
                       </a:r>
@@ -6999,12 +7423,17 @@
                     <a:bodyPr/>
                     <a:lstStyle/>
                     <a:p>
-                      <a:pPr algn="r"/>
+                      <a:pPr algn="r">
+                        <a:defRPr>
+                          <a:latin typeface="Roboto"/>
+                        </a:defRPr>
+                      </a:pPr>
                       <a:r>
                         <a:rPr sz="1050" b="1">
                           <a:solidFill>
                             <a:srgbClr val="25342A"/>
                           </a:solidFill>
+                          <a:latin typeface="Roboto"/>
                         </a:rPr>
                         <a:t>–</a:t>
                       </a:r>
@@ -7021,12 +7450,17 @@
                     <a:bodyPr/>
                     <a:lstStyle/>
                     <a:p>
-                      <a:pPr algn="r"/>
+                      <a:pPr algn="r">
+                        <a:defRPr>
+                          <a:latin typeface="Roboto"/>
+                        </a:defRPr>
+                      </a:pPr>
                       <a:r>
                         <a:rPr sz="1050" b="1">
                           <a:solidFill>
                             <a:srgbClr val="25342A"/>
                           </a:solidFill>
+                          <a:latin typeface="Roboto"/>
                         </a:rPr>
                         <a:t>–</a:t>
                       </a:r>
@@ -7043,12 +7477,17 @@
                     <a:bodyPr/>
                     <a:lstStyle/>
                     <a:p>
-                      <a:pPr algn="r"/>
+                      <a:pPr algn="r">
+                        <a:defRPr>
+                          <a:latin typeface="Roboto"/>
+                        </a:defRPr>
+                      </a:pPr>
                       <a:r>
                         <a:rPr sz="1050" b="1">
                           <a:solidFill>
                             <a:srgbClr val="25342A"/>
                           </a:solidFill>
+                          <a:latin typeface="Roboto"/>
                         </a:rPr>
                         <a:t>$605,185</a:t>
                       </a:r>
@@ -7065,12 +7504,17 @@
                     <a:bodyPr/>
                     <a:lstStyle/>
                     <a:p>
-                      <a:pPr algn="r"/>
+                      <a:pPr algn="r">
+                        <a:defRPr>
+                          <a:latin typeface="Roboto"/>
+                        </a:defRPr>
+                      </a:pPr>
                       <a:r>
                         <a:rPr sz="1050" b="1">
                           <a:solidFill>
                             <a:srgbClr val="25342A"/>
                           </a:solidFill>
+                          <a:latin typeface="Roboto"/>
                         </a:rPr>
                         <a:t>37.6%</a:t>
                       </a:r>
@@ -7109,12 +7553,17 @@
           </a:bodyPr>
           <a:lstStyle/>
           <a:p>
+            <a:pPr>
+              <a:defRPr>
+                <a:latin typeface="Roboto"/>
+              </a:defRPr>
+            </a:pPr>
             <a:r>
               <a:rPr sz="900" b="0">
                 <a:solidFill>
                   <a:srgbClr val="5F6F63"/>
                 </a:solidFill>
-                <a:latin typeface="Arial"/>
+                <a:latin typeface="Roboto"/>
               </a:rPr>
               <a:t>growth.pptx</a:t>
             </a:r>
@@ -7143,13 +7592,17 @@
           </a:bodyPr>
           <a:lstStyle/>
           <a:p>
-            <a:pPr algn="ctr"/>
+            <a:pPr algn="ctr">
+              <a:defRPr>
+                <a:latin typeface="Roboto"/>
+              </a:defRPr>
+            </a:pPr>
             <a:r>
               <a:rPr sz="900" b="0">
                 <a:solidFill>
                   <a:srgbClr val="5F6F63"/>
                 </a:solidFill>
-                <a:latin typeface="Arial"/>
+                <a:latin typeface="Roboto"/>
               </a:rPr>
               <a:t>Data retrieved 2pm, Tue 6 Oct 2026 · Sample data</a:t>
             </a:r>
@@ -7178,13 +7631,17 @@
           </a:bodyPr>
           <a:lstStyle/>
           <a:p>
-            <a:pPr algn="r"/>
+            <a:pPr algn="r">
+              <a:defRPr>
+                <a:latin typeface="Roboto"/>
+              </a:defRPr>
+            </a:pPr>
             <a:r>
               <a:rPr sz="900" b="0">
                 <a:solidFill>
                   <a:srgbClr val="5F6F63"/>
                 </a:solidFill>
-                <a:latin typeface="Arial"/>
+                <a:latin typeface="Roboto"/>
               </a:rPr>
               <a:t>Slide 14 of 27</a:t>
             </a:r>
@@ -7248,7 +7705,11 @@
           <a:bodyPr rtlCol="0" anchor="ctr"/>
           <a:lstStyle/>
           <a:p>
-            <a:pPr algn="ctr"/>
+            <a:pPr algn="ctr">
+              <a:defRPr>
+                <a:latin typeface="Roboto"/>
+              </a:defRPr>
+            </a:pPr>
           </a:p>
         </p:txBody>
       </p:sp>
@@ -7274,12 +7735,17 @@
           </a:bodyPr>
           <a:lstStyle/>
           <a:p>
+            <a:pPr>
+              <a:defRPr>
+                <a:latin typeface="Roboto"/>
+              </a:defRPr>
+            </a:pPr>
             <a:r>
               <a:rPr sz="1000" b="0">
                 <a:solidFill>
                   <a:srgbClr val="5F6F63"/>
                 </a:solidFill>
-                <a:latin typeface="Arial"/>
+                <a:latin typeface="Roboto"/>
               </a:rPr>
               <a:t>SME sample businesses · Which products and services are growing?</a:t>
             </a:r>
@@ -7308,12 +7774,17 @@
           </a:bodyPr>
           <a:lstStyle/>
           <a:p>
+            <a:pPr>
+              <a:defRPr>
+                <a:latin typeface="Roboto"/>
+              </a:defRPr>
+            </a:pPr>
             <a:r>
               <a:rPr sz="2400" b="1">
                 <a:solidFill>
                   <a:srgbClr val="25342A"/>
                 </a:solidFill>
-                <a:latin typeface="Arial"/>
+                <a:latin typeface="Roboto"/>
               </a:rPr>
               <a:t>Gross margin, not profit</a:t>
             </a:r>
@@ -7361,7 +7832,11 @@
           <a:bodyPr rtlCol="0" anchor="ctr"/>
           <a:lstStyle/>
           <a:p>
-            <a:pPr algn="ctr"/>
+            <a:pPr algn="ctr">
+              <a:defRPr>
+                <a:latin typeface="Roboto"/>
+              </a:defRPr>
+            </a:pPr>
           </a:p>
         </p:txBody>
       </p:sp>
@@ -7387,12 +7862,17 @@
           </a:bodyPr>
           <a:lstStyle/>
           <a:p>
+            <a:pPr>
+              <a:defRPr>
+                <a:latin typeface="Roboto"/>
+              </a:defRPr>
+            </a:pPr>
             <a:r>
               <a:rPr sz="1100" b="1">
                 <a:solidFill>
                   <a:srgbClr val="5F6F63"/>
                 </a:solidFill>
-                <a:latin typeface="Arial"/>
+                <a:latin typeface="Roboto"/>
               </a:rPr>
               <a:t>GROSS MARGIN, NOT PROFIT</a:t>
             </a:r>
@@ -7421,12 +7901,17 @@
           </a:bodyPr>
           <a:lstStyle/>
           <a:p>
+            <a:pPr>
+              <a:defRPr>
+                <a:latin typeface="Roboto"/>
+              </a:defRPr>
+            </a:pPr>
             <a:r>
               <a:rPr sz="1600" b="0">
                 <a:solidFill>
                   <a:srgbClr val="25342A"/>
                 </a:solidFill>
-                <a:latin typeface="Arial"/>
+                <a:latin typeface="Roboto"/>
               </a:rPr>
               <a:t>Gross margin is not profit. Gross margin = revenue less contractors and consultant time charged to the work at $60 an hour (wages and all on-costs). Not included: consultant time not charged to clients, and overheads (management and admin wages, marketing, rent, IT, insurance, travel, depreciation, interest). Profit is what's left after those. Wages always include all on-costs: super, payroll tax, workers' compensation insurance and leave.</a:t>
             </a:r>
@@ -7455,12 +7940,17 @@
           </a:bodyPr>
           <a:lstStyle/>
           <a:p>
+            <a:pPr>
+              <a:defRPr>
+                <a:latin typeface="Roboto"/>
+              </a:defRPr>
+            </a:pPr>
             <a:r>
               <a:rPr sz="900" b="0">
                 <a:solidFill>
                   <a:srgbClr val="5F6F63"/>
                 </a:solidFill>
-                <a:latin typeface="Arial"/>
+                <a:latin typeface="Roboto"/>
               </a:rPr>
               <a:t>growth.pptx</a:t>
             </a:r>
@@ -7489,13 +7979,17 @@
           </a:bodyPr>
           <a:lstStyle/>
           <a:p>
-            <a:pPr algn="ctr"/>
+            <a:pPr algn="ctr">
+              <a:defRPr>
+                <a:latin typeface="Roboto"/>
+              </a:defRPr>
+            </a:pPr>
             <a:r>
               <a:rPr sz="900" b="0">
                 <a:solidFill>
                   <a:srgbClr val="5F6F63"/>
                 </a:solidFill>
-                <a:latin typeface="Arial"/>
+                <a:latin typeface="Roboto"/>
               </a:rPr>
               <a:t>Data retrieved 2pm, Tue 6 Oct 2026 · Sample data</a:t>
             </a:r>
@@ -7524,13 +8018,17 @@
           </a:bodyPr>
           <a:lstStyle/>
           <a:p>
-            <a:pPr algn="r"/>
+            <a:pPr algn="r">
+              <a:defRPr>
+                <a:latin typeface="Roboto"/>
+              </a:defRPr>
+            </a:pPr>
             <a:r>
               <a:rPr sz="900" b="0">
                 <a:solidFill>
                   <a:srgbClr val="5F6F63"/>
                 </a:solidFill>
-                <a:latin typeface="Arial"/>
+                <a:latin typeface="Roboto"/>
               </a:rPr>
               <a:t>Slide 15 of 27</a:t>
             </a:r>
@@ -7594,7 +8092,11 @@
           <a:bodyPr rtlCol="0" anchor="ctr"/>
           <a:lstStyle/>
           <a:p>
-            <a:pPr algn="ctr"/>
+            <a:pPr algn="ctr">
+              <a:defRPr>
+                <a:latin typeface="Roboto"/>
+              </a:defRPr>
+            </a:pPr>
           </a:p>
         </p:txBody>
       </p:sp>
@@ -7620,12 +8122,17 @@
           </a:bodyPr>
           <a:lstStyle/>
           <a:p>
+            <a:pPr>
+              <a:defRPr>
+                <a:latin typeface="Roboto"/>
+              </a:defRPr>
+            </a:pPr>
             <a:r>
               <a:rPr sz="1000" b="0">
                 <a:solidFill>
                   <a:srgbClr val="5F6F63"/>
                 </a:solidFill>
-                <a:latin typeface="Arial"/>
+                <a:latin typeface="Roboto"/>
               </a:rPr>
               <a:t>SME sample businesses · Which products and services are growing?</a:t>
             </a:r>
@@ -7654,12 +8161,17 @@
           </a:bodyPr>
           <a:lstStyle/>
           <a:p>
+            <a:pPr>
+              <a:defRPr>
+                <a:latin typeface="Roboto"/>
+              </a:defRPr>
+            </a:pPr>
             <a:r>
               <a:rPr sz="2400" b="1">
                 <a:solidFill>
                   <a:srgbClr val="25342A"/>
                 </a:solidFill>
-                <a:latin typeface="Arial"/>
+                <a:latin typeface="Roboto"/>
               </a:rPr>
               <a:t>From gross margin to profit · Services</a:t>
             </a:r>
@@ -7688,12 +8200,17 @@
           </a:bodyPr>
           <a:lstStyle/>
           <a:p>
+            <a:pPr>
+              <a:defRPr>
+                <a:latin typeface="Roboto"/>
+              </a:defRPr>
+            </a:pPr>
             <a:r>
               <a:rPr sz="1200" b="0">
                 <a:solidFill>
                   <a:srgbClr val="5F6F63"/>
                 </a:solidFill>
-                <a:latin typeface="Arial"/>
+                <a:latin typeface="Roboto"/>
               </a:rPr>
               <a:t>April's client work made $52,730 gross margin (65.4%). Consultant time not charged to client work took $19,740 and overheads $51,660, leaving ($18,670) profit before tax ((23.2%) of revenue). To cover overheads, client work needs a 88.6% gross margin on average.</a:t>
             </a:r>
@@ -7727,7 +8244,13 @@
                   <a:txBody>
                     <a:bodyPr/>
                     <a:lstStyle/>
-                    <a:p/>
+                    <a:p>
+                      <a:pPr>
+                        <a:defRPr>
+                          <a:latin typeface="Roboto"/>
+                        </a:defRPr>
+                      </a:pPr>
+                    </a:p>
                   </a:txBody>
                   <a:tcPr>
                     <a:solidFill>
@@ -7740,12 +8263,17 @@
                     <a:bodyPr/>
                     <a:lstStyle/>
                     <a:p>
-                      <a:pPr algn="r"/>
+                      <a:pPr algn="r">
+                        <a:defRPr>
+                          <a:latin typeface="Roboto"/>
+                        </a:defRPr>
+                      </a:pPr>
                       <a:r>
                         <a:rPr sz="1100" b="1">
                           <a:solidFill>
                             <a:srgbClr val="FFFFFF"/>
                           </a:solidFill>
+                          <a:latin typeface="Roboto"/>
                         </a:rPr>
                         <a:t>April 2026</a:t>
                       </a:r>
@@ -7764,11 +8292,17 @@
                     <a:bodyPr/>
                     <a:lstStyle/>
                     <a:p>
+                      <a:pPr>
+                        <a:defRPr>
+                          <a:latin typeface="Roboto"/>
+                        </a:defRPr>
+                      </a:pPr>
                       <a:r>
                         <a:rPr sz="1050">
                           <a:solidFill>
                             <a:srgbClr val="25342A"/>
                           </a:solidFill>
+                          <a:latin typeface="Roboto"/>
                         </a:rPr>
                         <a:t>Gross margin on client work</a:t>
                       </a:r>
@@ -7785,12 +8319,17 @@
                     <a:bodyPr/>
                     <a:lstStyle/>
                     <a:p>
-                      <a:pPr algn="r"/>
+                      <a:pPr algn="r">
+                        <a:defRPr>
+                          <a:latin typeface="Roboto"/>
+                        </a:defRPr>
+                      </a:pPr>
                       <a:r>
                         <a:rPr sz="1050">
                           <a:solidFill>
                             <a:srgbClr val="25342A"/>
                           </a:solidFill>
+                          <a:latin typeface="Roboto"/>
                         </a:rPr>
                         <a:t>$52,730</a:t>
                       </a:r>
@@ -7809,11 +8348,17 @@
                     <a:bodyPr/>
                     <a:lstStyle/>
                     <a:p>
+                      <a:pPr>
+                        <a:defRPr>
+                          <a:latin typeface="Roboto"/>
+                        </a:defRPr>
+                      </a:pPr>
                       <a:r>
                         <a:rPr sz="1050">
                           <a:solidFill>
                             <a:srgbClr val="25342A"/>
                           </a:solidFill>
+                          <a:latin typeface="Roboto"/>
                         </a:rPr>
                         <a:t>Consultant wages and on-costs</a:t>
                       </a:r>
@@ -7830,12 +8375,17 @@
                     <a:bodyPr/>
                     <a:lstStyle/>
                     <a:p>
-                      <a:pPr algn="r"/>
+                      <a:pPr algn="r">
+                        <a:defRPr>
+                          <a:latin typeface="Roboto"/>
+                        </a:defRPr>
+                      </a:pPr>
                       <a:r>
                         <a:rPr sz="1050">
                           <a:solidFill>
                             <a:srgbClr val="25342A"/>
                           </a:solidFill>
+                          <a:latin typeface="Roboto"/>
                         </a:rPr>
                         <a:t>$46,500</a:t>
                       </a:r>
@@ -7854,11 +8404,17 @@
                     <a:bodyPr/>
                     <a:lstStyle/>
                     <a:p>
+                      <a:pPr>
+                        <a:defRPr>
+                          <a:latin typeface="Roboto"/>
+                        </a:defRPr>
+                      </a:pPr>
                       <a:r>
                         <a:rPr sz="1050">
                           <a:solidFill>
                             <a:srgbClr val="25342A"/>
                           </a:solidFill>
+                          <a:latin typeface="Roboto"/>
                         </a:rPr>
                         <a:t>Consultant time charged to client work (at cost)</a:t>
                       </a:r>
@@ -7875,12 +8431,17 @@
                     <a:bodyPr/>
                     <a:lstStyle/>
                     <a:p>
-                      <a:pPr algn="r"/>
+                      <a:pPr algn="r">
+                        <a:defRPr>
+                          <a:latin typeface="Roboto"/>
+                        </a:defRPr>
+                      </a:pPr>
                       <a:r>
                         <a:rPr sz="1050">
                           <a:solidFill>
                             <a:srgbClr val="25342A"/>
                           </a:solidFill>
+                          <a:latin typeface="Roboto"/>
                         </a:rPr>
                         <a:t>$26,760</a:t>
                       </a:r>
@@ -7899,11 +8460,17 @@
                     <a:bodyPr/>
                     <a:lstStyle/>
                     <a:p>
+                      <a:pPr>
+                        <a:defRPr>
+                          <a:latin typeface="Roboto"/>
+                        </a:defRPr>
+                      </a:pPr>
                       <a:r>
                         <a:rPr sz="1050">
                           <a:solidFill>
                             <a:srgbClr val="25342A"/>
                           </a:solidFill>
+                          <a:latin typeface="Roboto"/>
                         </a:rPr>
                         <a:t>Consultant time not charged to client work</a:t>
                       </a:r>
@@ -7920,12 +8487,17 @@
                     <a:bodyPr/>
                     <a:lstStyle/>
                     <a:p>
-                      <a:pPr algn="r"/>
+                      <a:pPr algn="r">
+                        <a:defRPr>
+                          <a:latin typeface="Roboto"/>
+                        </a:defRPr>
+                      </a:pPr>
                       <a:r>
                         <a:rPr sz="1050">
                           <a:solidFill>
                             <a:srgbClr val="25342A"/>
                           </a:solidFill>
+                          <a:latin typeface="Roboto"/>
                         </a:rPr>
                         <a:t>$19,740</a:t>
                       </a:r>
@@ -7944,11 +8516,17 @@
                     <a:bodyPr/>
                     <a:lstStyle/>
                     <a:p>
+                      <a:pPr>
+                        <a:defRPr>
+                          <a:latin typeface="Roboto"/>
+                        </a:defRPr>
+                      </a:pPr>
                       <a:r>
                         <a:rPr sz="1050">
                           <a:solidFill>
                             <a:srgbClr val="25342A"/>
                           </a:solidFill>
+                          <a:latin typeface="Roboto"/>
                         </a:rPr>
                         <a:t>Gross profit (the P&amp;L)</a:t>
                       </a:r>
@@ -7965,12 +8543,17 @@
                     <a:bodyPr/>
                     <a:lstStyle/>
                     <a:p>
-                      <a:pPr algn="r"/>
+                      <a:pPr algn="r">
+                        <a:defRPr>
+                          <a:latin typeface="Roboto"/>
+                        </a:defRPr>
+                      </a:pPr>
                       <a:r>
                         <a:rPr sz="1050">
                           <a:solidFill>
                             <a:srgbClr val="25342A"/>
                           </a:solidFill>
+                          <a:latin typeface="Roboto"/>
                         </a:rPr>
                         <a:t>$32,990</a:t>
                       </a:r>
@@ -7989,11 +8572,17 @@
                     <a:bodyPr/>
                     <a:lstStyle/>
                     <a:p>
+                      <a:pPr>
+                        <a:defRPr>
+                          <a:latin typeface="Roboto"/>
+                        </a:defRPr>
+                      </a:pPr>
                       <a:r>
                         <a:rPr sz="1050">
                           <a:solidFill>
                             <a:srgbClr val="25342A"/>
                           </a:solidFill>
+                          <a:latin typeface="Roboto"/>
                         </a:rPr>
                         <a:t>Overheads (operating expenses, depreciation, interest)</a:t>
                       </a:r>
@@ -8010,12 +8599,17 @@
                     <a:bodyPr/>
                     <a:lstStyle/>
                     <a:p>
-                      <a:pPr algn="r"/>
+                      <a:pPr algn="r">
+                        <a:defRPr>
+                          <a:latin typeface="Roboto"/>
+                        </a:defRPr>
+                      </a:pPr>
                       <a:r>
                         <a:rPr sz="1050">
                           <a:solidFill>
                             <a:srgbClr val="25342A"/>
                           </a:solidFill>
+                          <a:latin typeface="Roboto"/>
                         </a:rPr>
                         <a:t>$51,660</a:t>
                       </a:r>
@@ -8034,11 +8628,17 @@
                     <a:bodyPr/>
                     <a:lstStyle/>
                     <a:p>
+                      <a:pPr>
+                        <a:defRPr>
+                          <a:latin typeface="Roboto"/>
+                        </a:defRPr>
+                      </a:pPr>
                       <a:r>
                         <a:rPr sz="1050">
                           <a:solidFill>
                             <a:srgbClr val="25342A"/>
                           </a:solidFill>
+                          <a:latin typeface="Roboto"/>
                         </a:rPr>
                         <a:t>Profit before tax (the P&amp;L)</a:t>
                       </a:r>
@@ -8055,12 +8655,17 @@
                     <a:bodyPr/>
                     <a:lstStyle/>
                     <a:p>
-                      <a:pPr algn="r"/>
+                      <a:pPr algn="r">
+                        <a:defRPr>
+                          <a:latin typeface="Roboto"/>
+                        </a:defRPr>
+                      </a:pPr>
                       <a:r>
                         <a:rPr sz="1050">
                           <a:solidFill>
                             <a:srgbClr val="B42318"/>
                           </a:solidFill>
+                          <a:latin typeface="Roboto"/>
                         </a:rPr>
                         <a:t>($18,670)</a:t>
                       </a:r>
@@ -8079,11 +8684,17 @@
                     <a:bodyPr/>
                     <a:lstStyle/>
                     <a:p>
+                      <a:pPr>
+                        <a:defRPr>
+                          <a:latin typeface="Roboto"/>
+                        </a:defRPr>
+                      </a:pPr>
                       <a:r>
                         <a:rPr sz="1050">
                           <a:solidFill>
                             <a:srgbClr val="25342A"/>
                           </a:solidFill>
+                          <a:latin typeface="Roboto"/>
                         </a:rPr>
                         <a:t>Revenue</a:t>
                       </a:r>
@@ -8100,12 +8711,17 @@
                     <a:bodyPr/>
                     <a:lstStyle/>
                     <a:p>
-                      <a:pPr algn="r"/>
+                      <a:pPr algn="r">
+                        <a:defRPr>
+                          <a:latin typeface="Roboto"/>
+                        </a:defRPr>
+                      </a:pPr>
                       <a:r>
                         <a:rPr sz="1050">
                           <a:solidFill>
                             <a:srgbClr val="25342A"/>
                           </a:solidFill>
+                          <a:latin typeface="Roboto"/>
                         </a:rPr>
                         <a:t>$80,590</a:t>
                       </a:r>
@@ -8124,11 +8740,17 @@
                     <a:bodyPr/>
                     <a:lstStyle/>
                     <a:p>
+                      <a:pPr>
+                        <a:defRPr>
+                          <a:latin typeface="Roboto"/>
+                        </a:defRPr>
+                      </a:pPr>
                       <a:r>
                         <a:rPr sz="1050">
                           <a:solidFill>
                             <a:srgbClr val="25342A"/>
                           </a:solidFill>
+                          <a:latin typeface="Roboto"/>
                         </a:rPr>
                         <a:t>Gross margin on client work, %</a:t>
                       </a:r>
@@ -8145,12 +8767,17 @@
                     <a:bodyPr/>
                     <a:lstStyle/>
                     <a:p>
-                      <a:pPr algn="r"/>
+                      <a:pPr algn="r">
+                        <a:defRPr>
+                          <a:latin typeface="Roboto"/>
+                        </a:defRPr>
+                      </a:pPr>
                       <a:r>
                         <a:rPr sz="1050">
                           <a:solidFill>
                             <a:srgbClr val="25342A"/>
                           </a:solidFill>
+                          <a:latin typeface="Roboto"/>
                         </a:rPr>
                         <a:t>65.4%</a:t>
                       </a:r>
@@ -8169,11 +8796,17 @@
                     <a:bodyPr/>
                     <a:lstStyle/>
                     <a:p>
+                      <a:pPr>
+                        <a:defRPr>
+                          <a:latin typeface="Roboto"/>
+                        </a:defRPr>
+                      </a:pPr>
                       <a:r>
                         <a:rPr sz="1050">
                           <a:solidFill>
                             <a:srgbClr val="25342A"/>
                           </a:solidFill>
+                          <a:latin typeface="Roboto"/>
                         </a:rPr>
                         <a:t>Profit before tax, % of revenue</a:t>
                       </a:r>
@@ -8190,12 +8823,17 @@
                     <a:bodyPr/>
                     <a:lstStyle/>
                     <a:p>
-                      <a:pPr algn="r"/>
+                      <a:pPr algn="r">
+                        <a:defRPr>
+                          <a:latin typeface="Roboto"/>
+                        </a:defRPr>
+                      </a:pPr>
                       <a:r>
                         <a:rPr sz="1050">
                           <a:solidFill>
                             <a:srgbClr val="B42318"/>
                           </a:solidFill>
+                          <a:latin typeface="Roboto"/>
                         </a:rPr>
                         <a:t>(23.2%)</a:t>
                       </a:r>
@@ -8214,11 +8852,17 @@
                     <a:bodyPr/>
                     <a:lstStyle/>
                     <a:p>
+                      <a:pPr>
+                        <a:defRPr>
+                          <a:latin typeface="Roboto"/>
+                        </a:defRPr>
+                      </a:pPr>
                       <a:r>
                         <a:rPr sz="1050">
                           <a:solidFill>
                             <a:srgbClr val="25342A"/>
                           </a:solidFill>
+                          <a:latin typeface="Roboto"/>
                         </a:rPr>
                         <a:t>Gross margin client work need just to cover overheads and time not charged</a:t>
                       </a:r>
@@ -8235,12 +8879,17 @@
                     <a:bodyPr/>
                     <a:lstStyle/>
                     <a:p>
-                      <a:pPr algn="r"/>
+                      <a:pPr algn="r">
+                        <a:defRPr>
+                          <a:latin typeface="Roboto"/>
+                        </a:defRPr>
+                      </a:pPr>
                       <a:r>
                         <a:rPr sz="1050">
                           <a:solidFill>
                             <a:srgbClr val="25342A"/>
                           </a:solidFill>
+                          <a:latin typeface="Roboto"/>
                         </a:rPr>
                         <a:t>88.6%</a:t>
                       </a:r>
@@ -8279,12 +8928,17 @@
           </a:bodyPr>
           <a:lstStyle/>
           <a:p>
+            <a:pPr>
+              <a:defRPr>
+                <a:latin typeface="Roboto"/>
+              </a:defRPr>
+            </a:pPr>
             <a:r>
               <a:rPr sz="900" b="0">
                 <a:solidFill>
                   <a:srgbClr val="5F6F63"/>
                 </a:solidFill>
-                <a:latin typeface="Arial"/>
+                <a:latin typeface="Roboto"/>
               </a:rPr>
               <a:t>growth.pptx</a:t>
             </a:r>
@@ -8313,13 +8967,17 @@
           </a:bodyPr>
           <a:lstStyle/>
           <a:p>
-            <a:pPr algn="ctr"/>
+            <a:pPr algn="ctr">
+              <a:defRPr>
+                <a:latin typeface="Roboto"/>
+              </a:defRPr>
+            </a:pPr>
             <a:r>
               <a:rPr sz="900" b="0">
                 <a:solidFill>
                   <a:srgbClr val="5F6F63"/>
                 </a:solidFill>
-                <a:latin typeface="Arial"/>
+                <a:latin typeface="Roboto"/>
               </a:rPr>
               <a:t>Data retrieved 2pm, Tue 6 Oct 2026 · Sample data</a:t>
             </a:r>
@@ -8348,13 +9006,17 @@
           </a:bodyPr>
           <a:lstStyle/>
           <a:p>
-            <a:pPr algn="r"/>
+            <a:pPr algn="r">
+              <a:defRPr>
+                <a:latin typeface="Roboto"/>
+              </a:defRPr>
+            </a:pPr>
             <a:r>
               <a:rPr sz="900" b="0">
                 <a:solidFill>
                   <a:srgbClr val="5F6F63"/>
                 </a:solidFill>
-                <a:latin typeface="Arial"/>
+                <a:latin typeface="Roboto"/>
               </a:rPr>
               <a:t>Slide 16 of 27</a:t>
             </a:r>
@@ -8418,7 +9080,11 @@
           <a:bodyPr rtlCol="0" anchor="ctr"/>
           <a:lstStyle/>
           <a:p>
-            <a:pPr algn="ctr"/>
+            <a:pPr algn="ctr">
+              <a:defRPr>
+                <a:latin typeface="Roboto"/>
+              </a:defRPr>
+            </a:pPr>
           </a:p>
         </p:txBody>
       </p:sp>
@@ -8444,12 +9110,17 @@
           </a:bodyPr>
           <a:lstStyle/>
           <a:p>
+            <a:pPr>
+              <a:defRPr>
+                <a:latin typeface="Roboto"/>
+              </a:defRPr>
+            </a:pPr>
             <a:r>
               <a:rPr sz="1000" b="0">
                 <a:solidFill>
                   <a:srgbClr val="5F6F63"/>
                 </a:solidFill>
-                <a:latin typeface="Arial"/>
+                <a:latin typeface="Roboto"/>
               </a:rPr>
               <a:t>SME sample businesses · Which products and services are growing?</a:t>
             </a:r>
@@ -8478,12 +9149,17 @@
           </a:bodyPr>
           <a:lstStyle/>
           <a:p>
+            <a:pPr>
+              <a:defRPr>
+                <a:latin typeface="Roboto"/>
+              </a:defRPr>
+            </a:pPr>
             <a:r>
               <a:rPr sz="2400" b="1">
                 <a:solidFill>
                   <a:srgbClr val="25342A"/>
                 </a:solidFill>
-                <a:latin typeface="Arial"/>
+                <a:latin typeface="Roboto"/>
               </a:rPr>
               <a:t>Headline numbers · Services · Type of work: All</a:t>
             </a:r>
@@ -8531,7 +9207,11 @@
           <a:bodyPr rtlCol="0" anchor="ctr"/>
           <a:lstStyle/>
           <a:p>
-            <a:pPr algn="ctr"/>
+            <a:pPr algn="ctr">
+              <a:defRPr>
+                <a:latin typeface="Roboto"/>
+              </a:defRPr>
+            </a:pPr>
           </a:p>
         </p:txBody>
       </p:sp>
@@ -8557,12 +9237,17 @@
           </a:bodyPr>
           <a:lstStyle/>
           <a:p>
+            <a:pPr>
+              <a:defRPr>
+                <a:latin typeface="Roboto"/>
+              </a:defRPr>
+            </a:pPr>
             <a:r>
               <a:rPr sz="1200" b="0">
                 <a:solidFill>
                   <a:srgbClr val="5F6F63"/>
                 </a:solidFill>
-                <a:latin typeface="Arial"/>
+                <a:latin typeface="Roboto"/>
               </a:rPr>
               <a:t>April against April last year</a:t>
             </a:r>
@@ -8591,12 +9276,17 @@
           </a:bodyPr>
           <a:lstStyle/>
           <a:p>
+            <a:pPr>
+              <a:defRPr>
+                <a:latin typeface="Roboto"/>
+              </a:defRPr>
+            </a:pPr>
             <a:r>
               <a:rPr sz="3000" b="1">
                 <a:solidFill>
                   <a:srgbClr val="2F7A5D"/>
                 </a:solidFill>
-                <a:latin typeface="Arial"/>
+                <a:latin typeface="Roboto"/>
               </a:rPr>
               <a:t>26.0%</a:t>
             </a:r>
@@ -8625,12 +9315,17 @@
           </a:bodyPr>
           <a:lstStyle/>
           <a:p>
+            <a:pPr>
+              <a:defRPr>
+                <a:latin typeface="Roboto"/>
+              </a:defRPr>
+            </a:pPr>
             <a:r>
               <a:rPr sz="1100" b="0">
                 <a:solidFill>
                   <a:srgbClr val="5F6F63"/>
                 </a:solidFill>
-                <a:latin typeface="Arial"/>
+                <a:latin typeface="Roboto"/>
               </a:rPr>
               <a:t>$80,590 against $63,970</a:t>
             </a:r>
@@ -8678,7 +9373,11 @@
           <a:bodyPr rtlCol="0" anchor="ctr"/>
           <a:lstStyle/>
           <a:p>
-            <a:pPr algn="ctr"/>
+            <a:pPr algn="ctr">
+              <a:defRPr>
+                <a:latin typeface="Roboto"/>
+              </a:defRPr>
+            </a:pPr>
           </a:p>
         </p:txBody>
       </p:sp>
@@ -8704,12 +9403,17 @@
           </a:bodyPr>
           <a:lstStyle/>
           <a:p>
+            <a:pPr>
+              <a:defRPr>
+                <a:latin typeface="Roboto"/>
+              </a:defRPr>
+            </a:pPr>
             <a:r>
               <a:rPr sz="1200" b="0">
                 <a:solidFill>
                   <a:srgbClr val="5F6F63"/>
                 </a:solidFill>
-                <a:latin typeface="Arial"/>
+                <a:latin typeface="Roboto"/>
               </a:rPr>
               <a:t>Year to date (Jul to Apr 2026)</a:t>
             </a:r>
@@ -8738,12 +9442,17 @@
           </a:bodyPr>
           <a:lstStyle/>
           <a:p>
+            <a:pPr>
+              <a:defRPr>
+                <a:latin typeface="Roboto"/>
+              </a:defRPr>
+            </a:pPr>
             <a:r>
               <a:rPr sz="3000" b="1">
                 <a:solidFill>
                   <a:srgbClr val="2F7A5D"/>
                 </a:solidFill>
-                <a:latin typeface="Arial"/>
+                <a:latin typeface="Roboto"/>
               </a:rPr>
               <a:t>$814,830</a:t>
             </a:r>
@@ -8772,12 +9481,17 @@
           </a:bodyPr>
           <a:lstStyle/>
           <a:p>
+            <a:pPr>
+              <a:defRPr>
+                <a:latin typeface="Roboto"/>
+              </a:defRPr>
+            </a:pPr>
             <a:r>
               <a:rPr sz="1100" b="0">
                 <a:solidFill>
                   <a:srgbClr val="5F6F63"/>
                 </a:solidFill>
-                <a:latin typeface="Arial"/>
+                <a:latin typeface="Roboto"/>
               </a:rPr>
               <a:t>same period last year: not in the data</a:t>
             </a:r>
@@ -8825,7 +9539,11 @@
           <a:bodyPr rtlCol="0" anchor="ctr"/>
           <a:lstStyle/>
           <a:p>
-            <a:pPr algn="ctr"/>
+            <a:pPr algn="ctr">
+              <a:defRPr>
+                <a:latin typeface="Roboto"/>
+              </a:defRPr>
+            </a:pPr>
           </a:p>
         </p:txBody>
       </p:sp>
@@ -8851,12 +9569,17 @@
           </a:bodyPr>
           <a:lstStyle/>
           <a:p>
+            <a:pPr>
+              <a:defRPr>
+                <a:latin typeface="Roboto"/>
+              </a:defRPr>
+            </a:pPr>
             <a:r>
               <a:rPr sz="1200" b="0">
                 <a:solidFill>
                   <a:srgbClr val="5F6F63"/>
                 </a:solidFill>
-                <a:latin typeface="Arial"/>
+                <a:latin typeface="Roboto"/>
               </a:rPr>
               <a:t>Gross margin, year to date</a:t>
             </a:r>
@@ -8885,12 +9608,17 @@
           </a:bodyPr>
           <a:lstStyle/>
           <a:p>
+            <a:pPr>
+              <a:defRPr>
+                <a:latin typeface="Roboto"/>
+              </a:defRPr>
+            </a:pPr>
             <a:r>
               <a:rPr sz="3000" b="1">
                 <a:solidFill>
                   <a:srgbClr val="2F7A5D"/>
                 </a:solidFill>
-                <a:latin typeface="Arial"/>
+                <a:latin typeface="Roboto"/>
               </a:rPr>
               <a:t>64.0%</a:t>
             </a:r>
@@ -8919,12 +9647,17 @@
           </a:bodyPr>
           <a:lstStyle/>
           <a:p>
+            <a:pPr>
+              <a:defRPr>
+                <a:latin typeface="Roboto"/>
+              </a:defRPr>
+            </a:pPr>
             <a:r>
               <a:rPr sz="1100" b="0">
                 <a:solidFill>
                   <a:srgbClr val="5F6F63"/>
                 </a:solidFill>
-                <a:latin typeface="Arial"/>
+                <a:latin typeface="Roboto"/>
               </a:rPr>
               <a:t>$521,490 before overheads</a:t>
             </a:r>
@@ -8953,12 +9686,17 @@
           </a:bodyPr>
           <a:lstStyle/>
           <a:p>
+            <a:pPr>
+              <a:defRPr>
+                <a:latin typeface="Roboto"/>
+              </a:defRPr>
+            </a:pPr>
             <a:r>
               <a:rPr sz="900" b="0">
                 <a:solidFill>
                   <a:srgbClr val="5F6F63"/>
                 </a:solidFill>
-                <a:latin typeface="Arial"/>
+                <a:latin typeface="Roboto"/>
               </a:rPr>
               <a:t>growth.pptx</a:t>
             </a:r>
@@ -8987,13 +9725,17 @@
           </a:bodyPr>
           <a:lstStyle/>
           <a:p>
-            <a:pPr algn="ctr"/>
+            <a:pPr algn="ctr">
+              <a:defRPr>
+                <a:latin typeface="Roboto"/>
+              </a:defRPr>
+            </a:pPr>
             <a:r>
               <a:rPr sz="900" b="0">
                 <a:solidFill>
                   <a:srgbClr val="5F6F63"/>
                 </a:solidFill>
-                <a:latin typeface="Arial"/>
+                <a:latin typeface="Roboto"/>
               </a:rPr>
               <a:t>Data retrieved 2pm, Tue 6 Oct 2026 · Sample data</a:t>
             </a:r>
@@ -9022,13 +9764,17 @@
           </a:bodyPr>
           <a:lstStyle/>
           <a:p>
-            <a:pPr algn="r"/>
+            <a:pPr algn="r">
+              <a:defRPr>
+                <a:latin typeface="Roboto"/>
+              </a:defRPr>
+            </a:pPr>
             <a:r>
               <a:rPr sz="900" b="0">
                 <a:solidFill>
                   <a:srgbClr val="5F6F63"/>
                 </a:solidFill>
-                <a:latin typeface="Arial"/>
+                <a:latin typeface="Roboto"/>
               </a:rPr>
               <a:t>Slide 17 of 27</a:t>
             </a:r>
@@ -9092,7 +9838,11 @@
           <a:bodyPr rtlCol="0" anchor="ctr"/>
           <a:lstStyle/>
           <a:p>
-            <a:pPr algn="ctr"/>
+            <a:pPr algn="ctr">
+              <a:defRPr>
+                <a:latin typeface="Roboto"/>
+              </a:defRPr>
+            </a:pPr>
           </a:p>
         </p:txBody>
       </p:sp>
@@ -9118,12 +9868,17 @@
           </a:bodyPr>
           <a:lstStyle/>
           <a:p>
+            <a:pPr>
+              <a:defRPr>
+                <a:latin typeface="Roboto"/>
+              </a:defRPr>
+            </a:pPr>
             <a:r>
               <a:rPr sz="1000" b="0">
                 <a:solidFill>
                   <a:srgbClr val="5F6F63"/>
                 </a:solidFill>
-                <a:latin typeface="Arial"/>
+                <a:latin typeface="Roboto"/>
               </a:rPr>
               <a:t>SME sample businesses · Which products and services are growing?</a:t>
             </a:r>
@@ -9152,12 +9907,17 @@
           </a:bodyPr>
           <a:lstStyle/>
           <a:p>
+            <a:pPr>
+              <a:defRPr>
+                <a:latin typeface="Roboto"/>
+              </a:defRPr>
+            </a:pPr>
             <a:r>
               <a:rPr sz="2400" b="1">
                 <a:solidFill>
                   <a:srgbClr val="25342A"/>
                 </a:solidFill>
-                <a:latin typeface="Arial"/>
+                <a:latin typeface="Roboto"/>
               </a:rPr>
               <a:t>What it shows · Services · Type of work: All</a:t>
             </a:r>
@@ -9205,7 +9965,11 @@
           <a:bodyPr rtlCol="0" anchor="ctr"/>
           <a:lstStyle/>
           <a:p>
-            <a:pPr algn="ctr"/>
+            <a:pPr algn="ctr">
+              <a:defRPr>
+                <a:latin typeface="Roboto"/>
+              </a:defRPr>
+            </a:pPr>
           </a:p>
         </p:txBody>
       </p:sp>
@@ -9231,12 +9995,17 @@
           </a:bodyPr>
           <a:lstStyle/>
           <a:p>
+            <a:pPr>
+              <a:defRPr>
+                <a:latin typeface="Roboto"/>
+              </a:defRPr>
+            </a:pPr>
             <a:r>
               <a:rPr sz="1100" b="1">
                 <a:solidFill>
                   <a:srgbClr val="5F6F63"/>
                 </a:solidFill>
-                <a:latin typeface="Arial"/>
+                <a:latin typeface="Roboto"/>
               </a:rPr>
               <a:t>WHAT IT SHOWS</a:t>
             </a:r>
@@ -9265,12 +10034,17 @@
           </a:bodyPr>
           <a:lstStyle/>
           <a:p>
+            <a:pPr>
+              <a:defRPr>
+                <a:latin typeface="Roboto"/>
+              </a:defRPr>
+            </a:pPr>
             <a:r>
               <a:rPr sz="1600" b="0">
                 <a:solidFill>
                   <a:srgbClr val="25342A"/>
                 </a:solidFill>
-                <a:latin typeface="Arial"/>
+                <a:latin typeface="Roboto"/>
               </a:rPr>
               <a:t>Revenue is $814,830 this financial year to date (Jul to Apr 2026). Training makes the highest gross margin (74.6%); Projects the lowest (61.6%). The business needs 88.6% gross margin just to cover overheads.</a:t>
             </a:r>
@@ -9318,7 +10092,11 @@
           <a:bodyPr rtlCol="0" anchor="ctr"/>
           <a:lstStyle/>
           <a:p>
-            <a:pPr algn="ctr"/>
+            <a:pPr algn="ctr">
+              <a:defRPr>
+                <a:latin typeface="Roboto"/>
+              </a:defRPr>
+            </a:pPr>
           </a:p>
         </p:txBody>
       </p:sp>
@@ -9344,12 +10122,17 @@
           </a:bodyPr>
           <a:lstStyle/>
           <a:p>
+            <a:pPr>
+              <a:defRPr>
+                <a:latin typeface="Roboto"/>
+              </a:defRPr>
+            </a:pPr>
             <a:r>
               <a:rPr sz="1100" b="1">
                 <a:solidFill>
                   <a:srgbClr val="5F6F63"/>
                 </a:solidFill>
-                <a:latin typeface="Arial"/>
+                <a:latin typeface="Roboto"/>
               </a:rPr>
               <a:t>WHAT YOU'D DO ABOUT IT</a:t>
             </a:r>
@@ -9378,12 +10161,17 @@
           </a:bodyPr>
           <a:lstStyle/>
           <a:p>
+            <a:pPr>
+              <a:defRPr>
+                <a:latin typeface="Roboto"/>
+              </a:defRPr>
+            </a:pPr>
             <a:r>
               <a:rPr sz="1600" b="0">
                 <a:solidFill>
                   <a:srgbClr val="25342A"/>
                 </a:solidFill>
-                <a:latin typeface="Arial"/>
+                <a:latin typeface="Roboto"/>
               </a:rPr>
               <a:t>Training: 74.6% gross margin, the most profitable work you do. Projects: 61.6% gross margin, below the 88.6% needed to cover overheads.</a:t>
             </a:r>
@@ -9412,12 +10200,17 @@
           </a:bodyPr>
           <a:lstStyle/>
           <a:p>
+            <a:pPr>
+              <a:defRPr>
+                <a:latin typeface="Roboto"/>
+              </a:defRPr>
+            </a:pPr>
             <a:r>
               <a:rPr sz="900" b="0">
                 <a:solidFill>
                   <a:srgbClr val="5F6F63"/>
                 </a:solidFill>
-                <a:latin typeface="Arial"/>
+                <a:latin typeface="Roboto"/>
               </a:rPr>
               <a:t>growth.pptx</a:t>
             </a:r>
@@ -9446,13 +10239,17 @@
           </a:bodyPr>
           <a:lstStyle/>
           <a:p>
-            <a:pPr algn="ctr"/>
+            <a:pPr algn="ctr">
+              <a:defRPr>
+                <a:latin typeface="Roboto"/>
+              </a:defRPr>
+            </a:pPr>
             <a:r>
               <a:rPr sz="900" b="0">
                 <a:solidFill>
                   <a:srgbClr val="5F6F63"/>
                 </a:solidFill>
-                <a:latin typeface="Arial"/>
+                <a:latin typeface="Roboto"/>
               </a:rPr>
               <a:t>Data retrieved 2pm, Tue 6 Oct 2026 · Sample data</a:t>
             </a:r>
@@ -9481,13 +10278,17 @@
           </a:bodyPr>
           <a:lstStyle/>
           <a:p>
-            <a:pPr algn="r"/>
+            <a:pPr algn="r">
+              <a:defRPr>
+                <a:latin typeface="Roboto"/>
+              </a:defRPr>
+            </a:pPr>
             <a:r>
               <a:rPr sz="900" b="0">
                 <a:solidFill>
                   <a:srgbClr val="5F6F63"/>
                 </a:solidFill>
-                <a:latin typeface="Arial"/>
+                <a:latin typeface="Roboto"/>
               </a:rPr>
               <a:t>Slide 18 of 27</a:t>
             </a:r>
@@ -9551,7 +10352,11 @@
           <a:bodyPr rtlCol="0" anchor="ctr"/>
           <a:lstStyle/>
           <a:p>
-            <a:pPr algn="ctr"/>
+            <a:pPr algn="ctr">
+              <a:defRPr>
+                <a:latin typeface="Roboto"/>
+              </a:defRPr>
+            </a:pPr>
           </a:p>
         </p:txBody>
       </p:sp>
@@ -9577,12 +10382,17 @@
           </a:bodyPr>
           <a:lstStyle/>
           <a:p>
+            <a:pPr>
+              <a:defRPr>
+                <a:latin typeface="Roboto"/>
+              </a:defRPr>
+            </a:pPr>
             <a:r>
               <a:rPr sz="1000" b="0">
                 <a:solidFill>
                   <a:srgbClr val="5F6F63"/>
                 </a:solidFill>
-                <a:latin typeface="Arial"/>
+                <a:latin typeface="Roboto"/>
               </a:rPr>
               <a:t>SME sample businesses · Which products and services are growing?</a:t>
             </a:r>
@@ -9611,12 +10421,17 @@
           </a:bodyPr>
           <a:lstStyle/>
           <a:p>
+            <a:pPr>
+              <a:defRPr>
+                <a:latin typeface="Roboto"/>
+              </a:defRPr>
+            </a:pPr>
             <a:r>
               <a:rPr sz="2400" b="1">
                 <a:solidFill>
                   <a:srgbClr val="25342A"/>
                 </a:solidFill>
-                <a:latin typeface="Arial"/>
+                <a:latin typeface="Roboto"/>
               </a:rPr>
               <a:t>Headline numbers · Services · Type of work: Projects</a:t>
             </a:r>
@@ -9664,7 +10479,11 @@
           <a:bodyPr rtlCol="0" anchor="ctr"/>
           <a:lstStyle/>
           <a:p>
-            <a:pPr algn="ctr"/>
+            <a:pPr algn="ctr">
+              <a:defRPr>
+                <a:latin typeface="Roboto"/>
+              </a:defRPr>
+            </a:pPr>
           </a:p>
         </p:txBody>
       </p:sp>
@@ -9690,12 +10509,17 @@
           </a:bodyPr>
           <a:lstStyle/>
           <a:p>
+            <a:pPr>
+              <a:defRPr>
+                <a:latin typeface="Roboto"/>
+              </a:defRPr>
+            </a:pPr>
             <a:r>
               <a:rPr sz="1200" b="0">
                 <a:solidFill>
                   <a:srgbClr val="5F6F63"/>
                 </a:solidFill>
-                <a:latin typeface="Arial"/>
+                <a:latin typeface="Roboto"/>
               </a:rPr>
               <a:t>April against April last year</a:t>
             </a:r>
@@ -9724,12 +10548,17 @@
           </a:bodyPr>
           <a:lstStyle/>
           <a:p>
+            <a:pPr>
+              <a:defRPr>
+                <a:latin typeface="Roboto"/>
+              </a:defRPr>
+            </a:pPr>
             <a:r>
               <a:rPr sz="3000" b="1">
                 <a:solidFill>
                   <a:srgbClr val="2F7A5D"/>
                 </a:solidFill>
-                <a:latin typeface="Arial"/>
+                <a:latin typeface="Roboto"/>
               </a:rPr>
               <a:t>25.3%</a:t>
             </a:r>
@@ -9758,12 +10587,17 @@
           </a:bodyPr>
           <a:lstStyle/>
           <a:p>
+            <a:pPr>
+              <a:defRPr>
+                <a:latin typeface="Roboto"/>
+              </a:defRPr>
+            </a:pPr>
             <a:r>
               <a:rPr sz="1100" b="0">
                 <a:solidFill>
                   <a:srgbClr val="5F6F63"/>
                 </a:solidFill>
-                <a:latin typeface="Arial"/>
+                <a:latin typeface="Roboto"/>
               </a:rPr>
               <a:t>$47,090 against $37,570</a:t>
             </a:r>
@@ -9811,7 +10645,11 @@
           <a:bodyPr rtlCol="0" anchor="ctr"/>
           <a:lstStyle/>
           <a:p>
-            <a:pPr algn="ctr"/>
+            <a:pPr algn="ctr">
+              <a:defRPr>
+                <a:latin typeface="Roboto"/>
+              </a:defRPr>
+            </a:pPr>
           </a:p>
         </p:txBody>
       </p:sp>
@@ -9837,12 +10675,17 @@
           </a:bodyPr>
           <a:lstStyle/>
           <a:p>
+            <a:pPr>
+              <a:defRPr>
+                <a:latin typeface="Roboto"/>
+              </a:defRPr>
+            </a:pPr>
             <a:r>
               <a:rPr sz="1200" b="0">
                 <a:solidFill>
                   <a:srgbClr val="5F6F63"/>
                 </a:solidFill>
-                <a:latin typeface="Arial"/>
+                <a:latin typeface="Roboto"/>
               </a:rPr>
               <a:t>Year to date (Jul to Apr 2026)</a:t>
             </a:r>
@@ -9871,12 +10714,17 @@
           </a:bodyPr>
           <a:lstStyle/>
           <a:p>
+            <a:pPr>
+              <a:defRPr>
+                <a:latin typeface="Roboto"/>
+              </a:defRPr>
+            </a:pPr>
             <a:r>
               <a:rPr sz="3000" b="1">
                 <a:solidFill>
                   <a:srgbClr val="2F7A5D"/>
                 </a:solidFill>
-                <a:latin typeface="Arial"/>
+                <a:latin typeface="Roboto"/>
               </a:rPr>
               <a:t>$509,230</a:t>
             </a:r>
@@ -9905,12 +10753,17 @@
           </a:bodyPr>
           <a:lstStyle/>
           <a:p>
+            <a:pPr>
+              <a:defRPr>
+                <a:latin typeface="Roboto"/>
+              </a:defRPr>
+            </a:pPr>
             <a:r>
               <a:rPr sz="1100" b="0">
                 <a:solidFill>
                   <a:srgbClr val="5F6F63"/>
                 </a:solidFill>
-                <a:latin typeface="Arial"/>
+                <a:latin typeface="Roboto"/>
               </a:rPr>
               <a:t>same period last year: not in the data</a:t>
             </a:r>
@@ -9958,7 +10811,11 @@
           <a:bodyPr rtlCol="0" anchor="ctr"/>
           <a:lstStyle/>
           <a:p>
-            <a:pPr algn="ctr"/>
+            <a:pPr algn="ctr">
+              <a:defRPr>
+                <a:latin typeface="Roboto"/>
+              </a:defRPr>
+            </a:pPr>
           </a:p>
         </p:txBody>
       </p:sp>
@@ -9984,12 +10841,17 @@
           </a:bodyPr>
           <a:lstStyle/>
           <a:p>
+            <a:pPr>
+              <a:defRPr>
+                <a:latin typeface="Roboto"/>
+              </a:defRPr>
+            </a:pPr>
             <a:r>
               <a:rPr sz="1200" b="0">
                 <a:solidFill>
                   <a:srgbClr val="5F6F63"/>
                 </a:solidFill>
-                <a:latin typeface="Arial"/>
+                <a:latin typeface="Roboto"/>
               </a:rPr>
               <a:t>Gross margin, year to date</a:t>
             </a:r>
@@ -10018,12 +10880,17 @@
           </a:bodyPr>
           <a:lstStyle/>
           <a:p>
+            <a:pPr>
+              <a:defRPr>
+                <a:latin typeface="Roboto"/>
+              </a:defRPr>
+            </a:pPr>
             <a:r>
               <a:rPr sz="3000" b="1">
                 <a:solidFill>
                   <a:srgbClr val="2F7A5D"/>
                 </a:solidFill>
-                <a:latin typeface="Arial"/>
+                <a:latin typeface="Roboto"/>
               </a:rPr>
               <a:t>61.6%</a:t>
             </a:r>
@@ -10052,12 +10919,17 @@
           </a:bodyPr>
           <a:lstStyle/>
           <a:p>
+            <a:pPr>
+              <a:defRPr>
+                <a:latin typeface="Roboto"/>
+              </a:defRPr>
+            </a:pPr>
             <a:r>
               <a:rPr sz="1100" b="0">
                 <a:solidFill>
                   <a:srgbClr val="5F6F63"/>
                 </a:solidFill>
-                <a:latin typeface="Arial"/>
+                <a:latin typeface="Roboto"/>
               </a:rPr>
               <a:t>$313,630 before overheads</a:t>
             </a:r>
@@ -10086,12 +10958,17 @@
           </a:bodyPr>
           <a:lstStyle/>
           <a:p>
+            <a:pPr>
+              <a:defRPr>
+                <a:latin typeface="Roboto"/>
+              </a:defRPr>
+            </a:pPr>
             <a:r>
               <a:rPr sz="900" b="0">
                 <a:solidFill>
                   <a:srgbClr val="5F6F63"/>
                 </a:solidFill>
-                <a:latin typeface="Arial"/>
+                <a:latin typeface="Roboto"/>
               </a:rPr>
               <a:t>growth.pptx</a:t>
             </a:r>
@@ -10120,13 +10997,17 @@
           </a:bodyPr>
           <a:lstStyle/>
           <a:p>
-            <a:pPr algn="ctr"/>
+            <a:pPr algn="ctr">
+              <a:defRPr>
+                <a:latin typeface="Roboto"/>
+              </a:defRPr>
+            </a:pPr>
             <a:r>
               <a:rPr sz="900" b="0">
                 <a:solidFill>
                   <a:srgbClr val="5F6F63"/>
                 </a:solidFill>
-                <a:latin typeface="Arial"/>
+                <a:latin typeface="Roboto"/>
               </a:rPr>
               <a:t>Data retrieved 2pm, Tue 6 Oct 2026 · Sample data</a:t>
             </a:r>
@@ -10155,13 +11036,17 @@
           </a:bodyPr>
           <a:lstStyle/>
           <a:p>
-            <a:pPr algn="r"/>
+            <a:pPr algn="r">
+              <a:defRPr>
+                <a:latin typeface="Roboto"/>
+              </a:defRPr>
+            </a:pPr>
             <a:r>
               <a:rPr sz="900" b="0">
                 <a:solidFill>
                   <a:srgbClr val="5F6F63"/>
                 </a:solidFill>
-                <a:latin typeface="Arial"/>
+                <a:latin typeface="Roboto"/>
               </a:rPr>
               <a:t>Slide 19 of 27</a:t>
             </a:r>
@@ -10225,7 +11110,11 @@
           <a:bodyPr rtlCol="0" anchor="ctr"/>
           <a:lstStyle/>
           <a:p>
-            <a:pPr algn="ctr"/>
+            <a:pPr algn="ctr">
+              <a:defRPr>
+                <a:latin typeface="Roboto"/>
+              </a:defRPr>
+            </a:pPr>
           </a:p>
         </p:txBody>
       </p:sp>
@@ -10251,12 +11140,17 @@
           </a:bodyPr>
           <a:lstStyle/>
           <a:p>
+            <a:pPr>
+              <a:defRPr>
+                <a:latin typeface="Roboto"/>
+              </a:defRPr>
+            </a:pPr>
             <a:r>
               <a:rPr sz="1000" b="0">
                 <a:solidFill>
                   <a:srgbClr val="5F6F63"/>
                 </a:solidFill>
-                <a:latin typeface="Arial"/>
+                <a:latin typeface="Roboto"/>
               </a:rPr>
               <a:t>SME sample businesses · Which products and services are growing?</a:t>
             </a:r>
@@ -10285,12 +11179,17 @@
           </a:bodyPr>
           <a:lstStyle/>
           <a:p>
+            <a:pPr>
+              <a:defRPr>
+                <a:latin typeface="Roboto"/>
+              </a:defRPr>
+            </a:pPr>
             <a:r>
               <a:rPr sz="2400" b="1">
                 <a:solidFill>
                   <a:srgbClr val="25342A"/>
                 </a:solidFill>
-                <a:latin typeface="Arial"/>
+                <a:latin typeface="Roboto"/>
               </a:rPr>
               <a:t>Gross margin, not profit</a:t>
             </a:r>
@@ -10338,7 +11237,11 @@
           <a:bodyPr rtlCol="0" anchor="ctr"/>
           <a:lstStyle/>
           <a:p>
-            <a:pPr algn="ctr"/>
+            <a:pPr algn="ctr">
+              <a:defRPr>
+                <a:latin typeface="Roboto"/>
+              </a:defRPr>
+            </a:pPr>
           </a:p>
         </p:txBody>
       </p:sp>
@@ -10364,12 +11267,17 @@
           </a:bodyPr>
           <a:lstStyle/>
           <a:p>
+            <a:pPr>
+              <a:defRPr>
+                <a:latin typeface="Roboto"/>
+              </a:defRPr>
+            </a:pPr>
             <a:r>
               <a:rPr sz="1100" b="1">
                 <a:solidFill>
                   <a:srgbClr val="5F6F63"/>
                 </a:solidFill>
-                <a:latin typeface="Arial"/>
+                <a:latin typeface="Roboto"/>
               </a:rPr>
               <a:t>GROSS MARGIN, NOT PROFIT</a:t>
             </a:r>
@@ -10398,12 +11306,17 @@
           </a:bodyPr>
           <a:lstStyle/>
           <a:p>
+            <a:pPr>
+              <a:defRPr>
+                <a:latin typeface="Roboto"/>
+              </a:defRPr>
+            </a:pPr>
             <a:r>
               <a:rPr sz="1600" b="0">
                 <a:solidFill>
                   <a:srgbClr val="25342A"/>
                 </a:solidFill>
-                <a:latin typeface="Arial"/>
+                <a:latin typeface="Roboto"/>
               </a:rPr>
               <a:t>Gross margin is not profit. Job gross margin = revenue less materials, subcontractors and technician time charged to the job at $68 an hour (wages and all on-costs). Not included: technician time not charged to any job (travel, training, waiting), and overheads (office wages, marketing, vehicles, rent, insurance, IT, depreciation, interest). Profit is what's left after those. Wages always include all on-costs: super, payroll tax, workers' compensation insurance and leave.</a:t>
             </a:r>
@@ -10432,12 +11345,17 @@
           </a:bodyPr>
           <a:lstStyle/>
           <a:p>
+            <a:pPr>
+              <a:defRPr>
+                <a:latin typeface="Roboto"/>
+              </a:defRPr>
+            </a:pPr>
             <a:r>
               <a:rPr sz="900" b="0">
                 <a:solidFill>
                   <a:srgbClr val="5F6F63"/>
                 </a:solidFill>
-                <a:latin typeface="Arial"/>
+                <a:latin typeface="Roboto"/>
               </a:rPr>
               <a:t>growth.pptx</a:t>
             </a:r>
@@ -10466,13 +11384,17 @@
           </a:bodyPr>
           <a:lstStyle/>
           <a:p>
-            <a:pPr algn="ctr"/>
+            <a:pPr algn="ctr">
+              <a:defRPr>
+                <a:latin typeface="Roboto"/>
+              </a:defRPr>
+            </a:pPr>
             <a:r>
               <a:rPr sz="900" b="0">
                 <a:solidFill>
                   <a:srgbClr val="5F6F63"/>
                 </a:solidFill>
-                <a:latin typeface="Arial"/>
+                <a:latin typeface="Roboto"/>
               </a:rPr>
               <a:t>Data retrieved 2pm, Tue 6 Oct 2026 · Sample data</a:t>
             </a:r>
@@ -10501,13 +11423,17 @@
           </a:bodyPr>
           <a:lstStyle/>
           <a:p>
-            <a:pPr algn="r"/>
+            <a:pPr algn="r">
+              <a:defRPr>
+                <a:latin typeface="Roboto"/>
+              </a:defRPr>
+            </a:pPr>
             <a:r>
               <a:rPr sz="900" b="0">
                 <a:solidFill>
                   <a:srgbClr val="5F6F63"/>
                 </a:solidFill>
-                <a:latin typeface="Arial"/>
+                <a:latin typeface="Roboto"/>
               </a:rPr>
               <a:t>Slide 2 of 27</a:t>
             </a:r>
@@ -10571,7 +11497,11 @@
           <a:bodyPr rtlCol="0" anchor="ctr"/>
           <a:lstStyle/>
           <a:p>
-            <a:pPr algn="ctr"/>
+            <a:pPr algn="ctr">
+              <a:defRPr>
+                <a:latin typeface="Roboto"/>
+              </a:defRPr>
+            </a:pPr>
           </a:p>
         </p:txBody>
       </p:sp>
@@ -10597,12 +11527,17 @@
           </a:bodyPr>
           <a:lstStyle/>
           <a:p>
+            <a:pPr>
+              <a:defRPr>
+                <a:latin typeface="Roboto"/>
+              </a:defRPr>
+            </a:pPr>
             <a:r>
               <a:rPr sz="1000" b="0">
                 <a:solidFill>
                   <a:srgbClr val="5F6F63"/>
                 </a:solidFill>
-                <a:latin typeface="Arial"/>
+                <a:latin typeface="Roboto"/>
               </a:rPr>
               <a:t>SME sample businesses · Which products and services are growing?</a:t>
             </a:r>
@@ -10631,12 +11566,17 @@
           </a:bodyPr>
           <a:lstStyle/>
           <a:p>
+            <a:pPr>
+              <a:defRPr>
+                <a:latin typeface="Roboto"/>
+              </a:defRPr>
+            </a:pPr>
             <a:r>
               <a:rPr sz="2400" b="1">
                 <a:solidFill>
                   <a:srgbClr val="25342A"/>
                 </a:solidFill>
-                <a:latin typeface="Arial"/>
+                <a:latin typeface="Roboto"/>
               </a:rPr>
               <a:t>What it shows · Services · Type of work: Projects</a:t>
             </a:r>
@@ -10684,7 +11624,11 @@
           <a:bodyPr rtlCol="0" anchor="ctr"/>
           <a:lstStyle/>
           <a:p>
-            <a:pPr algn="ctr"/>
+            <a:pPr algn="ctr">
+              <a:defRPr>
+                <a:latin typeface="Roboto"/>
+              </a:defRPr>
+            </a:pPr>
           </a:p>
         </p:txBody>
       </p:sp>
@@ -10710,12 +11654,17 @@
           </a:bodyPr>
           <a:lstStyle/>
           <a:p>
+            <a:pPr>
+              <a:defRPr>
+                <a:latin typeface="Roboto"/>
+              </a:defRPr>
+            </a:pPr>
             <a:r>
               <a:rPr sz="1100" b="1">
                 <a:solidFill>
                   <a:srgbClr val="5F6F63"/>
                 </a:solidFill>
-                <a:latin typeface="Arial"/>
+                <a:latin typeface="Roboto"/>
               </a:rPr>
               <a:t>WHAT IT SHOWS</a:t>
             </a:r>
@@ -10744,12 +11693,17 @@
           </a:bodyPr>
           <a:lstStyle/>
           <a:p>
+            <a:pPr>
+              <a:defRPr>
+                <a:latin typeface="Roboto"/>
+              </a:defRPr>
+            </a:pPr>
             <a:r>
               <a:rPr sz="1600" b="0">
                 <a:solidFill>
                   <a:srgbClr val="25342A"/>
                 </a:solidFill>
-                <a:latin typeface="Arial"/>
+                <a:latin typeface="Roboto"/>
               </a:rPr>
               <a:t>Projects brought in $509,230 this financial year to date, at a 61.6% gross margin (below the 64.0% overall).</a:t>
             </a:r>
@@ -10797,7 +11751,11 @@
           <a:bodyPr rtlCol="0" anchor="ctr"/>
           <a:lstStyle/>
           <a:p>
-            <a:pPr algn="ctr"/>
+            <a:pPr algn="ctr">
+              <a:defRPr>
+                <a:latin typeface="Roboto"/>
+              </a:defRPr>
+            </a:pPr>
           </a:p>
         </p:txBody>
       </p:sp>
@@ -10823,12 +11781,17 @@
           </a:bodyPr>
           <a:lstStyle/>
           <a:p>
+            <a:pPr>
+              <a:defRPr>
+                <a:latin typeface="Roboto"/>
+              </a:defRPr>
+            </a:pPr>
             <a:r>
               <a:rPr sz="1100" b="1">
                 <a:solidFill>
                   <a:srgbClr val="5F6F63"/>
                 </a:solidFill>
-                <a:latin typeface="Arial"/>
+                <a:latin typeface="Roboto"/>
               </a:rPr>
               <a:t>WHAT YOU'D DO ABOUT IT</a:t>
             </a:r>
@@ -10857,12 +11820,17 @@
           </a:bodyPr>
           <a:lstStyle/>
           <a:p>
+            <a:pPr>
+              <a:defRPr>
+                <a:latin typeface="Roboto"/>
+              </a:defRPr>
+            </a:pPr>
             <a:r>
               <a:rPr sz="1600" b="0">
                 <a:solidFill>
                   <a:srgbClr val="25342A"/>
                 </a:solidFill>
-                <a:latin typeface="Arial"/>
+                <a:latin typeface="Roboto"/>
               </a:rPr>
               <a:t>Projects: 61.6% gross margin, below the 88.6% needed to cover overheads.</a:t>
             </a:r>
@@ -10891,12 +11859,17 @@
           </a:bodyPr>
           <a:lstStyle/>
           <a:p>
+            <a:pPr>
+              <a:defRPr>
+                <a:latin typeface="Roboto"/>
+              </a:defRPr>
+            </a:pPr>
             <a:r>
               <a:rPr sz="900" b="0">
                 <a:solidFill>
                   <a:srgbClr val="5F6F63"/>
                 </a:solidFill>
-                <a:latin typeface="Arial"/>
+                <a:latin typeface="Roboto"/>
               </a:rPr>
               <a:t>growth.pptx</a:t>
             </a:r>
@@ -10925,13 +11898,17 @@
           </a:bodyPr>
           <a:lstStyle/>
           <a:p>
-            <a:pPr algn="ctr"/>
+            <a:pPr algn="ctr">
+              <a:defRPr>
+                <a:latin typeface="Roboto"/>
+              </a:defRPr>
+            </a:pPr>
             <a:r>
               <a:rPr sz="900" b="0">
                 <a:solidFill>
                   <a:srgbClr val="5F6F63"/>
                 </a:solidFill>
-                <a:latin typeface="Arial"/>
+                <a:latin typeface="Roboto"/>
               </a:rPr>
               <a:t>Data retrieved 2pm, Tue 6 Oct 2026 · Sample data</a:t>
             </a:r>
@@ -10960,13 +11937,17 @@
           </a:bodyPr>
           <a:lstStyle/>
           <a:p>
-            <a:pPr algn="r"/>
+            <a:pPr algn="r">
+              <a:defRPr>
+                <a:latin typeface="Roboto"/>
+              </a:defRPr>
+            </a:pPr>
             <a:r>
               <a:rPr sz="900" b="0">
                 <a:solidFill>
                   <a:srgbClr val="5F6F63"/>
                 </a:solidFill>
-                <a:latin typeface="Arial"/>
+                <a:latin typeface="Roboto"/>
               </a:rPr>
               <a:t>Slide 20 of 27</a:t>
             </a:r>
@@ -11030,7 +12011,11 @@
           <a:bodyPr rtlCol="0" anchor="ctr"/>
           <a:lstStyle/>
           <a:p>
-            <a:pPr algn="ctr"/>
+            <a:pPr algn="ctr">
+              <a:defRPr>
+                <a:latin typeface="Roboto"/>
+              </a:defRPr>
+            </a:pPr>
           </a:p>
         </p:txBody>
       </p:sp>
@@ -11056,12 +12041,17 @@
           </a:bodyPr>
           <a:lstStyle/>
           <a:p>
+            <a:pPr>
+              <a:defRPr>
+                <a:latin typeface="Roboto"/>
+              </a:defRPr>
+            </a:pPr>
             <a:r>
               <a:rPr sz="1000" b="0">
                 <a:solidFill>
                   <a:srgbClr val="5F6F63"/>
                 </a:solidFill>
-                <a:latin typeface="Arial"/>
+                <a:latin typeface="Roboto"/>
               </a:rPr>
               <a:t>SME sample businesses · Which products and services are growing?</a:t>
             </a:r>
@@ -11090,12 +12080,17 @@
           </a:bodyPr>
           <a:lstStyle/>
           <a:p>
+            <a:pPr>
+              <a:defRPr>
+                <a:latin typeface="Roboto"/>
+              </a:defRPr>
+            </a:pPr>
             <a:r>
               <a:rPr sz="2400" b="1">
                 <a:solidFill>
                   <a:srgbClr val="25342A"/>
                 </a:solidFill>
-                <a:latin typeface="Arial"/>
+                <a:latin typeface="Roboto"/>
               </a:rPr>
               <a:t>Headline numbers · Services · Type of work: Retainers</a:t>
             </a:r>
@@ -11143,7 +12138,11 @@
           <a:bodyPr rtlCol="0" anchor="ctr"/>
           <a:lstStyle/>
           <a:p>
-            <a:pPr algn="ctr"/>
+            <a:pPr algn="ctr">
+              <a:defRPr>
+                <a:latin typeface="Roboto"/>
+              </a:defRPr>
+            </a:pPr>
           </a:p>
         </p:txBody>
       </p:sp>
@@ -11169,12 +12168,17 @@
           </a:bodyPr>
           <a:lstStyle/>
           <a:p>
+            <a:pPr>
+              <a:defRPr>
+                <a:latin typeface="Roboto"/>
+              </a:defRPr>
+            </a:pPr>
             <a:r>
               <a:rPr sz="1200" b="0">
                 <a:solidFill>
                   <a:srgbClr val="5F6F63"/>
                 </a:solidFill>
-                <a:latin typeface="Arial"/>
+                <a:latin typeface="Roboto"/>
               </a:rPr>
               <a:t>April against April last year</a:t>
             </a:r>
@@ -11203,12 +12207,17 @@
           </a:bodyPr>
           <a:lstStyle/>
           <a:p>
+            <a:pPr>
+              <a:defRPr>
+                <a:latin typeface="Roboto"/>
+              </a:defRPr>
+            </a:pPr>
             <a:r>
               <a:rPr sz="3000" b="1">
                 <a:solidFill>
                   <a:srgbClr val="2F7A5D"/>
                 </a:solidFill>
-                <a:latin typeface="Arial"/>
+                <a:latin typeface="Roboto"/>
               </a:rPr>
               <a:t>29.8%</a:t>
             </a:r>
@@ -11237,12 +12246,17 @@
           </a:bodyPr>
           <a:lstStyle/>
           <a:p>
+            <a:pPr>
+              <a:defRPr>
+                <a:latin typeface="Roboto"/>
+              </a:defRPr>
+            </a:pPr>
             <a:r>
               <a:rPr sz="1100" b="0">
                 <a:solidFill>
                   <a:srgbClr val="5F6F63"/>
                 </a:solidFill>
-                <a:latin typeface="Arial"/>
+                <a:latin typeface="Roboto"/>
               </a:rPr>
               <a:t>$28,300 against $21,800</a:t>
             </a:r>
@@ -11290,7 +12304,11 @@
           <a:bodyPr rtlCol="0" anchor="ctr"/>
           <a:lstStyle/>
           <a:p>
-            <a:pPr algn="ctr"/>
+            <a:pPr algn="ctr">
+              <a:defRPr>
+                <a:latin typeface="Roboto"/>
+              </a:defRPr>
+            </a:pPr>
           </a:p>
         </p:txBody>
       </p:sp>
@@ -11316,12 +12334,17 @@
           </a:bodyPr>
           <a:lstStyle/>
           <a:p>
+            <a:pPr>
+              <a:defRPr>
+                <a:latin typeface="Roboto"/>
+              </a:defRPr>
+            </a:pPr>
             <a:r>
               <a:rPr sz="1200" b="0">
                 <a:solidFill>
                   <a:srgbClr val="5F6F63"/>
                 </a:solidFill>
-                <a:latin typeface="Arial"/>
+                <a:latin typeface="Roboto"/>
               </a:rPr>
               <a:t>Year to date (Jul to Apr 2026)</a:t>
             </a:r>
@@ -11350,12 +12373,17 @@
           </a:bodyPr>
           <a:lstStyle/>
           <a:p>
+            <a:pPr>
+              <a:defRPr>
+                <a:latin typeface="Roboto"/>
+              </a:defRPr>
+            </a:pPr>
             <a:r>
               <a:rPr sz="3000" b="1">
                 <a:solidFill>
                   <a:srgbClr val="2F7A5D"/>
                 </a:solidFill>
-                <a:latin typeface="Arial"/>
+                <a:latin typeface="Roboto"/>
               </a:rPr>
               <a:t>$235,000</a:t>
             </a:r>
@@ -11384,12 +12412,17 @@
           </a:bodyPr>
           <a:lstStyle/>
           <a:p>
+            <a:pPr>
+              <a:defRPr>
+                <a:latin typeface="Roboto"/>
+              </a:defRPr>
+            </a:pPr>
             <a:r>
               <a:rPr sz="1100" b="0">
                 <a:solidFill>
                   <a:srgbClr val="5F6F63"/>
                 </a:solidFill>
-                <a:latin typeface="Arial"/>
+                <a:latin typeface="Roboto"/>
               </a:rPr>
               <a:t>same period last year: not in the data</a:t>
             </a:r>
@@ -11437,7 +12470,11 @@
           <a:bodyPr rtlCol="0" anchor="ctr"/>
           <a:lstStyle/>
           <a:p>
-            <a:pPr algn="ctr"/>
+            <a:pPr algn="ctr">
+              <a:defRPr>
+                <a:latin typeface="Roboto"/>
+              </a:defRPr>
+            </a:pPr>
           </a:p>
         </p:txBody>
       </p:sp>
@@ -11463,12 +12500,17 @@
           </a:bodyPr>
           <a:lstStyle/>
           <a:p>
+            <a:pPr>
+              <a:defRPr>
+                <a:latin typeface="Roboto"/>
+              </a:defRPr>
+            </a:pPr>
             <a:r>
               <a:rPr sz="1200" b="0">
                 <a:solidFill>
                   <a:srgbClr val="5F6F63"/>
                 </a:solidFill>
-                <a:latin typeface="Arial"/>
+                <a:latin typeface="Roboto"/>
               </a:rPr>
               <a:t>Gross margin, year to date</a:t>
             </a:r>
@@ -11497,12 +12539,17 @@
           </a:bodyPr>
           <a:lstStyle/>
           <a:p>
+            <a:pPr>
+              <a:defRPr>
+                <a:latin typeface="Roboto"/>
+              </a:defRPr>
+            </a:pPr>
             <a:r>
               <a:rPr sz="3000" b="1">
                 <a:solidFill>
                   <a:srgbClr val="2F7A5D"/>
                 </a:solidFill>
-                <a:latin typeface="Arial"/>
+                <a:latin typeface="Roboto"/>
               </a:rPr>
               <a:t>66.0%</a:t>
             </a:r>
@@ -11531,12 +12578,17 @@
           </a:bodyPr>
           <a:lstStyle/>
           <a:p>
+            <a:pPr>
+              <a:defRPr>
+                <a:latin typeface="Roboto"/>
+              </a:defRPr>
+            </a:pPr>
             <a:r>
               <a:rPr sz="1100" b="0">
                 <a:solidFill>
                   <a:srgbClr val="5F6F63"/>
                 </a:solidFill>
-                <a:latin typeface="Arial"/>
+                <a:latin typeface="Roboto"/>
               </a:rPr>
               <a:t>$155,200 before overheads</a:t>
             </a:r>
@@ -11565,12 +12617,17 @@
           </a:bodyPr>
           <a:lstStyle/>
           <a:p>
+            <a:pPr>
+              <a:defRPr>
+                <a:latin typeface="Roboto"/>
+              </a:defRPr>
+            </a:pPr>
             <a:r>
               <a:rPr sz="900" b="0">
                 <a:solidFill>
                   <a:srgbClr val="5F6F63"/>
                 </a:solidFill>
-                <a:latin typeface="Arial"/>
+                <a:latin typeface="Roboto"/>
               </a:rPr>
               <a:t>growth.pptx</a:t>
             </a:r>
@@ -11599,13 +12656,17 @@
           </a:bodyPr>
           <a:lstStyle/>
           <a:p>
-            <a:pPr algn="ctr"/>
+            <a:pPr algn="ctr">
+              <a:defRPr>
+                <a:latin typeface="Roboto"/>
+              </a:defRPr>
+            </a:pPr>
             <a:r>
               <a:rPr sz="900" b="0">
                 <a:solidFill>
                   <a:srgbClr val="5F6F63"/>
                 </a:solidFill>
-                <a:latin typeface="Arial"/>
+                <a:latin typeface="Roboto"/>
               </a:rPr>
               <a:t>Data retrieved 2pm, Tue 6 Oct 2026 · Sample data</a:t>
             </a:r>
@@ -11634,13 +12695,17 @@
           </a:bodyPr>
           <a:lstStyle/>
           <a:p>
-            <a:pPr algn="r"/>
+            <a:pPr algn="r">
+              <a:defRPr>
+                <a:latin typeface="Roboto"/>
+              </a:defRPr>
+            </a:pPr>
             <a:r>
               <a:rPr sz="900" b="0">
                 <a:solidFill>
                   <a:srgbClr val="5F6F63"/>
                 </a:solidFill>
-                <a:latin typeface="Arial"/>
+                <a:latin typeface="Roboto"/>
               </a:rPr>
               <a:t>Slide 21 of 27</a:t>
             </a:r>
@@ -11704,7 +12769,11 @@
           <a:bodyPr rtlCol="0" anchor="ctr"/>
           <a:lstStyle/>
           <a:p>
-            <a:pPr algn="ctr"/>
+            <a:pPr algn="ctr">
+              <a:defRPr>
+                <a:latin typeface="Roboto"/>
+              </a:defRPr>
+            </a:pPr>
           </a:p>
         </p:txBody>
       </p:sp>
@@ -11730,12 +12799,17 @@
           </a:bodyPr>
           <a:lstStyle/>
           <a:p>
+            <a:pPr>
+              <a:defRPr>
+                <a:latin typeface="Roboto"/>
+              </a:defRPr>
+            </a:pPr>
             <a:r>
               <a:rPr sz="1000" b="0">
                 <a:solidFill>
                   <a:srgbClr val="5F6F63"/>
                 </a:solidFill>
-                <a:latin typeface="Arial"/>
+                <a:latin typeface="Roboto"/>
               </a:rPr>
               <a:t>SME sample businesses · Which products and services are growing?</a:t>
             </a:r>
@@ -11764,12 +12838,17 @@
           </a:bodyPr>
           <a:lstStyle/>
           <a:p>
+            <a:pPr>
+              <a:defRPr>
+                <a:latin typeface="Roboto"/>
+              </a:defRPr>
+            </a:pPr>
             <a:r>
               <a:rPr sz="2400" b="1">
                 <a:solidFill>
                   <a:srgbClr val="25342A"/>
                 </a:solidFill>
-                <a:latin typeface="Arial"/>
+                <a:latin typeface="Roboto"/>
               </a:rPr>
               <a:t>What it shows · Services · Type of work: Retainers</a:t>
             </a:r>
@@ -11817,7 +12896,11 @@
           <a:bodyPr rtlCol="0" anchor="ctr"/>
           <a:lstStyle/>
           <a:p>
-            <a:pPr algn="ctr"/>
+            <a:pPr algn="ctr">
+              <a:defRPr>
+                <a:latin typeface="Roboto"/>
+              </a:defRPr>
+            </a:pPr>
           </a:p>
         </p:txBody>
       </p:sp>
@@ -11843,12 +12926,17 @@
           </a:bodyPr>
           <a:lstStyle/>
           <a:p>
+            <a:pPr>
+              <a:defRPr>
+                <a:latin typeface="Roboto"/>
+              </a:defRPr>
+            </a:pPr>
             <a:r>
               <a:rPr sz="1100" b="1">
                 <a:solidFill>
                   <a:srgbClr val="5F6F63"/>
                 </a:solidFill>
-                <a:latin typeface="Arial"/>
+                <a:latin typeface="Roboto"/>
               </a:rPr>
               <a:t>WHAT IT SHOWS</a:t>
             </a:r>
@@ -11877,12 +12965,17 @@
           </a:bodyPr>
           <a:lstStyle/>
           <a:p>
+            <a:pPr>
+              <a:defRPr>
+                <a:latin typeface="Roboto"/>
+              </a:defRPr>
+            </a:pPr>
             <a:r>
               <a:rPr sz="1600" b="0">
                 <a:solidFill>
                   <a:srgbClr val="25342A"/>
                 </a:solidFill>
-                <a:latin typeface="Arial"/>
+                <a:latin typeface="Roboto"/>
               </a:rPr>
               <a:t>Retainers brought in $235,000 this financial year to date, at a 66.0% gross margin (above the 64.0% overall).</a:t>
             </a:r>
@@ -11930,7 +13023,11 @@
           <a:bodyPr rtlCol="0" anchor="ctr"/>
           <a:lstStyle/>
           <a:p>
-            <a:pPr algn="ctr"/>
+            <a:pPr algn="ctr">
+              <a:defRPr>
+                <a:latin typeface="Roboto"/>
+              </a:defRPr>
+            </a:pPr>
           </a:p>
         </p:txBody>
       </p:sp>
@@ -11956,12 +13053,17 @@
           </a:bodyPr>
           <a:lstStyle/>
           <a:p>
+            <a:pPr>
+              <a:defRPr>
+                <a:latin typeface="Roboto"/>
+              </a:defRPr>
+            </a:pPr>
             <a:r>
               <a:rPr sz="1100" b="1">
                 <a:solidFill>
                   <a:srgbClr val="5F6F63"/>
                 </a:solidFill>
-                <a:latin typeface="Arial"/>
+                <a:latin typeface="Roboto"/>
               </a:rPr>
               <a:t>WHAT YOU'D DO ABOUT IT</a:t>
             </a:r>
@@ -11990,12 +13092,17 @@
           </a:bodyPr>
           <a:lstStyle/>
           <a:p>
+            <a:pPr>
+              <a:defRPr>
+                <a:latin typeface="Roboto"/>
+              </a:defRPr>
+            </a:pPr>
             <a:r>
               <a:rPr sz="1600" b="0">
                 <a:solidFill>
                   <a:srgbClr val="25342A"/>
                 </a:solidFill>
-                <a:latin typeface="Arial"/>
+                <a:latin typeface="Roboto"/>
               </a:rPr>
               <a:t>Retainers: 66.0% gross margin, below the 88.6% needed to cover overheads.</a:t>
             </a:r>
@@ -12024,12 +13131,17 @@
           </a:bodyPr>
           <a:lstStyle/>
           <a:p>
+            <a:pPr>
+              <a:defRPr>
+                <a:latin typeface="Roboto"/>
+              </a:defRPr>
+            </a:pPr>
             <a:r>
               <a:rPr sz="900" b="0">
                 <a:solidFill>
                   <a:srgbClr val="5F6F63"/>
                 </a:solidFill>
-                <a:latin typeface="Arial"/>
+                <a:latin typeface="Roboto"/>
               </a:rPr>
               <a:t>growth.pptx</a:t>
             </a:r>
@@ -12058,13 +13170,17 @@
           </a:bodyPr>
           <a:lstStyle/>
           <a:p>
-            <a:pPr algn="ctr"/>
+            <a:pPr algn="ctr">
+              <a:defRPr>
+                <a:latin typeface="Roboto"/>
+              </a:defRPr>
+            </a:pPr>
             <a:r>
               <a:rPr sz="900" b="0">
                 <a:solidFill>
                   <a:srgbClr val="5F6F63"/>
                 </a:solidFill>
-                <a:latin typeface="Arial"/>
+                <a:latin typeface="Roboto"/>
               </a:rPr>
               <a:t>Data retrieved 2pm, Tue 6 Oct 2026 · Sample data</a:t>
             </a:r>
@@ -12093,13 +13209,17 @@
           </a:bodyPr>
           <a:lstStyle/>
           <a:p>
-            <a:pPr algn="r"/>
+            <a:pPr algn="r">
+              <a:defRPr>
+                <a:latin typeface="Roboto"/>
+              </a:defRPr>
+            </a:pPr>
             <a:r>
               <a:rPr sz="900" b="0">
                 <a:solidFill>
                   <a:srgbClr val="5F6F63"/>
                 </a:solidFill>
-                <a:latin typeface="Arial"/>
+                <a:latin typeface="Roboto"/>
               </a:rPr>
               <a:t>Slide 22 of 27</a:t>
             </a:r>
@@ -12163,7 +13283,11 @@
           <a:bodyPr rtlCol="0" anchor="ctr"/>
           <a:lstStyle/>
           <a:p>
-            <a:pPr algn="ctr"/>
+            <a:pPr algn="ctr">
+              <a:defRPr>
+                <a:latin typeface="Roboto"/>
+              </a:defRPr>
+            </a:pPr>
           </a:p>
         </p:txBody>
       </p:sp>
@@ -12189,12 +13313,17 @@
           </a:bodyPr>
           <a:lstStyle/>
           <a:p>
+            <a:pPr>
+              <a:defRPr>
+                <a:latin typeface="Roboto"/>
+              </a:defRPr>
+            </a:pPr>
             <a:r>
               <a:rPr sz="1000" b="0">
                 <a:solidFill>
                   <a:srgbClr val="5F6F63"/>
                 </a:solidFill>
-                <a:latin typeface="Arial"/>
+                <a:latin typeface="Roboto"/>
               </a:rPr>
               <a:t>SME sample businesses · Which products and services are growing?</a:t>
             </a:r>
@@ -12223,12 +13352,17 @@
           </a:bodyPr>
           <a:lstStyle/>
           <a:p>
+            <a:pPr>
+              <a:defRPr>
+                <a:latin typeface="Roboto"/>
+              </a:defRPr>
+            </a:pPr>
             <a:r>
               <a:rPr sz="2400" b="1">
                 <a:solidFill>
                   <a:srgbClr val="25342A"/>
                 </a:solidFill>
-                <a:latin typeface="Arial"/>
+                <a:latin typeface="Roboto"/>
               </a:rPr>
               <a:t>Headline numbers · Services · Type of work: Training</a:t>
             </a:r>
@@ -12276,7 +13410,11 @@
           <a:bodyPr rtlCol="0" anchor="ctr"/>
           <a:lstStyle/>
           <a:p>
-            <a:pPr algn="ctr"/>
+            <a:pPr algn="ctr">
+              <a:defRPr>
+                <a:latin typeface="Roboto"/>
+              </a:defRPr>
+            </a:pPr>
           </a:p>
         </p:txBody>
       </p:sp>
@@ -12302,12 +13440,17 @@
           </a:bodyPr>
           <a:lstStyle/>
           <a:p>
+            <a:pPr>
+              <a:defRPr>
+                <a:latin typeface="Roboto"/>
+              </a:defRPr>
+            </a:pPr>
             <a:r>
               <a:rPr sz="1200" b="0">
                 <a:solidFill>
                   <a:srgbClr val="5F6F63"/>
                 </a:solidFill>
-                <a:latin typeface="Arial"/>
+                <a:latin typeface="Roboto"/>
               </a:rPr>
               <a:t>April against April last year</a:t>
             </a:r>
@@ -12336,12 +13479,17 @@
           </a:bodyPr>
           <a:lstStyle/>
           <a:p>
+            <a:pPr>
+              <a:defRPr>
+                <a:latin typeface="Roboto"/>
+              </a:defRPr>
+            </a:pPr>
             <a:r>
               <a:rPr sz="3000" b="1">
                 <a:solidFill>
                   <a:srgbClr val="2F7A5D"/>
                 </a:solidFill>
-                <a:latin typeface="Arial"/>
+                <a:latin typeface="Roboto"/>
               </a:rPr>
               <a:t>13.0%</a:t>
             </a:r>
@@ -12370,12 +13518,17 @@
           </a:bodyPr>
           <a:lstStyle/>
           <a:p>
+            <a:pPr>
+              <a:defRPr>
+                <a:latin typeface="Roboto"/>
+              </a:defRPr>
+            </a:pPr>
             <a:r>
               <a:rPr sz="1100" b="0">
                 <a:solidFill>
                   <a:srgbClr val="5F6F63"/>
                 </a:solidFill>
-                <a:latin typeface="Arial"/>
+                <a:latin typeface="Roboto"/>
               </a:rPr>
               <a:t>$5,200 against $4,600</a:t>
             </a:r>
@@ -12423,7 +13576,11 @@
           <a:bodyPr rtlCol="0" anchor="ctr"/>
           <a:lstStyle/>
           <a:p>
-            <a:pPr algn="ctr"/>
+            <a:pPr algn="ctr">
+              <a:defRPr>
+                <a:latin typeface="Roboto"/>
+              </a:defRPr>
+            </a:pPr>
           </a:p>
         </p:txBody>
       </p:sp>
@@ -12449,12 +13606,17 @@
           </a:bodyPr>
           <a:lstStyle/>
           <a:p>
+            <a:pPr>
+              <a:defRPr>
+                <a:latin typeface="Roboto"/>
+              </a:defRPr>
+            </a:pPr>
             <a:r>
               <a:rPr sz="1200" b="0">
                 <a:solidFill>
                   <a:srgbClr val="5F6F63"/>
                 </a:solidFill>
-                <a:latin typeface="Arial"/>
+                <a:latin typeface="Roboto"/>
               </a:rPr>
               <a:t>Year to date (Jul to Apr 2026)</a:t>
             </a:r>
@@ -12483,12 +13645,17 @@
           </a:bodyPr>
           <a:lstStyle/>
           <a:p>
+            <a:pPr>
+              <a:defRPr>
+                <a:latin typeface="Roboto"/>
+              </a:defRPr>
+            </a:pPr>
             <a:r>
               <a:rPr sz="3000" b="1">
                 <a:solidFill>
                   <a:srgbClr val="2F7A5D"/>
                 </a:solidFill>
-                <a:latin typeface="Arial"/>
+                <a:latin typeface="Roboto"/>
               </a:rPr>
               <a:t>$70,600</a:t>
             </a:r>
@@ -12517,12 +13684,17 @@
           </a:bodyPr>
           <a:lstStyle/>
           <a:p>
+            <a:pPr>
+              <a:defRPr>
+                <a:latin typeface="Roboto"/>
+              </a:defRPr>
+            </a:pPr>
             <a:r>
               <a:rPr sz="1100" b="0">
                 <a:solidFill>
                   <a:srgbClr val="5F6F63"/>
                 </a:solidFill>
-                <a:latin typeface="Arial"/>
+                <a:latin typeface="Roboto"/>
               </a:rPr>
               <a:t>same period last year: not in the data</a:t>
             </a:r>
@@ -12570,7 +13742,11 @@
           <a:bodyPr rtlCol="0" anchor="ctr"/>
           <a:lstStyle/>
           <a:p>
-            <a:pPr algn="ctr"/>
+            <a:pPr algn="ctr">
+              <a:defRPr>
+                <a:latin typeface="Roboto"/>
+              </a:defRPr>
+            </a:pPr>
           </a:p>
         </p:txBody>
       </p:sp>
@@ -12596,12 +13772,17 @@
           </a:bodyPr>
           <a:lstStyle/>
           <a:p>
+            <a:pPr>
+              <a:defRPr>
+                <a:latin typeface="Roboto"/>
+              </a:defRPr>
+            </a:pPr>
             <a:r>
               <a:rPr sz="1200" b="0">
                 <a:solidFill>
                   <a:srgbClr val="5F6F63"/>
                 </a:solidFill>
-                <a:latin typeface="Arial"/>
+                <a:latin typeface="Roboto"/>
               </a:rPr>
               <a:t>Gross margin, year to date</a:t>
             </a:r>
@@ -12630,12 +13811,17 @@
           </a:bodyPr>
           <a:lstStyle/>
           <a:p>
+            <a:pPr>
+              <a:defRPr>
+                <a:latin typeface="Roboto"/>
+              </a:defRPr>
+            </a:pPr>
             <a:r>
               <a:rPr sz="3000" b="1">
                 <a:solidFill>
                   <a:srgbClr val="2F7A5D"/>
                 </a:solidFill>
-                <a:latin typeface="Arial"/>
+                <a:latin typeface="Roboto"/>
               </a:rPr>
               <a:t>74.6%</a:t>
             </a:r>
@@ -12664,12 +13850,17 @@
           </a:bodyPr>
           <a:lstStyle/>
           <a:p>
+            <a:pPr>
+              <a:defRPr>
+                <a:latin typeface="Roboto"/>
+              </a:defRPr>
+            </a:pPr>
             <a:r>
               <a:rPr sz="1100" b="0">
                 <a:solidFill>
                   <a:srgbClr val="5F6F63"/>
                 </a:solidFill>
-                <a:latin typeface="Arial"/>
+                <a:latin typeface="Roboto"/>
               </a:rPr>
               <a:t>$52,660 before overheads</a:t>
             </a:r>
@@ -12698,12 +13889,17 @@
           </a:bodyPr>
           <a:lstStyle/>
           <a:p>
+            <a:pPr>
+              <a:defRPr>
+                <a:latin typeface="Roboto"/>
+              </a:defRPr>
+            </a:pPr>
             <a:r>
               <a:rPr sz="900" b="0">
                 <a:solidFill>
                   <a:srgbClr val="5F6F63"/>
                 </a:solidFill>
-                <a:latin typeface="Arial"/>
+                <a:latin typeface="Roboto"/>
               </a:rPr>
               <a:t>growth.pptx</a:t>
             </a:r>
@@ -12732,13 +13928,17 @@
           </a:bodyPr>
           <a:lstStyle/>
           <a:p>
-            <a:pPr algn="ctr"/>
+            <a:pPr algn="ctr">
+              <a:defRPr>
+                <a:latin typeface="Roboto"/>
+              </a:defRPr>
+            </a:pPr>
             <a:r>
               <a:rPr sz="900" b="0">
                 <a:solidFill>
                   <a:srgbClr val="5F6F63"/>
                 </a:solidFill>
-                <a:latin typeface="Arial"/>
+                <a:latin typeface="Roboto"/>
               </a:rPr>
               <a:t>Data retrieved 2pm, Tue 6 Oct 2026 · Sample data</a:t>
             </a:r>
@@ -12767,13 +13967,17 @@
           </a:bodyPr>
           <a:lstStyle/>
           <a:p>
-            <a:pPr algn="r"/>
+            <a:pPr algn="r">
+              <a:defRPr>
+                <a:latin typeface="Roboto"/>
+              </a:defRPr>
+            </a:pPr>
             <a:r>
               <a:rPr sz="900" b="0">
                 <a:solidFill>
                   <a:srgbClr val="5F6F63"/>
                 </a:solidFill>
-                <a:latin typeface="Arial"/>
+                <a:latin typeface="Roboto"/>
               </a:rPr>
               <a:t>Slide 23 of 27</a:t>
             </a:r>
@@ -12837,7 +14041,11 @@
           <a:bodyPr rtlCol="0" anchor="ctr"/>
           <a:lstStyle/>
           <a:p>
-            <a:pPr algn="ctr"/>
+            <a:pPr algn="ctr">
+              <a:defRPr>
+                <a:latin typeface="Roboto"/>
+              </a:defRPr>
+            </a:pPr>
           </a:p>
         </p:txBody>
       </p:sp>
@@ -12863,12 +14071,17 @@
           </a:bodyPr>
           <a:lstStyle/>
           <a:p>
+            <a:pPr>
+              <a:defRPr>
+                <a:latin typeface="Roboto"/>
+              </a:defRPr>
+            </a:pPr>
             <a:r>
               <a:rPr sz="1000" b="0">
                 <a:solidFill>
                   <a:srgbClr val="5F6F63"/>
                 </a:solidFill>
-                <a:latin typeface="Arial"/>
+                <a:latin typeface="Roboto"/>
               </a:rPr>
               <a:t>SME sample businesses · Which products and services are growing?</a:t>
             </a:r>
@@ -12897,12 +14110,17 @@
           </a:bodyPr>
           <a:lstStyle/>
           <a:p>
+            <a:pPr>
+              <a:defRPr>
+                <a:latin typeface="Roboto"/>
+              </a:defRPr>
+            </a:pPr>
             <a:r>
               <a:rPr sz="2400" b="1">
                 <a:solidFill>
                   <a:srgbClr val="25342A"/>
                 </a:solidFill>
-                <a:latin typeface="Arial"/>
+                <a:latin typeface="Roboto"/>
               </a:rPr>
               <a:t>What it shows · Services · Type of work: Training</a:t>
             </a:r>
@@ -12950,7 +14168,11 @@
           <a:bodyPr rtlCol="0" anchor="ctr"/>
           <a:lstStyle/>
           <a:p>
-            <a:pPr algn="ctr"/>
+            <a:pPr algn="ctr">
+              <a:defRPr>
+                <a:latin typeface="Roboto"/>
+              </a:defRPr>
+            </a:pPr>
           </a:p>
         </p:txBody>
       </p:sp>
@@ -12976,12 +14198,17 @@
           </a:bodyPr>
           <a:lstStyle/>
           <a:p>
+            <a:pPr>
+              <a:defRPr>
+                <a:latin typeface="Roboto"/>
+              </a:defRPr>
+            </a:pPr>
             <a:r>
               <a:rPr sz="1100" b="1">
                 <a:solidFill>
                   <a:srgbClr val="5F6F63"/>
                 </a:solidFill>
-                <a:latin typeface="Arial"/>
+                <a:latin typeface="Roboto"/>
               </a:rPr>
               <a:t>WHAT IT SHOWS</a:t>
             </a:r>
@@ -13010,12 +14237,17 @@
           </a:bodyPr>
           <a:lstStyle/>
           <a:p>
+            <a:pPr>
+              <a:defRPr>
+                <a:latin typeface="Roboto"/>
+              </a:defRPr>
+            </a:pPr>
             <a:r>
               <a:rPr sz="1600" b="0">
                 <a:solidFill>
                   <a:srgbClr val="25342A"/>
                 </a:solidFill>
-                <a:latin typeface="Arial"/>
+                <a:latin typeface="Roboto"/>
               </a:rPr>
               <a:t>Training brought in $70,600 this financial year to date, at a 74.6% gross margin (above the 64.0% overall).</a:t>
             </a:r>
@@ -13063,7 +14295,11 @@
           <a:bodyPr rtlCol="0" anchor="ctr"/>
           <a:lstStyle/>
           <a:p>
-            <a:pPr algn="ctr"/>
+            <a:pPr algn="ctr">
+              <a:defRPr>
+                <a:latin typeface="Roboto"/>
+              </a:defRPr>
+            </a:pPr>
           </a:p>
         </p:txBody>
       </p:sp>
@@ -13089,12 +14325,17 @@
           </a:bodyPr>
           <a:lstStyle/>
           <a:p>
+            <a:pPr>
+              <a:defRPr>
+                <a:latin typeface="Roboto"/>
+              </a:defRPr>
+            </a:pPr>
             <a:r>
               <a:rPr sz="1100" b="1">
                 <a:solidFill>
                   <a:srgbClr val="5F6F63"/>
                 </a:solidFill>
-                <a:latin typeface="Arial"/>
+                <a:latin typeface="Roboto"/>
               </a:rPr>
               <a:t>WHAT YOU'D DO ABOUT IT</a:t>
             </a:r>
@@ -13123,12 +14364,17 @@
           </a:bodyPr>
           <a:lstStyle/>
           <a:p>
+            <a:pPr>
+              <a:defRPr>
+                <a:latin typeface="Roboto"/>
+              </a:defRPr>
+            </a:pPr>
             <a:r>
               <a:rPr sz="1600" b="0">
                 <a:solidFill>
                   <a:srgbClr val="25342A"/>
                 </a:solidFill>
-                <a:latin typeface="Arial"/>
+                <a:latin typeface="Roboto"/>
               </a:rPr>
               <a:t>Training: 74.6% gross margin, below the 88.6% needed to cover overheads.</a:t>
             </a:r>
@@ -13157,12 +14403,17 @@
           </a:bodyPr>
           <a:lstStyle/>
           <a:p>
+            <a:pPr>
+              <a:defRPr>
+                <a:latin typeface="Roboto"/>
+              </a:defRPr>
+            </a:pPr>
             <a:r>
               <a:rPr sz="900" b="0">
                 <a:solidFill>
                   <a:srgbClr val="5F6F63"/>
                 </a:solidFill>
-                <a:latin typeface="Arial"/>
+                <a:latin typeface="Roboto"/>
               </a:rPr>
               <a:t>growth.pptx</a:t>
             </a:r>
@@ -13191,13 +14442,17 @@
           </a:bodyPr>
           <a:lstStyle/>
           <a:p>
-            <a:pPr algn="ctr"/>
+            <a:pPr algn="ctr">
+              <a:defRPr>
+                <a:latin typeface="Roboto"/>
+              </a:defRPr>
+            </a:pPr>
             <a:r>
               <a:rPr sz="900" b="0">
                 <a:solidFill>
                   <a:srgbClr val="5F6F63"/>
                 </a:solidFill>
-                <a:latin typeface="Arial"/>
+                <a:latin typeface="Roboto"/>
               </a:rPr>
               <a:t>Data retrieved 2pm, Tue 6 Oct 2026 · Sample data</a:t>
             </a:r>
@@ -13226,13 +14481,17 @@
           </a:bodyPr>
           <a:lstStyle/>
           <a:p>
-            <a:pPr algn="r"/>
+            <a:pPr algn="r">
+              <a:defRPr>
+                <a:latin typeface="Roboto"/>
+              </a:defRPr>
+            </a:pPr>
             <a:r>
               <a:rPr sz="900" b="0">
                 <a:solidFill>
                   <a:srgbClr val="5F6F63"/>
                 </a:solidFill>
-                <a:latin typeface="Arial"/>
+                <a:latin typeface="Roboto"/>
               </a:rPr>
               <a:t>Slide 24 of 27</a:t>
             </a:r>
@@ -13296,7 +14555,11 @@
           <a:bodyPr rtlCol="0" anchor="ctr"/>
           <a:lstStyle/>
           <a:p>
-            <a:pPr algn="ctr"/>
+            <a:pPr algn="ctr">
+              <a:defRPr>
+                <a:latin typeface="Roboto"/>
+              </a:defRPr>
+            </a:pPr>
           </a:p>
         </p:txBody>
       </p:sp>
@@ -13322,12 +14585,17 @@
           </a:bodyPr>
           <a:lstStyle/>
           <a:p>
+            <a:pPr>
+              <a:defRPr>
+                <a:latin typeface="Roboto"/>
+              </a:defRPr>
+            </a:pPr>
             <a:r>
               <a:rPr sz="1000" b="0">
                 <a:solidFill>
                   <a:srgbClr val="5F6F63"/>
                 </a:solidFill>
-                <a:latin typeface="Arial"/>
+                <a:latin typeface="Roboto"/>
               </a:rPr>
               <a:t>SME sample businesses · Which products and services are growing?</a:t>
             </a:r>
@@ -13356,12 +14624,17 @@
           </a:bodyPr>
           <a:lstStyle/>
           <a:p>
+            <a:pPr>
+              <a:defRPr>
+                <a:latin typeface="Roboto"/>
+              </a:defRPr>
+            </a:pPr>
             <a:r>
               <a:rPr sz="2400" b="1">
                 <a:solidFill>
                   <a:srgbClr val="25342A"/>
                 </a:solidFill>
-                <a:latin typeface="Arial"/>
+                <a:latin typeface="Roboto"/>
               </a:rPr>
               <a:t>Revenue, gross margin and growth by type of work, by month · Revenue $ · Services · Every type of work at once</a:t>
             </a:r>
@@ -13390,12 +14663,17 @@
           </a:bodyPr>
           <a:lstStyle/>
           <a:p>
+            <a:pPr>
+              <a:defRPr>
+                <a:latin typeface="Roboto"/>
+              </a:defRPr>
+            </a:pPr>
             <a:r>
               <a:rPr sz="1200" b="0">
                 <a:solidFill>
                   <a:srgbClr val="5F6F63"/>
                 </a:solidFill>
-                <a:latin typeface="Arial"/>
+                <a:latin typeface="Roboto"/>
               </a:rPr>
               <a:t>Gross margin = revenue less direct cost (materials, subcontractors and time at cost for trades; contractors and consultant time for services), before overheads. Growth is year on year: each month against the same month a year earlier.</a:t>
             </a:r>
@@ -13442,12 +14720,17 @@
           </a:bodyPr>
           <a:lstStyle/>
           <a:p>
+            <a:pPr>
+              <a:defRPr>
+                <a:latin typeface="Roboto"/>
+              </a:defRPr>
+            </a:pPr>
             <a:r>
               <a:rPr sz="900" b="0">
                 <a:solidFill>
                   <a:srgbClr val="5F6F63"/>
                 </a:solidFill>
-                <a:latin typeface="Arial"/>
+                <a:latin typeface="Roboto"/>
               </a:rPr>
               <a:t>growth.pptx</a:t>
             </a:r>
@@ -13476,13 +14759,17 @@
           </a:bodyPr>
           <a:lstStyle/>
           <a:p>
-            <a:pPr algn="ctr"/>
+            <a:pPr algn="ctr">
+              <a:defRPr>
+                <a:latin typeface="Roboto"/>
+              </a:defRPr>
+            </a:pPr>
             <a:r>
               <a:rPr sz="900" b="0">
                 <a:solidFill>
                   <a:srgbClr val="5F6F63"/>
                 </a:solidFill>
-                <a:latin typeface="Arial"/>
+                <a:latin typeface="Roboto"/>
               </a:rPr>
               <a:t>Data retrieved 2pm, Tue 6 Oct 2026 · Sample data</a:t>
             </a:r>
@@ -13511,13 +14798,17 @@
           </a:bodyPr>
           <a:lstStyle/>
           <a:p>
-            <a:pPr algn="r"/>
+            <a:pPr algn="r">
+              <a:defRPr>
+                <a:latin typeface="Roboto"/>
+              </a:defRPr>
+            </a:pPr>
             <a:r>
               <a:rPr sz="900" b="0">
                 <a:solidFill>
                   <a:srgbClr val="5F6F63"/>
                 </a:solidFill>
-                <a:latin typeface="Arial"/>
+                <a:latin typeface="Roboto"/>
               </a:rPr>
               <a:t>Slide 25 of 27</a:t>
             </a:r>
@@ -13581,7 +14872,11 @@
           <a:bodyPr rtlCol="0" anchor="ctr"/>
           <a:lstStyle/>
           <a:p>
-            <a:pPr algn="ctr"/>
+            <a:pPr algn="ctr">
+              <a:defRPr>
+                <a:latin typeface="Roboto"/>
+              </a:defRPr>
+            </a:pPr>
           </a:p>
         </p:txBody>
       </p:sp>
@@ -13607,12 +14902,17 @@
           </a:bodyPr>
           <a:lstStyle/>
           <a:p>
+            <a:pPr>
+              <a:defRPr>
+                <a:latin typeface="Roboto"/>
+              </a:defRPr>
+            </a:pPr>
             <a:r>
               <a:rPr sz="1000" b="0">
                 <a:solidFill>
                   <a:srgbClr val="5F6F63"/>
                 </a:solidFill>
-                <a:latin typeface="Arial"/>
+                <a:latin typeface="Roboto"/>
               </a:rPr>
               <a:t>SME sample businesses · Which products and services are growing?</a:t>
             </a:r>
@@ -13641,12 +14941,17 @@
           </a:bodyPr>
           <a:lstStyle/>
           <a:p>
+            <a:pPr>
+              <a:defRPr>
+                <a:latin typeface="Roboto"/>
+              </a:defRPr>
+            </a:pPr>
             <a:r>
               <a:rPr sz="2400" b="1">
                 <a:solidFill>
                   <a:srgbClr val="25342A"/>
                 </a:solidFill>
-                <a:latin typeface="Arial"/>
+                <a:latin typeface="Roboto"/>
               </a:rPr>
               <a:t>Revenue, gross margin and growth by type of work, by month · Gross margin % · Services · Every type of work at once</a:t>
             </a:r>
@@ -13675,12 +14980,17 @@
           </a:bodyPr>
           <a:lstStyle/>
           <a:p>
+            <a:pPr>
+              <a:defRPr>
+                <a:latin typeface="Roboto"/>
+              </a:defRPr>
+            </a:pPr>
             <a:r>
               <a:rPr sz="1200" b="0">
                 <a:solidFill>
                   <a:srgbClr val="5F6F63"/>
                 </a:solidFill>
-                <a:latin typeface="Arial"/>
+                <a:latin typeface="Roboto"/>
               </a:rPr>
               <a:t>Gross margin = revenue less direct cost (materials, subcontractors and time at cost for trades; contractors and consultant time for services), before overheads. Growth is year on year: each month against the same month a year earlier.</a:t>
             </a:r>
@@ -13727,12 +15037,17 @@
           </a:bodyPr>
           <a:lstStyle/>
           <a:p>
+            <a:pPr>
+              <a:defRPr>
+                <a:latin typeface="Roboto"/>
+              </a:defRPr>
+            </a:pPr>
             <a:r>
               <a:rPr sz="900" b="0">
                 <a:solidFill>
                   <a:srgbClr val="5F6F63"/>
                 </a:solidFill>
-                <a:latin typeface="Arial"/>
+                <a:latin typeface="Roboto"/>
               </a:rPr>
               <a:t>growth.pptx</a:t>
             </a:r>
@@ -13761,13 +15076,17 @@
           </a:bodyPr>
           <a:lstStyle/>
           <a:p>
-            <a:pPr algn="ctr"/>
+            <a:pPr algn="ctr">
+              <a:defRPr>
+                <a:latin typeface="Roboto"/>
+              </a:defRPr>
+            </a:pPr>
             <a:r>
               <a:rPr sz="900" b="0">
                 <a:solidFill>
                   <a:srgbClr val="5F6F63"/>
                 </a:solidFill>
-                <a:latin typeface="Arial"/>
+                <a:latin typeface="Roboto"/>
               </a:rPr>
               <a:t>Data retrieved 2pm, Tue 6 Oct 2026 · Sample data</a:t>
             </a:r>
@@ -13796,13 +15115,17 @@
           </a:bodyPr>
           <a:lstStyle/>
           <a:p>
-            <a:pPr algn="r"/>
+            <a:pPr algn="r">
+              <a:defRPr>
+                <a:latin typeface="Roboto"/>
+              </a:defRPr>
+            </a:pPr>
             <a:r>
               <a:rPr sz="900" b="0">
                 <a:solidFill>
                   <a:srgbClr val="5F6F63"/>
                 </a:solidFill>
-                <a:latin typeface="Arial"/>
+                <a:latin typeface="Roboto"/>
               </a:rPr>
               <a:t>Slide 26 of 27</a:t>
             </a:r>
@@ -13866,7 +15189,11 @@
           <a:bodyPr rtlCol="0" anchor="ctr"/>
           <a:lstStyle/>
           <a:p>
-            <a:pPr algn="ctr"/>
+            <a:pPr algn="ctr">
+              <a:defRPr>
+                <a:latin typeface="Roboto"/>
+              </a:defRPr>
+            </a:pPr>
           </a:p>
         </p:txBody>
       </p:sp>
@@ -13892,12 +15219,17 @@
           </a:bodyPr>
           <a:lstStyle/>
           <a:p>
+            <a:pPr>
+              <a:defRPr>
+                <a:latin typeface="Roboto"/>
+              </a:defRPr>
+            </a:pPr>
             <a:r>
               <a:rPr sz="1000" b="0">
                 <a:solidFill>
                   <a:srgbClr val="5F6F63"/>
                 </a:solidFill>
-                <a:latin typeface="Arial"/>
+                <a:latin typeface="Roboto"/>
               </a:rPr>
               <a:t>SME sample businesses · Which products and services are growing?</a:t>
             </a:r>
@@ -13926,12 +15258,17 @@
           </a:bodyPr>
           <a:lstStyle/>
           <a:p>
+            <a:pPr>
+              <a:defRPr>
+                <a:latin typeface="Roboto"/>
+              </a:defRPr>
+            </a:pPr>
             <a:r>
               <a:rPr sz="2400" b="1">
                 <a:solidFill>
                   <a:srgbClr val="25342A"/>
                 </a:solidFill>
-                <a:latin typeface="Arial"/>
+                <a:latin typeface="Roboto"/>
               </a:rPr>
               <a:t>By type of work: financial year to date (Jul to Apr 2026) against the same period last year · Services · Every type of work at once</a:t>
             </a:r>
@@ -13969,7 +15306,13 @@
                   <a:txBody>
                     <a:bodyPr/>
                     <a:lstStyle/>
-                    <a:p/>
+                    <a:p>
+                      <a:pPr>
+                        <a:defRPr>
+                          <a:latin typeface="Roboto"/>
+                        </a:defRPr>
+                      </a:pPr>
+                    </a:p>
                   </a:txBody>
                   <a:tcPr>
                     <a:solidFill>
@@ -13982,12 +15325,17 @@
                     <a:bodyPr/>
                     <a:lstStyle/>
                     <a:p>
-                      <a:pPr algn="r"/>
+                      <a:pPr algn="r">
+                        <a:defRPr>
+                          <a:latin typeface="Roboto"/>
+                        </a:defRPr>
+                      </a:pPr>
                       <a:r>
                         <a:rPr sz="1100" b="1">
                           <a:solidFill>
                             <a:srgbClr val="FFFFFF"/>
                           </a:solidFill>
+                          <a:latin typeface="Roboto"/>
                         </a:rPr>
                         <a:t>Year to date</a:t>
                       </a:r>
@@ -14004,12 +15352,17 @@
                     <a:bodyPr/>
                     <a:lstStyle/>
                     <a:p>
-                      <a:pPr algn="r"/>
+                      <a:pPr algn="r">
+                        <a:defRPr>
+                          <a:latin typeface="Roboto"/>
+                        </a:defRPr>
+                      </a:pPr>
                       <a:r>
                         <a:rPr sz="1100" b="1">
                           <a:solidFill>
                             <a:srgbClr val="FFFFFF"/>
                           </a:solidFill>
+                          <a:latin typeface="Roboto"/>
                         </a:rPr>
                         <a:t>Same period last year</a:t>
                       </a:r>
@@ -14026,12 +15379,17 @@
                     <a:bodyPr/>
                     <a:lstStyle/>
                     <a:p>
-                      <a:pPr algn="r"/>
+                      <a:pPr algn="r">
+                        <a:defRPr>
+                          <a:latin typeface="Roboto"/>
+                        </a:defRPr>
+                      </a:pPr>
                       <a:r>
                         <a:rPr sz="1100" b="1">
                           <a:solidFill>
                             <a:srgbClr val="FFFFFF"/>
                           </a:solidFill>
+                          <a:latin typeface="Roboto"/>
                         </a:rPr>
                         <a:t>Growth</a:t>
                       </a:r>
@@ -14048,12 +15406,17 @@
                     <a:bodyPr/>
                     <a:lstStyle/>
                     <a:p>
-                      <a:pPr algn="r"/>
+                      <a:pPr algn="r">
+                        <a:defRPr>
+                          <a:latin typeface="Roboto"/>
+                        </a:defRPr>
+                      </a:pPr>
                       <a:r>
                         <a:rPr sz="1100" b="1">
                           <a:solidFill>
                             <a:srgbClr val="FFFFFF"/>
                           </a:solidFill>
+                          <a:latin typeface="Roboto"/>
                         </a:rPr>
                         <a:t>Gross margin $</a:t>
                       </a:r>
@@ -14070,12 +15433,17 @@
                     <a:bodyPr/>
                     <a:lstStyle/>
                     <a:p>
-                      <a:pPr algn="r"/>
+                      <a:pPr algn="r">
+                        <a:defRPr>
+                          <a:latin typeface="Roboto"/>
+                        </a:defRPr>
+                      </a:pPr>
                       <a:r>
                         <a:rPr sz="1100" b="1">
                           <a:solidFill>
                             <a:srgbClr val="FFFFFF"/>
                           </a:solidFill>
+                          <a:latin typeface="Roboto"/>
                         </a:rPr>
                         <a:t>Gross margin %</a:t>
                       </a:r>
@@ -14094,11 +15462,17 @@
                     <a:bodyPr/>
                     <a:lstStyle/>
                     <a:p>
+                      <a:pPr>
+                        <a:defRPr>
+                          <a:latin typeface="Roboto"/>
+                        </a:defRPr>
+                      </a:pPr>
                       <a:r>
                         <a:rPr sz="1050">
                           <a:solidFill>
                             <a:srgbClr val="25342A"/>
                           </a:solidFill>
+                          <a:latin typeface="Roboto"/>
                         </a:rPr>
                         <a:t>Projects</a:t>
                       </a:r>
@@ -14115,12 +15489,17 @@
                     <a:bodyPr/>
                     <a:lstStyle/>
                     <a:p>
-                      <a:pPr algn="r"/>
+                      <a:pPr algn="r">
+                        <a:defRPr>
+                          <a:latin typeface="Roboto"/>
+                        </a:defRPr>
+                      </a:pPr>
                       <a:r>
                         <a:rPr sz="1050">
                           <a:solidFill>
                             <a:srgbClr val="25342A"/>
                           </a:solidFill>
+                          <a:latin typeface="Roboto"/>
                         </a:rPr>
                         <a:t>$509,230</a:t>
                       </a:r>
@@ -14137,12 +15516,17 @@
                     <a:bodyPr/>
                     <a:lstStyle/>
                     <a:p>
-                      <a:pPr algn="r"/>
+                      <a:pPr algn="r">
+                        <a:defRPr>
+                          <a:latin typeface="Roboto"/>
+                        </a:defRPr>
+                      </a:pPr>
                       <a:r>
                         <a:rPr sz="1050">
                           <a:solidFill>
                             <a:srgbClr val="25342A"/>
                           </a:solidFill>
+                          <a:latin typeface="Roboto"/>
                         </a:rPr>
                         <a:t>–</a:t>
                       </a:r>
@@ -14159,12 +15543,17 @@
                     <a:bodyPr/>
                     <a:lstStyle/>
                     <a:p>
-                      <a:pPr algn="r"/>
+                      <a:pPr algn="r">
+                        <a:defRPr>
+                          <a:latin typeface="Roboto"/>
+                        </a:defRPr>
+                      </a:pPr>
                       <a:r>
                         <a:rPr sz="1050">
                           <a:solidFill>
                             <a:srgbClr val="25342A"/>
                           </a:solidFill>
+                          <a:latin typeface="Roboto"/>
                         </a:rPr>
                         <a:t>–</a:t>
                       </a:r>
@@ -14181,12 +15570,17 @@
                     <a:bodyPr/>
                     <a:lstStyle/>
                     <a:p>
-                      <a:pPr algn="r"/>
+                      <a:pPr algn="r">
+                        <a:defRPr>
+                          <a:latin typeface="Roboto"/>
+                        </a:defRPr>
+                      </a:pPr>
                       <a:r>
                         <a:rPr sz="1050">
                           <a:solidFill>
                             <a:srgbClr val="25342A"/>
                           </a:solidFill>
+                          <a:latin typeface="Roboto"/>
                         </a:rPr>
                         <a:t>$313,630</a:t>
                       </a:r>
@@ -14203,12 +15597,17 @@
                     <a:bodyPr/>
                     <a:lstStyle/>
                     <a:p>
-                      <a:pPr algn="r"/>
+                      <a:pPr algn="r">
+                        <a:defRPr>
+                          <a:latin typeface="Roboto"/>
+                        </a:defRPr>
+                      </a:pPr>
                       <a:r>
                         <a:rPr sz="1050">
                           <a:solidFill>
                             <a:srgbClr val="25342A"/>
                           </a:solidFill>
+                          <a:latin typeface="Roboto"/>
                         </a:rPr>
                         <a:t>61.6%</a:t>
                       </a:r>
@@ -14227,11 +15626,17 @@
                     <a:bodyPr/>
                     <a:lstStyle/>
                     <a:p>
+                      <a:pPr>
+                        <a:defRPr>
+                          <a:latin typeface="Roboto"/>
+                        </a:defRPr>
+                      </a:pPr>
                       <a:r>
                         <a:rPr sz="1050">
                           <a:solidFill>
                             <a:srgbClr val="25342A"/>
                           </a:solidFill>
+                          <a:latin typeface="Roboto"/>
                         </a:rPr>
                         <a:t>Retainers</a:t>
                       </a:r>
@@ -14248,12 +15653,17 @@
                     <a:bodyPr/>
                     <a:lstStyle/>
                     <a:p>
-                      <a:pPr algn="r"/>
+                      <a:pPr algn="r">
+                        <a:defRPr>
+                          <a:latin typeface="Roboto"/>
+                        </a:defRPr>
+                      </a:pPr>
                       <a:r>
                         <a:rPr sz="1050">
                           <a:solidFill>
                             <a:srgbClr val="25342A"/>
                           </a:solidFill>
+                          <a:latin typeface="Roboto"/>
                         </a:rPr>
                         <a:t>$235,000</a:t>
                       </a:r>
@@ -14270,12 +15680,17 @@
                     <a:bodyPr/>
                     <a:lstStyle/>
                     <a:p>
-                      <a:pPr algn="r"/>
+                      <a:pPr algn="r">
+                        <a:defRPr>
+                          <a:latin typeface="Roboto"/>
+                        </a:defRPr>
+                      </a:pPr>
                       <a:r>
                         <a:rPr sz="1050">
                           <a:solidFill>
                             <a:srgbClr val="25342A"/>
                           </a:solidFill>
+                          <a:latin typeface="Roboto"/>
                         </a:rPr>
                         <a:t>–</a:t>
                       </a:r>
@@ -14292,12 +15707,17 @@
                     <a:bodyPr/>
                     <a:lstStyle/>
                     <a:p>
-                      <a:pPr algn="r"/>
+                      <a:pPr algn="r">
+                        <a:defRPr>
+                          <a:latin typeface="Roboto"/>
+                        </a:defRPr>
+                      </a:pPr>
                       <a:r>
                         <a:rPr sz="1050">
                           <a:solidFill>
                             <a:srgbClr val="25342A"/>
                           </a:solidFill>
+                          <a:latin typeface="Roboto"/>
                         </a:rPr>
                         <a:t>–</a:t>
                       </a:r>
@@ -14314,12 +15734,17 @@
                     <a:bodyPr/>
                     <a:lstStyle/>
                     <a:p>
-                      <a:pPr algn="r"/>
+                      <a:pPr algn="r">
+                        <a:defRPr>
+                          <a:latin typeface="Roboto"/>
+                        </a:defRPr>
+                      </a:pPr>
                       <a:r>
                         <a:rPr sz="1050">
                           <a:solidFill>
                             <a:srgbClr val="25342A"/>
                           </a:solidFill>
+                          <a:latin typeface="Roboto"/>
                         </a:rPr>
                         <a:t>$155,200</a:t>
                       </a:r>
@@ -14336,12 +15761,17 @@
                     <a:bodyPr/>
                     <a:lstStyle/>
                     <a:p>
-                      <a:pPr algn="r"/>
+                      <a:pPr algn="r">
+                        <a:defRPr>
+                          <a:latin typeface="Roboto"/>
+                        </a:defRPr>
+                      </a:pPr>
                       <a:r>
                         <a:rPr sz="1050">
                           <a:solidFill>
                             <a:srgbClr val="25342A"/>
                           </a:solidFill>
+                          <a:latin typeface="Roboto"/>
                         </a:rPr>
                         <a:t>66.0%</a:t>
                       </a:r>
@@ -14360,11 +15790,17 @@
                     <a:bodyPr/>
                     <a:lstStyle/>
                     <a:p>
+                      <a:pPr>
+                        <a:defRPr>
+                          <a:latin typeface="Roboto"/>
+                        </a:defRPr>
+                      </a:pPr>
                       <a:r>
                         <a:rPr sz="1050">
                           <a:solidFill>
                             <a:srgbClr val="25342A"/>
                           </a:solidFill>
+                          <a:latin typeface="Roboto"/>
                         </a:rPr>
                         <a:t>Training</a:t>
                       </a:r>
@@ -14381,12 +15817,17 @@
                     <a:bodyPr/>
                     <a:lstStyle/>
                     <a:p>
-                      <a:pPr algn="r"/>
+                      <a:pPr algn="r">
+                        <a:defRPr>
+                          <a:latin typeface="Roboto"/>
+                        </a:defRPr>
+                      </a:pPr>
                       <a:r>
                         <a:rPr sz="1050">
                           <a:solidFill>
                             <a:srgbClr val="25342A"/>
                           </a:solidFill>
+                          <a:latin typeface="Roboto"/>
                         </a:rPr>
                         <a:t>$70,600</a:t>
                       </a:r>
@@ -14403,12 +15844,17 @@
                     <a:bodyPr/>
                     <a:lstStyle/>
                     <a:p>
-                      <a:pPr algn="r"/>
+                      <a:pPr algn="r">
+                        <a:defRPr>
+                          <a:latin typeface="Roboto"/>
+                        </a:defRPr>
+                      </a:pPr>
                       <a:r>
                         <a:rPr sz="1050">
                           <a:solidFill>
                             <a:srgbClr val="25342A"/>
                           </a:solidFill>
+                          <a:latin typeface="Roboto"/>
                         </a:rPr>
                         <a:t>–</a:t>
                       </a:r>
@@ -14425,12 +15871,17 @@
                     <a:bodyPr/>
                     <a:lstStyle/>
                     <a:p>
-                      <a:pPr algn="r"/>
+                      <a:pPr algn="r">
+                        <a:defRPr>
+                          <a:latin typeface="Roboto"/>
+                        </a:defRPr>
+                      </a:pPr>
                       <a:r>
                         <a:rPr sz="1050">
                           <a:solidFill>
                             <a:srgbClr val="25342A"/>
                           </a:solidFill>
+                          <a:latin typeface="Roboto"/>
                         </a:rPr>
                         <a:t>–</a:t>
                       </a:r>
@@ -14447,12 +15898,17 @@
                     <a:bodyPr/>
                     <a:lstStyle/>
                     <a:p>
-                      <a:pPr algn="r"/>
+                      <a:pPr algn="r">
+                        <a:defRPr>
+                          <a:latin typeface="Roboto"/>
+                        </a:defRPr>
+                      </a:pPr>
                       <a:r>
                         <a:rPr sz="1050">
                           <a:solidFill>
                             <a:srgbClr val="25342A"/>
                           </a:solidFill>
+                          <a:latin typeface="Roboto"/>
                         </a:rPr>
                         <a:t>$52,660</a:t>
                       </a:r>
@@ -14469,12 +15925,17 @@
                     <a:bodyPr/>
                     <a:lstStyle/>
                     <a:p>
-                      <a:pPr algn="r"/>
+                      <a:pPr algn="r">
+                        <a:defRPr>
+                          <a:latin typeface="Roboto"/>
+                        </a:defRPr>
+                      </a:pPr>
                       <a:r>
                         <a:rPr sz="1050">
                           <a:solidFill>
                             <a:srgbClr val="25342A"/>
                           </a:solidFill>
+                          <a:latin typeface="Roboto"/>
                         </a:rPr>
                         <a:t>74.6%</a:t>
                       </a:r>
@@ -14493,11 +15954,17 @@
                     <a:bodyPr/>
                     <a:lstStyle/>
                     <a:p>
+                      <a:pPr>
+                        <a:defRPr>
+                          <a:latin typeface="Roboto"/>
+                        </a:defRPr>
+                      </a:pPr>
                       <a:r>
                         <a:rPr sz="1050" b="1">
                           <a:solidFill>
                             <a:srgbClr val="25342A"/>
                           </a:solidFill>
+                          <a:latin typeface="Roboto"/>
                         </a:rPr>
                         <a:t>Total</a:t>
                       </a:r>
@@ -14514,12 +15981,17 @@
                     <a:bodyPr/>
                     <a:lstStyle/>
                     <a:p>
-                      <a:pPr algn="r"/>
+                      <a:pPr algn="r">
+                        <a:defRPr>
+                          <a:latin typeface="Roboto"/>
+                        </a:defRPr>
+                      </a:pPr>
                       <a:r>
                         <a:rPr sz="1050" b="1">
                           <a:solidFill>
                             <a:srgbClr val="25342A"/>
                           </a:solidFill>
+                          <a:latin typeface="Roboto"/>
                         </a:rPr>
                         <a:t>$814,830</a:t>
                       </a:r>
@@ -14536,12 +16008,17 @@
                     <a:bodyPr/>
                     <a:lstStyle/>
                     <a:p>
-                      <a:pPr algn="r"/>
+                      <a:pPr algn="r">
+                        <a:defRPr>
+                          <a:latin typeface="Roboto"/>
+                        </a:defRPr>
+                      </a:pPr>
                       <a:r>
                         <a:rPr sz="1050" b="1">
                           <a:solidFill>
                             <a:srgbClr val="25342A"/>
                           </a:solidFill>
+                          <a:latin typeface="Roboto"/>
                         </a:rPr>
                         <a:t>–</a:t>
                       </a:r>
@@ -14558,12 +16035,17 @@
                     <a:bodyPr/>
                     <a:lstStyle/>
                     <a:p>
-                      <a:pPr algn="r"/>
+                      <a:pPr algn="r">
+                        <a:defRPr>
+                          <a:latin typeface="Roboto"/>
+                        </a:defRPr>
+                      </a:pPr>
                       <a:r>
                         <a:rPr sz="1050" b="1">
                           <a:solidFill>
                             <a:srgbClr val="25342A"/>
                           </a:solidFill>
+                          <a:latin typeface="Roboto"/>
                         </a:rPr>
                         <a:t>–</a:t>
                       </a:r>
@@ -14580,12 +16062,17 @@
                     <a:bodyPr/>
                     <a:lstStyle/>
                     <a:p>
-                      <a:pPr algn="r"/>
+                      <a:pPr algn="r">
+                        <a:defRPr>
+                          <a:latin typeface="Roboto"/>
+                        </a:defRPr>
+                      </a:pPr>
                       <a:r>
                         <a:rPr sz="1050" b="1">
                           <a:solidFill>
                             <a:srgbClr val="25342A"/>
                           </a:solidFill>
+                          <a:latin typeface="Roboto"/>
                         </a:rPr>
                         <a:t>$521,490</a:t>
                       </a:r>
@@ -14602,12 +16089,17 @@
                     <a:bodyPr/>
                     <a:lstStyle/>
                     <a:p>
-                      <a:pPr algn="r"/>
+                      <a:pPr algn="r">
+                        <a:defRPr>
+                          <a:latin typeface="Roboto"/>
+                        </a:defRPr>
+                      </a:pPr>
                       <a:r>
                         <a:rPr sz="1050" b="1">
                           <a:solidFill>
                             <a:srgbClr val="25342A"/>
                           </a:solidFill>
+                          <a:latin typeface="Roboto"/>
                         </a:rPr>
                         <a:t>64.0%</a:t>
                       </a:r>
@@ -14646,12 +16138,17 @@
           </a:bodyPr>
           <a:lstStyle/>
           <a:p>
+            <a:pPr>
+              <a:defRPr>
+                <a:latin typeface="Roboto"/>
+              </a:defRPr>
+            </a:pPr>
             <a:r>
               <a:rPr sz="900" b="0">
                 <a:solidFill>
                   <a:srgbClr val="5F6F63"/>
                 </a:solidFill>
-                <a:latin typeface="Arial"/>
+                <a:latin typeface="Roboto"/>
               </a:rPr>
               <a:t>growth.pptx</a:t>
             </a:r>
@@ -14680,13 +16177,17 @@
           </a:bodyPr>
           <a:lstStyle/>
           <a:p>
-            <a:pPr algn="ctr"/>
+            <a:pPr algn="ctr">
+              <a:defRPr>
+                <a:latin typeface="Roboto"/>
+              </a:defRPr>
+            </a:pPr>
             <a:r>
               <a:rPr sz="900" b="0">
                 <a:solidFill>
                   <a:srgbClr val="5F6F63"/>
                 </a:solidFill>
-                <a:latin typeface="Arial"/>
+                <a:latin typeface="Roboto"/>
               </a:rPr>
               <a:t>Data retrieved 2pm, Tue 6 Oct 2026 · Sample data</a:t>
             </a:r>
@@ -14715,13 +16216,17 @@
           </a:bodyPr>
           <a:lstStyle/>
           <a:p>
-            <a:pPr algn="r"/>
+            <a:pPr algn="r">
+              <a:defRPr>
+                <a:latin typeface="Roboto"/>
+              </a:defRPr>
+            </a:pPr>
             <a:r>
               <a:rPr sz="900" b="0">
                 <a:solidFill>
                   <a:srgbClr val="5F6F63"/>
                 </a:solidFill>
-                <a:latin typeface="Arial"/>
+                <a:latin typeface="Roboto"/>
               </a:rPr>
               <a:t>Slide 27 of 27</a:t>
             </a:r>
@@ -14785,7 +16290,11 @@
           <a:bodyPr rtlCol="0" anchor="ctr"/>
           <a:lstStyle/>
           <a:p>
-            <a:pPr algn="ctr"/>
+            <a:pPr algn="ctr">
+              <a:defRPr>
+                <a:latin typeface="Roboto"/>
+              </a:defRPr>
+            </a:pPr>
           </a:p>
         </p:txBody>
       </p:sp>
@@ -14811,12 +16320,17 @@
           </a:bodyPr>
           <a:lstStyle/>
           <a:p>
+            <a:pPr>
+              <a:defRPr>
+                <a:latin typeface="Roboto"/>
+              </a:defRPr>
+            </a:pPr>
             <a:r>
               <a:rPr sz="1000" b="0">
                 <a:solidFill>
                   <a:srgbClr val="5F6F63"/>
                 </a:solidFill>
-                <a:latin typeface="Arial"/>
+                <a:latin typeface="Roboto"/>
               </a:rPr>
               <a:t>SME sample businesses · Which products and services are growing?</a:t>
             </a:r>
@@ -14845,12 +16359,17 @@
           </a:bodyPr>
           <a:lstStyle/>
           <a:p>
+            <a:pPr>
+              <a:defRPr>
+                <a:latin typeface="Roboto"/>
+              </a:defRPr>
+            </a:pPr>
             <a:r>
               <a:rPr sz="2400" b="1">
                 <a:solidFill>
                   <a:srgbClr val="25342A"/>
                 </a:solidFill>
-                <a:latin typeface="Arial"/>
+                <a:latin typeface="Roboto"/>
               </a:rPr>
               <a:t>From gross margin to profit · Trades</a:t>
             </a:r>
@@ -14879,12 +16398,17 @@
           </a:bodyPr>
           <a:lstStyle/>
           <a:p>
+            <a:pPr>
+              <a:defRPr>
+                <a:latin typeface="Roboto"/>
+              </a:defRPr>
+            </a:pPr>
             <a:r>
               <a:rPr sz="1200" b="0">
                 <a:solidFill>
                   <a:srgbClr val="5F6F63"/>
                 </a:solidFill>
-                <a:latin typeface="Arial"/>
+                <a:latin typeface="Roboto"/>
               </a:rPr>
               <a:t>April's jobs made $68,843 gross margin (41.7%). Technician time not charged to jobs took $6,456 and overheads $59,290, leaving $3,097 profit before tax (1.9% of revenue). To cover overheads, jobs need a 39.8% gross margin on average.</a:t>
             </a:r>
@@ -14918,7 +16442,13 @@
                   <a:txBody>
                     <a:bodyPr/>
                     <a:lstStyle/>
-                    <a:p/>
+                    <a:p>
+                      <a:pPr>
+                        <a:defRPr>
+                          <a:latin typeface="Roboto"/>
+                        </a:defRPr>
+                      </a:pPr>
+                    </a:p>
                   </a:txBody>
                   <a:tcPr>
                     <a:solidFill>
@@ -14931,12 +16461,17 @@
                     <a:bodyPr/>
                     <a:lstStyle/>
                     <a:p>
-                      <a:pPr algn="r"/>
+                      <a:pPr algn="r">
+                        <a:defRPr>
+                          <a:latin typeface="Roboto"/>
+                        </a:defRPr>
+                      </a:pPr>
                       <a:r>
                         <a:rPr sz="1100" b="1">
                           <a:solidFill>
                             <a:srgbClr val="FFFFFF"/>
                           </a:solidFill>
+                          <a:latin typeface="Roboto"/>
                         </a:rPr>
                         <a:t>April 2026</a:t>
                       </a:r>
@@ -14955,11 +16490,17 @@
                     <a:bodyPr/>
                     <a:lstStyle/>
                     <a:p>
+                      <a:pPr>
+                        <a:defRPr>
+                          <a:latin typeface="Roboto"/>
+                        </a:defRPr>
+                      </a:pPr>
                       <a:r>
                         <a:rPr sz="1050">
                           <a:solidFill>
                             <a:srgbClr val="25342A"/>
                           </a:solidFill>
+                          <a:latin typeface="Roboto"/>
                         </a:rPr>
                         <a:t>Gross margin on jobs</a:t>
                       </a:r>
@@ -14976,12 +16517,17 @@
                     <a:bodyPr/>
                     <a:lstStyle/>
                     <a:p>
-                      <a:pPr algn="r"/>
+                      <a:pPr algn="r">
+                        <a:defRPr>
+                          <a:latin typeface="Roboto"/>
+                        </a:defRPr>
+                      </a:pPr>
                       <a:r>
                         <a:rPr sz="1050">
                           <a:solidFill>
                             <a:srgbClr val="25342A"/>
                           </a:solidFill>
+                          <a:latin typeface="Roboto"/>
                         </a:rPr>
                         <a:t>$68,843</a:t>
                       </a:r>
@@ -15000,11 +16546,17 @@
                     <a:bodyPr/>
                     <a:lstStyle/>
                     <a:p>
+                      <a:pPr>
+                        <a:defRPr>
+                          <a:latin typeface="Roboto"/>
+                        </a:defRPr>
+                      </a:pPr>
                       <a:r>
                         <a:rPr sz="1050">
                           <a:solidFill>
                             <a:srgbClr val="25342A"/>
                           </a:solidFill>
+                          <a:latin typeface="Roboto"/>
                         </a:rPr>
                         <a:t>Technician wages and on-costs</a:t>
                       </a:r>
@@ -15021,12 +16573,17 @@
                     <a:bodyPr/>
                     <a:lstStyle/>
                     <a:p>
-                      <a:pPr algn="r"/>
+                      <a:pPr algn="r">
+                        <a:defRPr>
+                          <a:latin typeface="Roboto"/>
+                        </a:defRPr>
+                      </a:pPr>
                       <a:r>
                         <a:rPr sz="1050">
                           <a:solidFill>
                             <a:srgbClr val="25342A"/>
                           </a:solidFill>
+                          <a:latin typeface="Roboto"/>
                         </a:rPr>
                         <a:t>$54,600</a:t>
                       </a:r>
@@ -15045,11 +16602,17 @@
                     <a:bodyPr/>
                     <a:lstStyle/>
                     <a:p>
+                      <a:pPr>
+                        <a:defRPr>
+                          <a:latin typeface="Roboto"/>
+                        </a:defRPr>
+                      </a:pPr>
                       <a:r>
                         <a:rPr sz="1050">
                           <a:solidFill>
                             <a:srgbClr val="25342A"/>
                           </a:solidFill>
+                          <a:latin typeface="Roboto"/>
                         </a:rPr>
                         <a:t>Technician time charged to jobs (at cost)</a:t>
                       </a:r>
@@ -15066,12 +16629,17 @@
                     <a:bodyPr/>
                     <a:lstStyle/>
                     <a:p>
-                      <a:pPr algn="r"/>
+                      <a:pPr algn="r">
+                        <a:defRPr>
+                          <a:latin typeface="Roboto"/>
+                        </a:defRPr>
+                      </a:pPr>
                       <a:r>
                         <a:rPr sz="1050">
                           <a:solidFill>
                             <a:srgbClr val="25342A"/>
                           </a:solidFill>
+                          <a:latin typeface="Roboto"/>
                         </a:rPr>
                         <a:t>$48,144</a:t>
                       </a:r>
@@ -15090,11 +16658,17 @@
                     <a:bodyPr/>
                     <a:lstStyle/>
                     <a:p>
+                      <a:pPr>
+                        <a:defRPr>
+                          <a:latin typeface="Roboto"/>
+                        </a:defRPr>
+                      </a:pPr>
                       <a:r>
                         <a:rPr sz="1050">
                           <a:solidFill>
                             <a:srgbClr val="25342A"/>
                           </a:solidFill>
+                          <a:latin typeface="Roboto"/>
                         </a:rPr>
                         <a:t>Technician time not charged to jobs</a:t>
                       </a:r>
@@ -15111,12 +16685,17 @@
                     <a:bodyPr/>
                     <a:lstStyle/>
                     <a:p>
-                      <a:pPr algn="r"/>
+                      <a:pPr algn="r">
+                        <a:defRPr>
+                          <a:latin typeface="Roboto"/>
+                        </a:defRPr>
+                      </a:pPr>
                       <a:r>
                         <a:rPr sz="1050">
                           <a:solidFill>
                             <a:srgbClr val="25342A"/>
                           </a:solidFill>
+                          <a:latin typeface="Roboto"/>
                         </a:rPr>
                         <a:t>$6,456</a:t>
                       </a:r>
@@ -15135,11 +16714,17 @@
                     <a:bodyPr/>
                     <a:lstStyle/>
                     <a:p>
+                      <a:pPr>
+                        <a:defRPr>
+                          <a:latin typeface="Roboto"/>
+                        </a:defRPr>
+                      </a:pPr>
                       <a:r>
                         <a:rPr sz="1050">
                           <a:solidFill>
                             <a:srgbClr val="25342A"/>
                           </a:solidFill>
+                          <a:latin typeface="Roboto"/>
                         </a:rPr>
                         <a:t>Gross profit (the P&amp;L)</a:t>
                       </a:r>
@@ -15156,12 +16741,17 @@
                     <a:bodyPr/>
                     <a:lstStyle/>
                     <a:p>
-                      <a:pPr algn="r"/>
+                      <a:pPr algn="r">
+                        <a:defRPr>
+                          <a:latin typeface="Roboto"/>
+                        </a:defRPr>
+                      </a:pPr>
                       <a:r>
                         <a:rPr sz="1050">
                           <a:solidFill>
                             <a:srgbClr val="25342A"/>
                           </a:solidFill>
+                          <a:latin typeface="Roboto"/>
                         </a:rPr>
                         <a:t>$62,387</a:t>
                       </a:r>
@@ -15180,11 +16770,17 @@
                     <a:bodyPr/>
                     <a:lstStyle/>
                     <a:p>
+                      <a:pPr>
+                        <a:defRPr>
+                          <a:latin typeface="Roboto"/>
+                        </a:defRPr>
+                      </a:pPr>
                       <a:r>
                         <a:rPr sz="1050">
                           <a:solidFill>
                             <a:srgbClr val="25342A"/>
                           </a:solidFill>
+                          <a:latin typeface="Roboto"/>
                         </a:rPr>
                         <a:t>Overheads (operating expenses, depreciation, interest)</a:t>
                       </a:r>
@@ -15201,12 +16797,17 @@
                     <a:bodyPr/>
                     <a:lstStyle/>
                     <a:p>
-                      <a:pPr algn="r"/>
+                      <a:pPr algn="r">
+                        <a:defRPr>
+                          <a:latin typeface="Roboto"/>
+                        </a:defRPr>
+                      </a:pPr>
                       <a:r>
                         <a:rPr sz="1050">
                           <a:solidFill>
                             <a:srgbClr val="25342A"/>
                           </a:solidFill>
+                          <a:latin typeface="Roboto"/>
                         </a:rPr>
                         <a:t>$59,290</a:t>
                       </a:r>
@@ -15225,11 +16826,17 @@
                     <a:bodyPr/>
                     <a:lstStyle/>
                     <a:p>
+                      <a:pPr>
+                        <a:defRPr>
+                          <a:latin typeface="Roboto"/>
+                        </a:defRPr>
+                      </a:pPr>
                       <a:r>
                         <a:rPr sz="1050">
                           <a:solidFill>
                             <a:srgbClr val="25342A"/>
                           </a:solidFill>
+                          <a:latin typeface="Roboto"/>
                         </a:rPr>
                         <a:t>Profit before tax (the P&amp;L)</a:t>
                       </a:r>
@@ -15246,12 +16853,17 @@
                     <a:bodyPr/>
                     <a:lstStyle/>
                     <a:p>
-                      <a:pPr algn="r"/>
+                      <a:pPr algn="r">
+                        <a:defRPr>
+                          <a:latin typeface="Roboto"/>
+                        </a:defRPr>
+                      </a:pPr>
                       <a:r>
                         <a:rPr sz="1050">
                           <a:solidFill>
                             <a:srgbClr val="25342A"/>
                           </a:solidFill>
+                          <a:latin typeface="Roboto"/>
                         </a:rPr>
                         <a:t>$3,097</a:t>
                       </a:r>
@@ -15270,11 +16882,17 @@
                     <a:bodyPr/>
                     <a:lstStyle/>
                     <a:p>
+                      <a:pPr>
+                        <a:defRPr>
+                          <a:latin typeface="Roboto"/>
+                        </a:defRPr>
+                      </a:pPr>
                       <a:r>
                         <a:rPr sz="1050">
                           <a:solidFill>
                             <a:srgbClr val="25342A"/>
                           </a:solidFill>
+                          <a:latin typeface="Roboto"/>
                         </a:rPr>
                         <a:t>Revenue</a:t>
                       </a:r>
@@ -15291,12 +16909,17 @@
                     <a:bodyPr/>
                     <a:lstStyle/>
                     <a:p>
-                      <a:pPr algn="r"/>
+                      <a:pPr algn="r">
+                        <a:defRPr>
+                          <a:latin typeface="Roboto"/>
+                        </a:defRPr>
+                      </a:pPr>
                       <a:r>
                         <a:rPr sz="1050">
                           <a:solidFill>
                             <a:srgbClr val="25342A"/>
                           </a:solidFill>
+                          <a:latin typeface="Roboto"/>
                         </a:rPr>
                         <a:t>$164,987</a:t>
                       </a:r>
@@ -15315,11 +16938,17 @@
                     <a:bodyPr/>
                     <a:lstStyle/>
                     <a:p>
+                      <a:pPr>
+                        <a:defRPr>
+                          <a:latin typeface="Roboto"/>
+                        </a:defRPr>
+                      </a:pPr>
                       <a:r>
                         <a:rPr sz="1050">
                           <a:solidFill>
                             <a:srgbClr val="25342A"/>
                           </a:solidFill>
+                          <a:latin typeface="Roboto"/>
                         </a:rPr>
                         <a:t>Gross margin on jobs, %</a:t>
                       </a:r>
@@ -15336,12 +16965,17 @@
                     <a:bodyPr/>
                     <a:lstStyle/>
                     <a:p>
-                      <a:pPr algn="r"/>
+                      <a:pPr algn="r">
+                        <a:defRPr>
+                          <a:latin typeface="Roboto"/>
+                        </a:defRPr>
+                      </a:pPr>
                       <a:r>
                         <a:rPr sz="1050">
                           <a:solidFill>
                             <a:srgbClr val="25342A"/>
                           </a:solidFill>
+                          <a:latin typeface="Roboto"/>
                         </a:rPr>
                         <a:t>41.7%</a:t>
                       </a:r>
@@ -15360,11 +16994,17 @@
                     <a:bodyPr/>
                     <a:lstStyle/>
                     <a:p>
+                      <a:pPr>
+                        <a:defRPr>
+                          <a:latin typeface="Roboto"/>
+                        </a:defRPr>
+                      </a:pPr>
                       <a:r>
                         <a:rPr sz="1050">
                           <a:solidFill>
                             <a:srgbClr val="25342A"/>
                           </a:solidFill>
+                          <a:latin typeface="Roboto"/>
                         </a:rPr>
                         <a:t>Profit before tax, % of revenue</a:t>
                       </a:r>
@@ -15381,12 +17021,17 @@
                     <a:bodyPr/>
                     <a:lstStyle/>
                     <a:p>
-                      <a:pPr algn="r"/>
+                      <a:pPr algn="r">
+                        <a:defRPr>
+                          <a:latin typeface="Roboto"/>
+                        </a:defRPr>
+                      </a:pPr>
                       <a:r>
                         <a:rPr sz="1050">
                           <a:solidFill>
                             <a:srgbClr val="25342A"/>
                           </a:solidFill>
+                          <a:latin typeface="Roboto"/>
                         </a:rPr>
                         <a:t>1.9%</a:t>
                       </a:r>
@@ -15405,11 +17050,17 @@
                     <a:bodyPr/>
                     <a:lstStyle/>
                     <a:p>
+                      <a:pPr>
+                        <a:defRPr>
+                          <a:latin typeface="Roboto"/>
+                        </a:defRPr>
+                      </a:pPr>
                       <a:r>
                         <a:rPr sz="1050">
                           <a:solidFill>
                             <a:srgbClr val="25342A"/>
                           </a:solidFill>
+                          <a:latin typeface="Roboto"/>
                         </a:rPr>
                         <a:t>Gross margin jobs need just to cover overheads and time not charged</a:t>
                       </a:r>
@@ -15426,12 +17077,17 @@
                     <a:bodyPr/>
                     <a:lstStyle/>
                     <a:p>
-                      <a:pPr algn="r"/>
+                      <a:pPr algn="r">
+                        <a:defRPr>
+                          <a:latin typeface="Roboto"/>
+                        </a:defRPr>
+                      </a:pPr>
                       <a:r>
                         <a:rPr sz="1050">
                           <a:solidFill>
                             <a:srgbClr val="25342A"/>
                           </a:solidFill>
+                          <a:latin typeface="Roboto"/>
                         </a:rPr>
                         <a:t>39.8%</a:t>
                       </a:r>
@@ -15470,12 +17126,17 @@
           </a:bodyPr>
           <a:lstStyle/>
           <a:p>
+            <a:pPr>
+              <a:defRPr>
+                <a:latin typeface="Roboto"/>
+              </a:defRPr>
+            </a:pPr>
             <a:r>
               <a:rPr sz="900" b="0">
                 <a:solidFill>
                   <a:srgbClr val="5F6F63"/>
                 </a:solidFill>
-                <a:latin typeface="Arial"/>
+                <a:latin typeface="Roboto"/>
               </a:rPr>
               <a:t>growth.pptx</a:t>
             </a:r>
@@ -15504,13 +17165,17 @@
           </a:bodyPr>
           <a:lstStyle/>
           <a:p>
-            <a:pPr algn="ctr"/>
+            <a:pPr algn="ctr">
+              <a:defRPr>
+                <a:latin typeface="Roboto"/>
+              </a:defRPr>
+            </a:pPr>
             <a:r>
               <a:rPr sz="900" b="0">
                 <a:solidFill>
                   <a:srgbClr val="5F6F63"/>
                 </a:solidFill>
-                <a:latin typeface="Arial"/>
+                <a:latin typeface="Roboto"/>
               </a:rPr>
               <a:t>Data retrieved 2pm, Tue 6 Oct 2026 · Sample data</a:t>
             </a:r>
@@ -15539,13 +17204,17 @@
           </a:bodyPr>
           <a:lstStyle/>
           <a:p>
-            <a:pPr algn="r"/>
+            <a:pPr algn="r">
+              <a:defRPr>
+                <a:latin typeface="Roboto"/>
+              </a:defRPr>
+            </a:pPr>
             <a:r>
               <a:rPr sz="900" b="0">
                 <a:solidFill>
                   <a:srgbClr val="5F6F63"/>
                 </a:solidFill>
-                <a:latin typeface="Arial"/>
+                <a:latin typeface="Roboto"/>
               </a:rPr>
               <a:t>Slide 3 of 27</a:t>
             </a:r>
@@ -15609,7 +17278,11 @@
           <a:bodyPr rtlCol="0" anchor="ctr"/>
           <a:lstStyle/>
           <a:p>
-            <a:pPr algn="ctr"/>
+            <a:pPr algn="ctr">
+              <a:defRPr>
+                <a:latin typeface="Roboto"/>
+              </a:defRPr>
+            </a:pPr>
           </a:p>
         </p:txBody>
       </p:sp>
@@ -15635,12 +17308,17 @@
           </a:bodyPr>
           <a:lstStyle/>
           <a:p>
+            <a:pPr>
+              <a:defRPr>
+                <a:latin typeface="Roboto"/>
+              </a:defRPr>
+            </a:pPr>
             <a:r>
               <a:rPr sz="1000" b="0">
                 <a:solidFill>
                   <a:srgbClr val="5F6F63"/>
                 </a:solidFill>
-                <a:latin typeface="Arial"/>
+                <a:latin typeface="Roboto"/>
               </a:rPr>
               <a:t>SME sample businesses · Which products and services are growing?</a:t>
             </a:r>
@@ -15669,12 +17347,17 @@
           </a:bodyPr>
           <a:lstStyle/>
           <a:p>
+            <a:pPr>
+              <a:defRPr>
+                <a:latin typeface="Roboto"/>
+              </a:defRPr>
+            </a:pPr>
             <a:r>
               <a:rPr sz="2400" b="1">
                 <a:solidFill>
                   <a:srgbClr val="25342A"/>
                 </a:solidFill>
-                <a:latin typeface="Arial"/>
+                <a:latin typeface="Roboto"/>
               </a:rPr>
               <a:t>Headline numbers · Trades · Line: All</a:t>
             </a:r>
@@ -15722,7 +17405,11 @@
           <a:bodyPr rtlCol="0" anchor="ctr"/>
           <a:lstStyle/>
           <a:p>
-            <a:pPr algn="ctr"/>
+            <a:pPr algn="ctr">
+              <a:defRPr>
+                <a:latin typeface="Roboto"/>
+              </a:defRPr>
+            </a:pPr>
           </a:p>
         </p:txBody>
       </p:sp>
@@ -15748,12 +17435,17 @@
           </a:bodyPr>
           <a:lstStyle/>
           <a:p>
+            <a:pPr>
+              <a:defRPr>
+                <a:latin typeface="Roboto"/>
+              </a:defRPr>
+            </a:pPr>
             <a:r>
               <a:rPr sz="1200" b="0">
                 <a:solidFill>
                   <a:srgbClr val="5F6F63"/>
                 </a:solidFill>
-                <a:latin typeface="Arial"/>
+                <a:latin typeface="Roboto"/>
               </a:rPr>
               <a:t>April against April last year</a:t>
             </a:r>
@@ -15782,12 +17474,17 @@
           </a:bodyPr>
           <a:lstStyle/>
           <a:p>
+            <a:pPr>
+              <a:defRPr>
+                <a:latin typeface="Roboto"/>
+              </a:defRPr>
+            </a:pPr>
             <a:r>
               <a:rPr sz="3000" b="1">
                 <a:solidFill>
                   <a:srgbClr val="2F7A5D"/>
                 </a:solidFill>
-                <a:latin typeface="Arial"/>
+                <a:latin typeface="Roboto"/>
               </a:rPr>
               <a:t>32.3%</a:t>
             </a:r>
@@ -15816,12 +17513,17 @@
           </a:bodyPr>
           <a:lstStyle/>
           <a:p>
+            <a:pPr>
+              <a:defRPr>
+                <a:latin typeface="Roboto"/>
+              </a:defRPr>
+            </a:pPr>
             <a:r>
               <a:rPr sz="1100" b="0">
                 <a:solidFill>
                   <a:srgbClr val="5F6F63"/>
                 </a:solidFill>
-                <a:latin typeface="Arial"/>
+                <a:latin typeface="Roboto"/>
               </a:rPr>
               <a:t>$164,987 against $124,705</a:t>
             </a:r>
@@ -15869,7 +17571,11 @@
           <a:bodyPr rtlCol="0" anchor="ctr"/>
           <a:lstStyle/>
           <a:p>
-            <a:pPr algn="ctr"/>
+            <a:pPr algn="ctr">
+              <a:defRPr>
+                <a:latin typeface="Roboto"/>
+              </a:defRPr>
+            </a:pPr>
           </a:p>
         </p:txBody>
       </p:sp>
@@ -15895,12 +17601,17 @@
           </a:bodyPr>
           <a:lstStyle/>
           <a:p>
+            <a:pPr>
+              <a:defRPr>
+                <a:latin typeface="Roboto"/>
+              </a:defRPr>
+            </a:pPr>
             <a:r>
               <a:rPr sz="1200" b="0">
                 <a:solidFill>
                   <a:srgbClr val="5F6F63"/>
                 </a:solidFill>
-                <a:latin typeface="Arial"/>
+                <a:latin typeface="Roboto"/>
               </a:rPr>
               <a:t>Year to date (Jul to Apr 2026)</a:t>
             </a:r>
@@ -15929,12 +17640,17 @@
           </a:bodyPr>
           <a:lstStyle/>
           <a:p>
+            <a:pPr>
+              <a:defRPr>
+                <a:latin typeface="Roboto"/>
+              </a:defRPr>
+            </a:pPr>
             <a:r>
               <a:rPr sz="3000" b="1">
                 <a:solidFill>
                   <a:srgbClr val="2F7A5D"/>
                 </a:solidFill>
-                <a:latin typeface="Arial"/>
+                <a:latin typeface="Roboto"/>
               </a:rPr>
               <a:t>$1,610,581</a:t>
             </a:r>
@@ -15963,12 +17679,17 @@
           </a:bodyPr>
           <a:lstStyle/>
           <a:p>
+            <a:pPr>
+              <a:defRPr>
+                <a:latin typeface="Roboto"/>
+              </a:defRPr>
+            </a:pPr>
             <a:r>
               <a:rPr sz="1100" b="0">
                 <a:solidFill>
                   <a:srgbClr val="5F6F63"/>
                 </a:solidFill>
-                <a:latin typeface="Arial"/>
+                <a:latin typeface="Roboto"/>
               </a:rPr>
               <a:t>same period last year: not in the data</a:t>
             </a:r>
@@ -16016,7 +17737,11 @@
           <a:bodyPr rtlCol="0" anchor="ctr"/>
           <a:lstStyle/>
           <a:p>
-            <a:pPr algn="ctr"/>
+            <a:pPr algn="ctr">
+              <a:defRPr>
+                <a:latin typeface="Roboto"/>
+              </a:defRPr>
+            </a:pPr>
           </a:p>
         </p:txBody>
       </p:sp>
@@ -16042,12 +17767,17 @@
           </a:bodyPr>
           <a:lstStyle/>
           <a:p>
+            <a:pPr>
+              <a:defRPr>
+                <a:latin typeface="Roboto"/>
+              </a:defRPr>
+            </a:pPr>
             <a:r>
               <a:rPr sz="1200" b="0">
                 <a:solidFill>
                   <a:srgbClr val="5F6F63"/>
                 </a:solidFill>
-                <a:latin typeface="Arial"/>
+                <a:latin typeface="Roboto"/>
               </a:rPr>
               <a:t>Gross margin, year to date</a:t>
             </a:r>
@@ -16076,12 +17806,17 @@
           </a:bodyPr>
           <a:lstStyle/>
           <a:p>
+            <a:pPr>
+              <a:defRPr>
+                <a:latin typeface="Roboto"/>
+              </a:defRPr>
+            </a:pPr>
             <a:r>
               <a:rPr sz="3000" b="1">
                 <a:solidFill>
                   <a:srgbClr val="2F7A5D"/>
                 </a:solidFill>
-                <a:latin typeface="Arial"/>
+                <a:latin typeface="Roboto"/>
               </a:rPr>
               <a:t>37.6%</a:t>
             </a:r>
@@ -16110,12 +17845,17 @@
           </a:bodyPr>
           <a:lstStyle/>
           <a:p>
+            <a:pPr>
+              <a:defRPr>
+                <a:latin typeface="Roboto"/>
+              </a:defRPr>
+            </a:pPr>
             <a:r>
               <a:rPr sz="1100" b="0">
                 <a:solidFill>
                   <a:srgbClr val="5F6F63"/>
                 </a:solidFill>
-                <a:latin typeface="Arial"/>
+                <a:latin typeface="Roboto"/>
               </a:rPr>
               <a:t>$605,185 before overheads</a:t>
             </a:r>
@@ -16144,12 +17884,17 @@
           </a:bodyPr>
           <a:lstStyle/>
           <a:p>
+            <a:pPr>
+              <a:defRPr>
+                <a:latin typeface="Roboto"/>
+              </a:defRPr>
+            </a:pPr>
             <a:r>
               <a:rPr sz="900" b="0">
                 <a:solidFill>
                   <a:srgbClr val="5F6F63"/>
                 </a:solidFill>
-                <a:latin typeface="Arial"/>
+                <a:latin typeface="Roboto"/>
               </a:rPr>
               <a:t>growth.pptx</a:t>
             </a:r>
@@ -16178,13 +17923,17 @@
           </a:bodyPr>
           <a:lstStyle/>
           <a:p>
-            <a:pPr algn="ctr"/>
+            <a:pPr algn="ctr">
+              <a:defRPr>
+                <a:latin typeface="Roboto"/>
+              </a:defRPr>
+            </a:pPr>
             <a:r>
               <a:rPr sz="900" b="0">
                 <a:solidFill>
                   <a:srgbClr val="5F6F63"/>
                 </a:solidFill>
-                <a:latin typeface="Arial"/>
+                <a:latin typeface="Roboto"/>
               </a:rPr>
               <a:t>Data retrieved 2pm, Tue 6 Oct 2026 · Sample data</a:t>
             </a:r>
@@ -16213,13 +17962,17 @@
           </a:bodyPr>
           <a:lstStyle/>
           <a:p>
-            <a:pPr algn="r"/>
+            <a:pPr algn="r">
+              <a:defRPr>
+                <a:latin typeface="Roboto"/>
+              </a:defRPr>
+            </a:pPr>
             <a:r>
               <a:rPr sz="900" b="0">
                 <a:solidFill>
                   <a:srgbClr val="5F6F63"/>
                 </a:solidFill>
-                <a:latin typeface="Arial"/>
+                <a:latin typeface="Roboto"/>
               </a:rPr>
               <a:t>Slide 4 of 27</a:t>
             </a:r>
@@ -16283,7 +18036,11 @@
           <a:bodyPr rtlCol="0" anchor="ctr"/>
           <a:lstStyle/>
           <a:p>
-            <a:pPr algn="ctr"/>
+            <a:pPr algn="ctr">
+              <a:defRPr>
+                <a:latin typeface="Roboto"/>
+              </a:defRPr>
+            </a:pPr>
           </a:p>
         </p:txBody>
       </p:sp>
@@ -16309,12 +18066,17 @@
           </a:bodyPr>
           <a:lstStyle/>
           <a:p>
+            <a:pPr>
+              <a:defRPr>
+                <a:latin typeface="Roboto"/>
+              </a:defRPr>
+            </a:pPr>
             <a:r>
               <a:rPr sz="1000" b="0">
                 <a:solidFill>
                   <a:srgbClr val="5F6F63"/>
                 </a:solidFill>
-                <a:latin typeface="Arial"/>
+                <a:latin typeface="Roboto"/>
               </a:rPr>
               <a:t>SME sample businesses · Which products and services are growing?</a:t>
             </a:r>
@@ -16343,12 +18105,17 @@
           </a:bodyPr>
           <a:lstStyle/>
           <a:p>
+            <a:pPr>
+              <a:defRPr>
+                <a:latin typeface="Roboto"/>
+              </a:defRPr>
+            </a:pPr>
             <a:r>
               <a:rPr sz="2400" b="1">
                 <a:solidFill>
                   <a:srgbClr val="25342A"/>
                 </a:solidFill>
-                <a:latin typeface="Arial"/>
+                <a:latin typeface="Roboto"/>
               </a:rPr>
               <a:t>What it shows · Trades · Line: All</a:t>
             </a:r>
@@ -16396,7 +18163,11 @@
           <a:bodyPr rtlCol="0" anchor="ctr"/>
           <a:lstStyle/>
           <a:p>
-            <a:pPr algn="ctr"/>
+            <a:pPr algn="ctr">
+              <a:defRPr>
+                <a:latin typeface="Roboto"/>
+              </a:defRPr>
+            </a:pPr>
           </a:p>
         </p:txBody>
       </p:sp>
@@ -16422,12 +18193,17 @@
           </a:bodyPr>
           <a:lstStyle/>
           <a:p>
+            <a:pPr>
+              <a:defRPr>
+                <a:latin typeface="Roboto"/>
+              </a:defRPr>
+            </a:pPr>
             <a:r>
               <a:rPr sz="1100" b="1">
                 <a:solidFill>
                   <a:srgbClr val="5F6F63"/>
                 </a:solidFill>
-                <a:latin typeface="Arial"/>
+                <a:latin typeface="Roboto"/>
               </a:rPr>
               <a:t>WHAT IT SHOWS</a:t>
             </a:r>
@@ -16456,12 +18232,17 @@
           </a:bodyPr>
           <a:lstStyle/>
           <a:p>
+            <a:pPr>
+              <a:defRPr>
+                <a:latin typeface="Roboto"/>
+              </a:defRPr>
+            </a:pPr>
             <a:r>
               <a:rPr sz="1600" b="0">
                 <a:solidFill>
                   <a:srgbClr val="25342A"/>
                 </a:solidFill>
-                <a:latin typeface="Arial"/>
+                <a:latin typeface="Roboto"/>
               </a:rPr>
               <a:t>Revenue is $1,610,581 this financial year to date (Jul to Apr 2026). Maintenance contracts make the highest gross margin (59.5%); Installations the lowest (28.4%). The business needs 39.8% gross margin just to cover overheads.</a:t>
             </a:r>
@@ -16509,7 +18290,11 @@
           <a:bodyPr rtlCol="0" anchor="ctr"/>
           <a:lstStyle/>
           <a:p>
-            <a:pPr algn="ctr"/>
+            <a:pPr algn="ctr">
+              <a:defRPr>
+                <a:latin typeface="Roboto"/>
+              </a:defRPr>
+            </a:pPr>
           </a:p>
         </p:txBody>
       </p:sp>
@@ -16535,12 +18320,17 @@
           </a:bodyPr>
           <a:lstStyle/>
           <a:p>
+            <a:pPr>
+              <a:defRPr>
+                <a:latin typeface="Roboto"/>
+              </a:defRPr>
+            </a:pPr>
             <a:r>
               <a:rPr sz="1100" b="1">
                 <a:solidFill>
                   <a:srgbClr val="5F6F63"/>
                 </a:solidFill>
-                <a:latin typeface="Arial"/>
+                <a:latin typeface="Roboto"/>
               </a:rPr>
               <a:t>WHAT YOU'D DO ABOUT IT</a:t>
             </a:r>
@@ -16569,12 +18359,17 @@
           </a:bodyPr>
           <a:lstStyle/>
           <a:p>
+            <a:pPr>
+              <a:defRPr>
+                <a:latin typeface="Roboto"/>
+              </a:defRPr>
+            </a:pPr>
             <a:r>
               <a:rPr sz="1600" b="0">
                 <a:solidFill>
                   <a:srgbClr val="25342A"/>
                 </a:solidFill>
-                <a:latin typeface="Arial"/>
+                <a:latin typeface="Roboto"/>
               </a:rPr>
               <a:t>Maintenance contracts: 59.5% gross margin, the most profitable work you do. Installations: 28.4% gross margin, below the 39.8% needed to cover overheads.</a:t>
             </a:r>
@@ -16603,12 +18398,17 @@
           </a:bodyPr>
           <a:lstStyle/>
           <a:p>
+            <a:pPr>
+              <a:defRPr>
+                <a:latin typeface="Roboto"/>
+              </a:defRPr>
+            </a:pPr>
             <a:r>
               <a:rPr sz="900" b="0">
                 <a:solidFill>
                   <a:srgbClr val="5F6F63"/>
                 </a:solidFill>
-                <a:latin typeface="Arial"/>
+                <a:latin typeface="Roboto"/>
               </a:rPr>
               <a:t>growth.pptx</a:t>
             </a:r>
@@ -16637,13 +18437,17 @@
           </a:bodyPr>
           <a:lstStyle/>
           <a:p>
-            <a:pPr algn="ctr"/>
+            <a:pPr algn="ctr">
+              <a:defRPr>
+                <a:latin typeface="Roboto"/>
+              </a:defRPr>
+            </a:pPr>
             <a:r>
               <a:rPr sz="900" b="0">
                 <a:solidFill>
                   <a:srgbClr val="5F6F63"/>
                 </a:solidFill>
-                <a:latin typeface="Arial"/>
+                <a:latin typeface="Roboto"/>
               </a:rPr>
               <a:t>Data retrieved 2pm, Tue 6 Oct 2026 · Sample data</a:t>
             </a:r>
@@ -16672,13 +18476,17 @@
           </a:bodyPr>
           <a:lstStyle/>
           <a:p>
-            <a:pPr algn="r"/>
+            <a:pPr algn="r">
+              <a:defRPr>
+                <a:latin typeface="Roboto"/>
+              </a:defRPr>
+            </a:pPr>
             <a:r>
               <a:rPr sz="900" b="0">
                 <a:solidFill>
                   <a:srgbClr val="5F6F63"/>
                 </a:solidFill>
-                <a:latin typeface="Arial"/>
+                <a:latin typeface="Roboto"/>
               </a:rPr>
               <a:t>Slide 5 of 27</a:t>
             </a:r>
@@ -16742,7 +18550,11 @@
           <a:bodyPr rtlCol="0" anchor="ctr"/>
           <a:lstStyle/>
           <a:p>
-            <a:pPr algn="ctr"/>
+            <a:pPr algn="ctr">
+              <a:defRPr>
+                <a:latin typeface="Roboto"/>
+              </a:defRPr>
+            </a:pPr>
           </a:p>
         </p:txBody>
       </p:sp>
@@ -16768,12 +18580,17 @@
           </a:bodyPr>
           <a:lstStyle/>
           <a:p>
+            <a:pPr>
+              <a:defRPr>
+                <a:latin typeface="Roboto"/>
+              </a:defRPr>
+            </a:pPr>
             <a:r>
               <a:rPr sz="1000" b="0">
                 <a:solidFill>
                   <a:srgbClr val="5F6F63"/>
                 </a:solidFill>
-                <a:latin typeface="Arial"/>
+                <a:latin typeface="Roboto"/>
               </a:rPr>
               <a:t>SME sample businesses · Which products and services are growing?</a:t>
             </a:r>
@@ -16802,12 +18619,17 @@
           </a:bodyPr>
           <a:lstStyle/>
           <a:p>
+            <a:pPr>
+              <a:defRPr>
+                <a:latin typeface="Roboto"/>
+              </a:defRPr>
+            </a:pPr>
             <a:r>
               <a:rPr sz="2400" b="1">
                 <a:solidFill>
                   <a:srgbClr val="25342A"/>
                 </a:solidFill>
-                <a:latin typeface="Arial"/>
+                <a:latin typeface="Roboto"/>
               </a:rPr>
               <a:t>Headline numbers · Trades · Line: Maintenance contracts</a:t>
             </a:r>
@@ -16855,7 +18677,11 @@
           <a:bodyPr rtlCol="0" anchor="ctr"/>
           <a:lstStyle/>
           <a:p>
-            <a:pPr algn="ctr"/>
+            <a:pPr algn="ctr">
+              <a:defRPr>
+                <a:latin typeface="Roboto"/>
+              </a:defRPr>
+            </a:pPr>
           </a:p>
         </p:txBody>
       </p:sp>
@@ -16881,12 +18707,17 @@
           </a:bodyPr>
           <a:lstStyle/>
           <a:p>
+            <a:pPr>
+              <a:defRPr>
+                <a:latin typeface="Roboto"/>
+              </a:defRPr>
+            </a:pPr>
             <a:r>
               <a:rPr sz="1200" b="0">
                 <a:solidFill>
                   <a:srgbClr val="5F6F63"/>
                 </a:solidFill>
-                <a:latin typeface="Arial"/>
+                <a:latin typeface="Roboto"/>
               </a:rPr>
               <a:t>April against April last year</a:t>
             </a:r>
@@ -16915,12 +18746,17 @@
           </a:bodyPr>
           <a:lstStyle/>
           <a:p>
+            <a:pPr>
+              <a:defRPr>
+                <a:latin typeface="Roboto"/>
+              </a:defRPr>
+            </a:pPr>
             <a:r>
               <a:rPr sz="3000" b="1">
                 <a:solidFill>
                   <a:srgbClr val="2F7A5D"/>
                 </a:solidFill>
-                <a:latin typeface="Arial"/>
+                <a:latin typeface="Roboto"/>
               </a:rPr>
               <a:t>34.3%</a:t>
             </a:r>
@@ -16949,12 +18785,17 @@
           </a:bodyPr>
           <a:lstStyle/>
           <a:p>
+            <a:pPr>
+              <a:defRPr>
+                <a:latin typeface="Roboto"/>
+              </a:defRPr>
+            </a:pPr>
             <a:r>
               <a:rPr sz="1100" b="0">
                 <a:solidFill>
                   <a:srgbClr val="5F6F63"/>
                 </a:solidFill>
-                <a:latin typeface="Arial"/>
+                <a:latin typeface="Roboto"/>
               </a:rPr>
               <a:t>$37,500 against $27,930</a:t>
             </a:r>
@@ -17002,7 +18843,11 @@
           <a:bodyPr rtlCol="0" anchor="ctr"/>
           <a:lstStyle/>
           <a:p>
-            <a:pPr algn="ctr"/>
+            <a:pPr algn="ctr">
+              <a:defRPr>
+                <a:latin typeface="Roboto"/>
+              </a:defRPr>
+            </a:pPr>
           </a:p>
         </p:txBody>
       </p:sp>
@@ -17028,12 +18873,17 @@
           </a:bodyPr>
           <a:lstStyle/>
           <a:p>
+            <a:pPr>
+              <a:defRPr>
+                <a:latin typeface="Roboto"/>
+              </a:defRPr>
+            </a:pPr>
             <a:r>
               <a:rPr sz="1200" b="0">
                 <a:solidFill>
                   <a:srgbClr val="5F6F63"/>
                 </a:solidFill>
-                <a:latin typeface="Arial"/>
+                <a:latin typeface="Roboto"/>
               </a:rPr>
               <a:t>Year to date (Jul to Apr 2026)</a:t>
             </a:r>
@@ -17062,12 +18912,17 @@
           </a:bodyPr>
           <a:lstStyle/>
           <a:p>
+            <a:pPr>
+              <a:defRPr>
+                <a:latin typeface="Roboto"/>
+              </a:defRPr>
+            </a:pPr>
             <a:r>
               <a:rPr sz="3000" b="1">
                 <a:solidFill>
                   <a:srgbClr val="2F7A5D"/>
                 </a:solidFill>
-                <a:latin typeface="Arial"/>
+                <a:latin typeface="Roboto"/>
               </a:rPr>
               <a:t>$355,300</a:t>
             </a:r>
@@ -17096,12 +18951,17 @@
           </a:bodyPr>
           <a:lstStyle/>
           <a:p>
+            <a:pPr>
+              <a:defRPr>
+                <a:latin typeface="Roboto"/>
+              </a:defRPr>
+            </a:pPr>
             <a:r>
               <a:rPr sz="1100" b="0">
                 <a:solidFill>
                   <a:srgbClr val="5F6F63"/>
                 </a:solidFill>
-                <a:latin typeface="Arial"/>
+                <a:latin typeface="Roboto"/>
               </a:rPr>
               <a:t>same period last year: not in the data</a:t>
             </a:r>
@@ -17149,7 +19009,11 @@
           <a:bodyPr rtlCol="0" anchor="ctr"/>
           <a:lstStyle/>
           <a:p>
-            <a:pPr algn="ctr"/>
+            <a:pPr algn="ctr">
+              <a:defRPr>
+                <a:latin typeface="Roboto"/>
+              </a:defRPr>
+            </a:pPr>
           </a:p>
         </p:txBody>
       </p:sp>
@@ -17175,12 +19039,17 @@
           </a:bodyPr>
           <a:lstStyle/>
           <a:p>
+            <a:pPr>
+              <a:defRPr>
+                <a:latin typeface="Roboto"/>
+              </a:defRPr>
+            </a:pPr>
             <a:r>
               <a:rPr sz="1200" b="0">
                 <a:solidFill>
                   <a:srgbClr val="5F6F63"/>
                 </a:solidFill>
-                <a:latin typeface="Arial"/>
+                <a:latin typeface="Roboto"/>
               </a:rPr>
               <a:t>Gross margin, year to date</a:t>
             </a:r>
@@ -17209,12 +19078,17 @@
           </a:bodyPr>
           <a:lstStyle/>
           <a:p>
+            <a:pPr>
+              <a:defRPr>
+                <a:latin typeface="Roboto"/>
+              </a:defRPr>
+            </a:pPr>
             <a:r>
               <a:rPr sz="3000" b="1">
                 <a:solidFill>
                   <a:srgbClr val="2F7A5D"/>
                 </a:solidFill>
-                <a:latin typeface="Arial"/>
+                <a:latin typeface="Roboto"/>
               </a:rPr>
               <a:t>59.5%</a:t>
             </a:r>
@@ -17243,12 +19117,17 @@
           </a:bodyPr>
           <a:lstStyle/>
           <a:p>
+            <a:pPr>
+              <a:defRPr>
+                <a:latin typeface="Roboto"/>
+              </a:defRPr>
+            </a:pPr>
             <a:r>
               <a:rPr sz="1100" b="0">
                 <a:solidFill>
                   <a:srgbClr val="5F6F63"/>
                 </a:solidFill>
-                <a:latin typeface="Arial"/>
+                <a:latin typeface="Roboto"/>
               </a:rPr>
               <a:t>$211,424 before overheads</a:t>
             </a:r>
@@ -17277,12 +19156,17 @@
           </a:bodyPr>
           <a:lstStyle/>
           <a:p>
+            <a:pPr>
+              <a:defRPr>
+                <a:latin typeface="Roboto"/>
+              </a:defRPr>
+            </a:pPr>
             <a:r>
               <a:rPr sz="900" b="0">
                 <a:solidFill>
                   <a:srgbClr val="5F6F63"/>
                 </a:solidFill>
-                <a:latin typeface="Arial"/>
+                <a:latin typeface="Roboto"/>
               </a:rPr>
               <a:t>growth.pptx</a:t>
             </a:r>
@@ -17311,13 +19195,17 @@
           </a:bodyPr>
           <a:lstStyle/>
           <a:p>
-            <a:pPr algn="ctr"/>
+            <a:pPr algn="ctr">
+              <a:defRPr>
+                <a:latin typeface="Roboto"/>
+              </a:defRPr>
+            </a:pPr>
             <a:r>
               <a:rPr sz="900" b="0">
                 <a:solidFill>
                   <a:srgbClr val="5F6F63"/>
                 </a:solidFill>
-                <a:latin typeface="Arial"/>
+                <a:latin typeface="Roboto"/>
               </a:rPr>
               <a:t>Data retrieved 2pm, Tue 6 Oct 2026 · Sample data</a:t>
             </a:r>
@@ -17346,13 +19234,17 @@
           </a:bodyPr>
           <a:lstStyle/>
           <a:p>
-            <a:pPr algn="r"/>
+            <a:pPr algn="r">
+              <a:defRPr>
+                <a:latin typeface="Roboto"/>
+              </a:defRPr>
+            </a:pPr>
             <a:r>
               <a:rPr sz="900" b="0">
                 <a:solidFill>
                   <a:srgbClr val="5F6F63"/>
                 </a:solidFill>
-                <a:latin typeface="Arial"/>
+                <a:latin typeface="Roboto"/>
               </a:rPr>
               <a:t>Slide 6 of 27</a:t>
             </a:r>
@@ -17416,7 +19308,11 @@
           <a:bodyPr rtlCol="0" anchor="ctr"/>
           <a:lstStyle/>
           <a:p>
-            <a:pPr algn="ctr"/>
+            <a:pPr algn="ctr">
+              <a:defRPr>
+                <a:latin typeface="Roboto"/>
+              </a:defRPr>
+            </a:pPr>
           </a:p>
         </p:txBody>
       </p:sp>
@@ -17442,12 +19338,17 @@
           </a:bodyPr>
           <a:lstStyle/>
           <a:p>
+            <a:pPr>
+              <a:defRPr>
+                <a:latin typeface="Roboto"/>
+              </a:defRPr>
+            </a:pPr>
             <a:r>
               <a:rPr sz="1000" b="0">
                 <a:solidFill>
                   <a:srgbClr val="5F6F63"/>
                 </a:solidFill>
-                <a:latin typeface="Arial"/>
+                <a:latin typeface="Roboto"/>
               </a:rPr>
               <a:t>SME sample businesses · Which products and services are growing?</a:t>
             </a:r>
@@ -17476,12 +19377,17 @@
           </a:bodyPr>
           <a:lstStyle/>
           <a:p>
+            <a:pPr>
+              <a:defRPr>
+                <a:latin typeface="Roboto"/>
+              </a:defRPr>
+            </a:pPr>
             <a:r>
               <a:rPr sz="2400" b="1">
                 <a:solidFill>
                   <a:srgbClr val="25342A"/>
                 </a:solidFill>
-                <a:latin typeface="Arial"/>
+                <a:latin typeface="Roboto"/>
               </a:rPr>
               <a:t>What it shows · Trades · Line: Maintenance contracts</a:t>
             </a:r>
@@ -17529,7 +19435,11 @@
           <a:bodyPr rtlCol="0" anchor="ctr"/>
           <a:lstStyle/>
           <a:p>
-            <a:pPr algn="ctr"/>
+            <a:pPr algn="ctr">
+              <a:defRPr>
+                <a:latin typeface="Roboto"/>
+              </a:defRPr>
+            </a:pPr>
           </a:p>
         </p:txBody>
       </p:sp>
@@ -17555,12 +19465,17 @@
           </a:bodyPr>
           <a:lstStyle/>
           <a:p>
+            <a:pPr>
+              <a:defRPr>
+                <a:latin typeface="Roboto"/>
+              </a:defRPr>
+            </a:pPr>
             <a:r>
               <a:rPr sz="1100" b="1">
                 <a:solidFill>
                   <a:srgbClr val="5F6F63"/>
                 </a:solidFill>
-                <a:latin typeface="Arial"/>
+                <a:latin typeface="Roboto"/>
               </a:rPr>
               <a:t>WHAT IT SHOWS</a:t>
             </a:r>
@@ -17589,12 +19504,17 @@
           </a:bodyPr>
           <a:lstStyle/>
           <a:p>
+            <a:pPr>
+              <a:defRPr>
+                <a:latin typeface="Roboto"/>
+              </a:defRPr>
+            </a:pPr>
             <a:r>
               <a:rPr sz="1600" b="0">
                 <a:solidFill>
                   <a:srgbClr val="25342A"/>
                 </a:solidFill>
-                <a:latin typeface="Arial"/>
+                <a:latin typeface="Roboto"/>
               </a:rPr>
               <a:t>Maintenance contracts brought in $355,300 this financial year to date, at a 59.5% gross margin (above the 37.6% overall).</a:t>
             </a:r>
@@ -17642,7 +19562,11 @@
           <a:bodyPr rtlCol="0" anchor="ctr"/>
           <a:lstStyle/>
           <a:p>
-            <a:pPr algn="ctr"/>
+            <a:pPr algn="ctr">
+              <a:defRPr>
+                <a:latin typeface="Roboto"/>
+              </a:defRPr>
+            </a:pPr>
           </a:p>
         </p:txBody>
       </p:sp>
@@ -17668,12 +19592,17 @@
           </a:bodyPr>
           <a:lstStyle/>
           <a:p>
+            <a:pPr>
+              <a:defRPr>
+                <a:latin typeface="Roboto"/>
+              </a:defRPr>
+            </a:pPr>
             <a:r>
               <a:rPr sz="1100" b="1">
                 <a:solidFill>
                   <a:srgbClr val="5F6F63"/>
                 </a:solidFill>
-                <a:latin typeface="Arial"/>
+                <a:latin typeface="Roboto"/>
               </a:rPr>
               <a:t>WHAT YOU'D DO ABOUT IT</a:t>
             </a:r>
@@ -17702,12 +19631,17 @@
           </a:bodyPr>
           <a:lstStyle/>
           <a:p>
+            <a:pPr>
+              <a:defRPr>
+                <a:latin typeface="Roboto"/>
+              </a:defRPr>
+            </a:pPr>
             <a:r>
               <a:rPr sz="1600" b="0">
                 <a:solidFill>
                   <a:srgbClr val="25342A"/>
                 </a:solidFill>
-                <a:latin typeface="Arial"/>
+                <a:latin typeface="Roboto"/>
               </a:rPr>
               <a:t>Maintenance contracts: 59.5% gross margin, 19.7 points clear of the 39.8% overheads need.</a:t>
             </a:r>
@@ -17736,12 +19670,17 @@
           </a:bodyPr>
           <a:lstStyle/>
           <a:p>
+            <a:pPr>
+              <a:defRPr>
+                <a:latin typeface="Roboto"/>
+              </a:defRPr>
+            </a:pPr>
             <a:r>
               <a:rPr sz="900" b="0">
                 <a:solidFill>
                   <a:srgbClr val="5F6F63"/>
                 </a:solidFill>
-                <a:latin typeface="Arial"/>
+                <a:latin typeface="Roboto"/>
               </a:rPr>
               <a:t>growth.pptx</a:t>
             </a:r>
@@ -17770,13 +19709,17 @@
           </a:bodyPr>
           <a:lstStyle/>
           <a:p>
-            <a:pPr algn="ctr"/>
+            <a:pPr algn="ctr">
+              <a:defRPr>
+                <a:latin typeface="Roboto"/>
+              </a:defRPr>
+            </a:pPr>
             <a:r>
               <a:rPr sz="900" b="0">
                 <a:solidFill>
                   <a:srgbClr val="5F6F63"/>
                 </a:solidFill>
-                <a:latin typeface="Arial"/>
+                <a:latin typeface="Roboto"/>
               </a:rPr>
               <a:t>Data retrieved 2pm, Tue 6 Oct 2026 · Sample data</a:t>
             </a:r>
@@ -17805,13 +19748,17 @@
           </a:bodyPr>
           <a:lstStyle/>
           <a:p>
-            <a:pPr algn="r"/>
+            <a:pPr algn="r">
+              <a:defRPr>
+                <a:latin typeface="Roboto"/>
+              </a:defRPr>
+            </a:pPr>
             <a:r>
               <a:rPr sz="900" b="0">
                 <a:solidFill>
                   <a:srgbClr val="5F6F63"/>
                 </a:solidFill>
-                <a:latin typeface="Arial"/>
+                <a:latin typeface="Roboto"/>
               </a:rPr>
               <a:t>Slide 7 of 27</a:t>
             </a:r>
@@ -17875,7 +19822,11 @@
           <a:bodyPr rtlCol="0" anchor="ctr"/>
           <a:lstStyle/>
           <a:p>
-            <a:pPr algn="ctr"/>
+            <a:pPr algn="ctr">
+              <a:defRPr>
+                <a:latin typeface="Roboto"/>
+              </a:defRPr>
+            </a:pPr>
           </a:p>
         </p:txBody>
       </p:sp>
@@ -17901,12 +19852,17 @@
           </a:bodyPr>
           <a:lstStyle/>
           <a:p>
+            <a:pPr>
+              <a:defRPr>
+                <a:latin typeface="Roboto"/>
+              </a:defRPr>
+            </a:pPr>
             <a:r>
               <a:rPr sz="1000" b="0">
                 <a:solidFill>
                   <a:srgbClr val="5F6F63"/>
                 </a:solidFill>
-                <a:latin typeface="Arial"/>
+                <a:latin typeface="Roboto"/>
               </a:rPr>
               <a:t>SME sample businesses · Which products and services are growing?</a:t>
             </a:r>
@@ -17935,12 +19891,17 @@
           </a:bodyPr>
           <a:lstStyle/>
           <a:p>
+            <a:pPr>
+              <a:defRPr>
+                <a:latin typeface="Roboto"/>
+              </a:defRPr>
+            </a:pPr>
             <a:r>
               <a:rPr sz="2400" b="1">
                 <a:solidFill>
                   <a:srgbClr val="25342A"/>
                 </a:solidFill>
-                <a:latin typeface="Arial"/>
+                <a:latin typeface="Roboto"/>
               </a:rPr>
               <a:t>Headline numbers · Trades · Line: Installations</a:t>
             </a:r>
@@ -17988,7 +19949,11 @@
           <a:bodyPr rtlCol="0" anchor="ctr"/>
           <a:lstStyle/>
           <a:p>
-            <a:pPr algn="ctr"/>
+            <a:pPr algn="ctr">
+              <a:defRPr>
+                <a:latin typeface="Roboto"/>
+              </a:defRPr>
+            </a:pPr>
           </a:p>
         </p:txBody>
       </p:sp>
@@ -18014,12 +19979,17 @@
           </a:bodyPr>
           <a:lstStyle/>
           <a:p>
+            <a:pPr>
+              <a:defRPr>
+                <a:latin typeface="Roboto"/>
+              </a:defRPr>
+            </a:pPr>
             <a:r>
               <a:rPr sz="1200" b="0">
                 <a:solidFill>
                   <a:srgbClr val="5F6F63"/>
                 </a:solidFill>
-                <a:latin typeface="Arial"/>
+                <a:latin typeface="Roboto"/>
               </a:rPr>
               <a:t>April against April last year</a:t>
             </a:r>
@@ -18048,12 +20018,17 @@
           </a:bodyPr>
           <a:lstStyle/>
           <a:p>
+            <a:pPr>
+              <a:defRPr>
+                <a:latin typeface="Roboto"/>
+              </a:defRPr>
+            </a:pPr>
             <a:r>
               <a:rPr sz="3000" b="1">
                 <a:solidFill>
                   <a:srgbClr val="2F7A5D"/>
                 </a:solidFill>
-                <a:latin typeface="Arial"/>
+                <a:latin typeface="Roboto"/>
               </a:rPr>
               <a:t>39.4%</a:t>
             </a:r>
@@ -18082,12 +20057,17 @@
           </a:bodyPr>
           <a:lstStyle/>
           <a:p>
+            <a:pPr>
+              <a:defRPr>
+                <a:latin typeface="Roboto"/>
+              </a:defRPr>
+            </a:pPr>
             <a:r>
               <a:rPr sz="1100" b="0">
                 <a:solidFill>
                   <a:srgbClr val="5F6F63"/>
                 </a:solidFill>
-                <a:latin typeface="Arial"/>
+                <a:latin typeface="Roboto"/>
               </a:rPr>
               <a:t>$104,400 against $74,900</a:t>
             </a:r>
@@ -18135,7 +20115,11 @@
           <a:bodyPr rtlCol="0" anchor="ctr"/>
           <a:lstStyle/>
           <a:p>
-            <a:pPr algn="ctr"/>
+            <a:pPr algn="ctr">
+              <a:defRPr>
+                <a:latin typeface="Roboto"/>
+              </a:defRPr>
+            </a:pPr>
           </a:p>
         </p:txBody>
       </p:sp>
@@ -18161,12 +20145,17 @@
           </a:bodyPr>
           <a:lstStyle/>
           <a:p>
+            <a:pPr>
+              <a:defRPr>
+                <a:latin typeface="Roboto"/>
+              </a:defRPr>
+            </a:pPr>
             <a:r>
               <a:rPr sz="1200" b="0">
                 <a:solidFill>
                   <a:srgbClr val="5F6F63"/>
                 </a:solidFill>
-                <a:latin typeface="Arial"/>
+                <a:latin typeface="Roboto"/>
               </a:rPr>
               <a:t>Year to date (Jul to Apr 2026)</a:t>
             </a:r>
@@ -18195,12 +20184,17 @@
           </a:bodyPr>
           <a:lstStyle/>
           <a:p>
+            <a:pPr>
+              <a:defRPr>
+                <a:latin typeface="Roboto"/>
+              </a:defRPr>
+            </a:pPr>
             <a:r>
               <a:rPr sz="3000" b="1">
                 <a:solidFill>
                   <a:srgbClr val="2F7A5D"/>
                 </a:solidFill>
-                <a:latin typeface="Arial"/>
+                <a:latin typeface="Roboto"/>
               </a:rPr>
               <a:t>$1,011,500</a:t>
             </a:r>
@@ -18229,12 +20223,17 @@
           </a:bodyPr>
           <a:lstStyle/>
           <a:p>
+            <a:pPr>
+              <a:defRPr>
+                <a:latin typeface="Roboto"/>
+              </a:defRPr>
+            </a:pPr>
             <a:r>
               <a:rPr sz="1100" b="0">
                 <a:solidFill>
                   <a:srgbClr val="5F6F63"/>
                 </a:solidFill>
-                <a:latin typeface="Arial"/>
+                <a:latin typeface="Roboto"/>
               </a:rPr>
               <a:t>same period last year: not in the data</a:t>
             </a:r>
@@ -18282,7 +20281,11 @@
           <a:bodyPr rtlCol="0" anchor="ctr"/>
           <a:lstStyle/>
           <a:p>
-            <a:pPr algn="ctr"/>
+            <a:pPr algn="ctr">
+              <a:defRPr>
+                <a:latin typeface="Roboto"/>
+              </a:defRPr>
+            </a:pPr>
           </a:p>
         </p:txBody>
       </p:sp>
@@ -18308,12 +20311,17 @@
           </a:bodyPr>
           <a:lstStyle/>
           <a:p>
+            <a:pPr>
+              <a:defRPr>
+                <a:latin typeface="Roboto"/>
+              </a:defRPr>
+            </a:pPr>
             <a:r>
               <a:rPr sz="1200" b="0">
                 <a:solidFill>
                   <a:srgbClr val="5F6F63"/>
                 </a:solidFill>
-                <a:latin typeface="Arial"/>
+                <a:latin typeface="Roboto"/>
               </a:rPr>
               <a:t>Gross margin, year to date</a:t>
             </a:r>
@@ -18342,12 +20350,17 @@
           </a:bodyPr>
           <a:lstStyle/>
           <a:p>
+            <a:pPr>
+              <a:defRPr>
+                <a:latin typeface="Roboto"/>
+              </a:defRPr>
+            </a:pPr>
             <a:r>
               <a:rPr sz="3000" b="1">
                 <a:solidFill>
                   <a:srgbClr val="2F7A5D"/>
                 </a:solidFill>
-                <a:latin typeface="Arial"/>
+                <a:latin typeface="Roboto"/>
               </a:rPr>
               <a:t>28.4%</a:t>
             </a:r>
@@ -18376,12 +20389,17 @@
           </a:bodyPr>
           <a:lstStyle/>
           <a:p>
+            <a:pPr>
+              <a:defRPr>
+                <a:latin typeface="Roboto"/>
+              </a:defRPr>
+            </a:pPr>
             <a:r>
               <a:rPr sz="1100" b="0">
                 <a:solidFill>
                   <a:srgbClr val="5F6F63"/>
                 </a:solidFill>
-                <a:latin typeface="Arial"/>
+                <a:latin typeface="Roboto"/>
               </a:rPr>
               <a:t>$287,262 before overheads</a:t>
             </a:r>
@@ -18410,12 +20428,17 @@
           </a:bodyPr>
           <a:lstStyle/>
           <a:p>
+            <a:pPr>
+              <a:defRPr>
+                <a:latin typeface="Roboto"/>
+              </a:defRPr>
+            </a:pPr>
             <a:r>
               <a:rPr sz="900" b="0">
                 <a:solidFill>
                   <a:srgbClr val="5F6F63"/>
                 </a:solidFill>
-                <a:latin typeface="Arial"/>
+                <a:latin typeface="Roboto"/>
               </a:rPr>
               <a:t>growth.pptx</a:t>
             </a:r>
@@ -18444,13 +20467,17 @@
           </a:bodyPr>
           <a:lstStyle/>
           <a:p>
-            <a:pPr algn="ctr"/>
+            <a:pPr algn="ctr">
+              <a:defRPr>
+                <a:latin typeface="Roboto"/>
+              </a:defRPr>
+            </a:pPr>
             <a:r>
               <a:rPr sz="900" b="0">
                 <a:solidFill>
                   <a:srgbClr val="5F6F63"/>
                 </a:solidFill>
-                <a:latin typeface="Arial"/>
+                <a:latin typeface="Roboto"/>
               </a:rPr>
               <a:t>Data retrieved 2pm, Tue 6 Oct 2026 · Sample data</a:t>
             </a:r>
@@ -18479,13 +20506,17 @@
           </a:bodyPr>
           <a:lstStyle/>
           <a:p>
-            <a:pPr algn="r"/>
+            <a:pPr algn="r">
+              <a:defRPr>
+                <a:latin typeface="Roboto"/>
+              </a:defRPr>
+            </a:pPr>
             <a:r>
               <a:rPr sz="900" b="0">
                 <a:solidFill>
                   <a:srgbClr val="5F6F63"/>
                 </a:solidFill>
-                <a:latin typeface="Arial"/>
+                <a:latin typeface="Roboto"/>
               </a:rPr>
               <a:t>Slide 8 of 27</a:t>
             </a:r>
@@ -18549,7 +20580,11 @@
           <a:bodyPr rtlCol="0" anchor="ctr"/>
           <a:lstStyle/>
           <a:p>
-            <a:pPr algn="ctr"/>
+            <a:pPr algn="ctr">
+              <a:defRPr>
+                <a:latin typeface="Roboto"/>
+              </a:defRPr>
+            </a:pPr>
           </a:p>
         </p:txBody>
       </p:sp>
@@ -18575,12 +20610,17 @@
           </a:bodyPr>
           <a:lstStyle/>
           <a:p>
+            <a:pPr>
+              <a:defRPr>
+                <a:latin typeface="Roboto"/>
+              </a:defRPr>
+            </a:pPr>
             <a:r>
               <a:rPr sz="1000" b="0">
                 <a:solidFill>
                   <a:srgbClr val="5F6F63"/>
                 </a:solidFill>
-                <a:latin typeface="Arial"/>
+                <a:latin typeface="Roboto"/>
               </a:rPr>
               <a:t>SME sample businesses · Which products and services are growing?</a:t>
             </a:r>
@@ -18609,12 +20649,17 @@
           </a:bodyPr>
           <a:lstStyle/>
           <a:p>
+            <a:pPr>
+              <a:defRPr>
+                <a:latin typeface="Roboto"/>
+              </a:defRPr>
+            </a:pPr>
             <a:r>
               <a:rPr sz="2400" b="1">
                 <a:solidFill>
                   <a:srgbClr val="25342A"/>
                 </a:solidFill>
-                <a:latin typeface="Arial"/>
+                <a:latin typeface="Roboto"/>
               </a:rPr>
               <a:t>What it shows · Trades · Line: Installations</a:t>
             </a:r>
@@ -18662,7 +20707,11 @@
           <a:bodyPr rtlCol="0" anchor="ctr"/>
           <a:lstStyle/>
           <a:p>
-            <a:pPr algn="ctr"/>
+            <a:pPr algn="ctr">
+              <a:defRPr>
+                <a:latin typeface="Roboto"/>
+              </a:defRPr>
+            </a:pPr>
           </a:p>
         </p:txBody>
       </p:sp>
@@ -18688,12 +20737,17 @@
           </a:bodyPr>
           <a:lstStyle/>
           <a:p>
+            <a:pPr>
+              <a:defRPr>
+                <a:latin typeface="Roboto"/>
+              </a:defRPr>
+            </a:pPr>
             <a:r>
               <a:rPr sz="1100" b="1">
                 <a:solidFill>
                   <a:srgbClr val="5F6F63"/>
                 </a:solidFill>
-                <a:latin typeface="Arial"/>
+                <a:latin typeface="Roboto"/>
               </a:rPr>
               <a:t>WHAT IT SHOWS</a:t>
             </a:r>
@@ -18722,12 +20776,17 @@
           </a:bodyPr>
           <a:lstStyle/>
           <a:p>
+            <a:pPr>
+              <a:defRPr>
+                <a:latin typeface="Roboto"/>
+              </a:defRPr>
+            </a:pPr>
             <a:r>
               <a:rPr sz="1600" b="0">
                 <a:solidFill>
                   <a:srgbClr val="25342A"/>
                 </a:solidFill>
-                <a:latin typeface="Arial"/>
+                <a:latin typeface="Roboto"/>
               </a:rPr>
               <a:t>Installations brought in $1,011,500 this financial year to date, at a 28.4% gross margin (below the 37.6% overall).</a:t>
             </a:r>
@@ -18775,7 +20834,11 @@
           <a:bodyPr rtlCol="0" anchor="ctr"/>
           <a:lstStyle/>
           <a:p>
-            <a:pPr algn="ctr"/>
+            <a:pPr algn="ctr">
+              <a:defRPr>
+                <a:latin typeface="Roboto"/>
+              </a:defRPr>
+            </a:pPr>
           </a:p>
         </p:txBody>
       </p:sp>
@@ -18801,12 +20864,17 @@
           </a:bodyPr>
           <a:lstStyle/>
           <a:p>
+            <a:pPr>
+              <a:defRPr>
+                <a:latin typeface="Roboto"/>
+              </a:defRPr>
+            </a:pPr>
             <a:r>
               <a:rPr sz="1100" b="1">
                 <a:solidFill>
                   <a:srgbClr val="5F6F63"/>
                 </a:solidFill>
-                <a:latin typeface="Arial"/>
+                <a:latin typeface="Roboto"/>
               </a:rPr>
               <a:t>WHAT YOU'D DO ABOUT IT</a:t>
             </a:r>
@@ -18835,12 +20903,17 @@
           </a:bodyPr>
           <a:lstStyle/>
           <a:p>
+            <a:pPr>
+              <a:defRPr>
+                <a:latin typeface="Roboto"/>
+              </a:defRPr>
+            </a:pPr>
             <a:r>
               <a:rPr sz="1600" b="0">
                 <a:solidFill>
                   <a:srgbClr val="25342A"/>
                 </a:solidFill>
-                <a:latin typeface="Arial"/>
+                <a:latin typeface="Roboto"/>
               </a:rPr>
               <a:t>Installations: 28.4% gross margin, below the 39.8% needed to cover overheads.</a:t>
             </a:r>
@@ -18869,12 +20942,17 @@
           </a:bodyPr>
           <a:lstStyle/>
           <a:p>
+            <a:pPr>
+              <a:defRPr>
+                <a:latin typeface="Roboto"/>
+              </a:defRPr>
+            </a:pPr>
             <a:r>
               <a:rPr sz="900" b="0">
                 <a:solidFill>
                   <a:srgbClr val="5F6F63"/>
                 </a:solidFill>
-                <a:latin typeface="Arial"/>
+                <a:latin typeface="Roboto"/>
               </a:rPr>
               <a:t>growth.pptx</a:t>
             </a:r>
@@ -18903,13 +20981,17 @@
           </a:bodyPr>
           <a:lstStyle/>
           <a:p>
-            <a:pPr algn="ctr"/>
+            <a:pPr algn="ctr">
+              <a:defRPr>
+                <a:latin typeface="Roboto"/>
+              </a:defRPr>
+            </a:pPr>
             <a:r>
               <a:rPr sz="900" b="0">
                 <a:solidFill>
                   <a:srgbClr val="5F6F63"/>
                 </a:solidFill>
-                <a:latin typeface="Arial"/>
+                <a:latin typeface="Roboto"/>
               </a:rPr>
               <a:t>Data retrieved 2pm, Tue 6 Oct 2026 · Sample data</a:t>
             </a:r>
@@ -18938,13 +21020,17 @@
           </a:bodyPr>
           <a:lstStyle/>
           <a:p>
-            <a:pPr algn="r"/>
+            <a:pPr algn="r">
+              <a:defRPr>
+                <a:latin typeface="Roboto"/>
+              </a:defRPr>
+            </a:pPr>
             <a:r>
               <a:rPr sz="900" b="0">
                 <a:solidFill>
                   <a:srgbClr val="5F6F63"/>
                 </a:solidFill>
-                <a:latin typeface="Arial"/>
+                <a:latin typeface="Roboto"/>
               </a:rPr>
               <a:t>Slide 9 of 27</a:t>
             </a:r>

--- a/media/exports/reports/2026-04/growth.pptx
+++ b/media/exports/reports/2026-04/growth.pptx
@@ -5791,7 +5791,7 @@
                 </a:solidFill>
                 <a:latin typeface="Roboto"/>
               </a:rPr>
-              <a:t>Call-outs and repairs: 43.7% gross margin, 3.8 points clear of the 39.8% overheads need.</a:t>
+              <a:t>Call-outs and repairs: 43.7% gross margin, 8.7 points over the 35.0% target ($21,176 ahead on $243,781 this financial year to date).</a:t>
             </a:r>
           </a:p>
         </p:txBody>
@@ -6090,7 +6090,7 @@
                 </a:solidFill>
                 <a:latin typeface="Roboto"/>
               </a:rPr>
-              <a:t>Gross margin = revenue less direct cost (materials, subcontractors and time at cost for trades; contractors and consultant time for services), before overheads. Growth is year on year: each month against the same month a year earlier.</a:t>
+              <a:t>Growth is year on year: each month against the same month a year earlier.</a:t>
             </a:r>
           </a:p>
         </p:txBody>
@@ -6407,7 +6407,7 @@
                 </a:solidFill>
                 <a:latin typeface="Roboto"/>
               </a:rPr>
-              <a:t>Gross margin = revenue less direct cost (materials, subcontractors and time at cost for trades; contractors and consultant time for services), before overheads. Growth is year on year: each month against the same month a year earlier.</a:t>
+              <a:t>Growth is year on year: each month against the same month a year earlier.</a:t>
             </a:r>
           </a:p>
         </p:txBody>
@@ -10173,7 +10173,7 @@
                 </a:solidFill>
                 <a:latin typeface="Roboto"/>
               </a:rPr>
-              <a:t>Training: 74.6% gross margin, the most profitable work you do. Projects: 61.6% gross margin, below the 88.6% needed to cover overheads.</a:t>
+              <a:t>Projects: 61.6% gross margin, 21.6 points over the 40.0% target ($109,938 ahead on $509,230 this financial year to date). Training: 74.6% gross margin, 34.6 points over the 40.0% target ($24,420 ahead on $70,600 this financial year to date).</a:t>
             </a:r>
           </a:p>
         </p:txBody>
@@ -11832,7 +11832,7 @@
                 </a:solidFill>
                 <a:latin typeface="Roboto"/>
               </a:rPr>
-              <a:t>Projects: 61.6% gross margin, below the 88.6% needed to cover overheads.</a:t>
+              <a:t>Projects: 61.6% gross margin, 21.6 points over the 40.0% target ($109,938 ahead on $509,230 this financial year to date).</a:t>
             </a:r>
           </a:p>
         </p:txBody>
@@ -13104,7 +13104,7 @@
                 </a:solidFill>
                 <a:latin typeface="Roboto"/>
               </a:rPr>
-              <a:t>Retainers: 66.0% gross margin, below the 88.6% needed to cover overheads.</a:t>
+              <a:t>Retainers: 66.0% gross margin, 26.0 points over the 40.0% target ($61,200 ahead on $235,000 this financial year to date).</a:t>
             </a:r>
           </a:p>
         </p:txBody>
@@ -14376,7 +14376,7 @@
                 </a:solidFill>
                 <a:latin typeface="Roboto"/>
               </a:rPr>
-              <a:t>Training: 74.6% gross margin, below the 88.6% needed to cover overheads.</a:t>
+              <a:t>Training: 74.6% gross margin, 34.6 points over the 40.0% target ($24,420 ahead on $70,600 this financial year to date).</a:t>
             </a:r>
           </a:p>
         </p:txBody>
@@ -14675,7 +14675,7 @@
                 </a:solidFill>
                 <a:latin typeface="Roboto"/>
               </a:rPr>
-              <a:t>Gross margin = revenue less direct cost (materials, subcontractors and time at cost for trades; contractors and consultant time for services), before overheads. Growth is year on year: each month against the same month a year earlier.</a:t>
+              <a:t>Growth is year on year: each month against the same month a year earlier.</a:t>
             </a:r>
           </a:p>
         </p:txBody>
@@ -14992,7 +14992,7 @@
                 </a:solidFill>
                 <a:latin typeface="Roboto"/>
               </a:rPr>
-              <a:t>Gross margin = revenue less direct cost (materials, subcontractors and time at cost for trades; contractors and consultant time for services), before overheads. Growth is year on year: each month against the same month a year earlier.</a:t>
+              <a:t>Growth is year on year: each month against the same month a year earlier.</a:t>
             </a:r>
           </a:p>
         </p:txBody>
@@ -18371,7 +18371,7 @@
                 </a:solidFill>
                 <a:latin typeface="Roboto"/>
               </a:rPr>
-              <a:t>Maintenance contracts: 59.5% gross margin, the most profitable work you do. Installations: 28.4% gross margin, below the 39.8% needed to cover overheads.</a:t>
+              <a:t>Installations: 28.4% gross margin, 6.6 points under the 35.0% target: about $66,763 on $1,011,500 of revenue this financial year to date. It's below the 39.8% needed to cover overheads, too. Maintenance contracts: 59.5% gross margin, 24.5 points over the 35.0% target ($87,069 ahead on $355,300 this financial year to date).</a:t>
             </a:r>
           </a:p>
         </p:txBody>
@@ -19643,7 +19643,7 @@
                 </a:solidFill>
                 <a:latin typeface="Roboto"/>
               </a:rPr>
-              <a:t>Maintenance contracts: 59.5% gross margin, 19.7 points clear of the 39.8% overheads need.</a:t>
+              <a:t>Maintenance contracts: 59.5% gross margin, 24.5 points over the 35.0% target ($87,069 ahead on $355,300 this financial year to date).</a:t>
             </a:r>
           </a:p>
         </p:txBody>
@@ -20915,7 +20915,7 @@
                 </a:solidFill>
                 <a:latin typeface="Roboto"/>
               </a:rPr>
-              <a:t>Installations: 28.4% gross margin, below the 39.8% needed to cover overheads.</a:t>
+              <a:t>Installations: 28.4% gross margin, 6.6 points under the 35.0% target: about $66,763 on $1,011,500 of revenue this financial year to date. It's below the 39.8% needed to cover overheads, too.</a:t>
             </a:r>
           </a:p>
         </p:txBody>
